--- a/docs/decks/v8b_nmd_benchmark_DES_en.pptx
+++ b/docs/decks/v8b_nmd_benchmark_DES_en.pptx
@@ -139,7 +139,7 @@
           </c:tx>
           <c:spPr>
             <a:solidFill>
-              <a:srgbClr val="CDFCE3"/>
+              <a:srgbClr val="5E8478"/>
             </a:solidFill>
             <a:effectLst/>
           </c:spPr>
@@ -174,7 +174,7 @@
             <c:bubble3D val="0"/>
             <c:spPr>
               <a:solidFill>
-                <a:srgbClr val="CDFCE3"/>
+                <a:srgbClr val="5E8478"/>
               </a:solidFill>
               <a:effectLst/>
             </c:spPr>
@@ -196,7 +196,7 @@
             <c:bubble3D val="0"/>
             <c:spPr>
               <a:solidFill>
-                <a:srgbClr val="5E8478"/>
+                <a:srgbClr val="CDFCE3"/>
               </a:solidFill>
               <a:effectLst/>
             </c:spPr>
@@ -211,10 +211,10 @@
                     <c:v>NMD2023</c:v>
                   </c:pt>
                   <c:pt idx="1">
-                    <c:v>v8b</c:v>
+                    <c:v>Distilled model</c:v>
                   </c:pt>
                   <c:pt idx="2">
-                    <c:v>NMD2018</c:v>
+                    <c:v>Forest-type layer (fractions)</c:v>
                   </c:pt>
                 </c:lvl>
               </c:multiLvlStrCache>
@@ -227,13 +227,13 @@
                 <c:formatCode>General</c:formatCode>
                 <c:ptCount val="3"/>
                 <c:pt idx="0">
-                  <c:v>49.3</c:v>
+                  <c:v>43.1</c:v>
                 </c:pt>
                 <c:pt idx="1">
-                  <c:v>46.3</c:v>
+                  <c:v>50.2</c:v>
                 </c:pt>
                 <c:pt idx="2">
-                  <c:v>40.6</c:v>
+                  <c:v>57.9</c:v>
                 </c:pt>
               </c:numCache>
             </c:numRef>
@@ -294,7 +294,7 @@
           <a:lstStyle/>
           <a:p>
             <a:pPr>
-              <a:defRPr sz="1400" b="0" i="0" u="none" strike="noStrike">
+              <a:defRPr sz="1200" b="0" i="0" u="none" strike="noStrike">
                 <a:solidFill>
                   <a:srgbClr val="FFFFFF"/>
                 </a:solidFill>
@@ -314,7 +314,7 @@
         <c:axId val="2094734552"/>
         <c:scaling>
           <c:orientation val="minMax"/>
-          <c:max val="52"/>
+          <c:max val="62"/>
           <c:min val="35"/>
         </c:scaling>
         <c:delete val="0"/>
@@ -395,7 +395,9 @@
     <c:autoTitleDeleted val="1"/>
     <c:plotArea>
       <c:layout/>
-      <c:lineChart>
+      <c:barChart>
+        <c:barDir val="col"/>
+        <c:grouping val="clustered"/>
         <c:varyColors val="0"/>
         <c:ser>
           <c:idx val="0"/>
@@ -406,27 +408,20 @@
               <c:strCache>
                 <c:ptCount val="1"/>
                 <c:pt idx="0">
-                  <c:v>mIoU</c:v>
+                  <c:v>overall</c:v>
                 </c:pt>
               </c:strCache>
             </c:strRef>
           </c:tx>
           <c:spPr>
             <a:solidFill>
-              <a:srgbClr val="FF826C"/>
+              <a:srgbClr val="5E8478"/>
             </a:solidFill>
-            <a:ln w="38100" cap="flat">
-              <a:solidFill>
-                <a:srgbClr val="FF826C"/>
-              </a:solidFill>
-              <a:prstDash val="solid"/>
-              <a:round/>
-            </a:ln>
             <a:effectLst/>
           </c:spPr>
           <c:invertIfNegative val="0"/>
           <c:dLbls>
-            <c:numFmt formatCode="0.000" sourceLinked="0"/>
+            <c:numFmt formatCode="0.0&quot;%&quot;" sourceLinked="0"/>
             <c:txPr>
               <a:bodyPr/>
               <a:lstStyle/>
@@ -441,7 +436,6 @@
                 </a:pPr>
               </a:p>
             </c:txPr>
-            <c:dLblPos val="t"/>
             <c:showLegendKey val="0"/>
             <c:showVal val="1"/>
             <c:showCatName val="0"/>
@@ -450,23 +444,61 @@
             <c:showBubbleSize val="0"/>
             <c:showLeaderLines val="0"/>
           </c:dLbls>
-          <c:marker>
-            <c:symbol val="circle"/>
-            <c:size val="7"/>
+          <c:dPt>
+            <c:idx val="0"/>
+            <c:invertIfNegative val="0"/>
+            <c:bubble3D val="0"/>
+            <c:spPr>
+              <a:solidFill>
+                <a:srgbClr val="5E8478"/>
+              </a:solidFill>
+              <a:effectLst/>
+            </c:spPr>
+          </c:dPt>
+          <c:dPt>
+            <c:idx val="1"/>
+            <c:invertIfNegative val="0"/>
+            <c:bubble3D val="0"/>
+            <c:spPr>
+              <a:solidFill>
+                <a:srgbClr val="5E8478"/>
+              </a:solidFill>
+              <a:effectLst/>
+            </c:spPr>
+          </c:dPt>
+          <c:dPt>
+            <c:idx val="2"/>
+            <c:invertIfNegative val="0"/>
+            <c:bubble3D val="0"/>
+            <c:spPr>
+              <a:solidFill>
+                <a:srgbClr val="FFFFFF"/>
+              </a:solidFill>
+              <a:effectLst/>
+            </c:spPr>
+          </c:dPt>
+          <c:dPt>
+            <c:idx val="3"/>
+            <c:invertIfNegative val="0"/>
+            <c:bubble3D val="0"/>
             <c:spPr>
               <a:solidFill>
                 <a:srgbClr val="FF826C"/>
               </a:solidFill>
-              <a:ln w="9525" cap="flat">
-                <a:solidFill>
-                  <a:srgbClr val="FF826C"/>
-                </a:solidFill>
-                <a:prstDash val="solid"/>
-                <a:round/>
-              </a:ln>
               <a:effectLst/>
             </c:spPr>
-          </c:marker>
+          </c:dPt>
+          <c:dPt>
+            <c:idx val="4"/>
+            <c:invertIfNegative val="0"/>
+            <c:bubble3D val="0"/>
+            <c:spPr>
+              <a:solidFill>
+                <a:srgbClr val="CDFCE3"/>
+              </a:solidFill>
+              <a:effectLst/>
+            </c:spPr>
+          </c:dPt>
           <c:cat>
             <c:multiLvlStrRef>
               <c:f>Sheet1!$A$2:$A$6</c:f>
@@ -474,19 +506,19 @@
                 <c:ptCount val="5"/>
                 <c:lvl>
                   <c:pt idx="0">
-                    <c:v>v6a</c:v>
+                    <c:v>v8b (NMD2018)</c:v>
                   </c:pt>
                   <c:pt idx="1">
-                    <c:v>300M/256</c:v>
+                    <c:v>NMD2023 labels</c:v>
                   </c:pt>
                   <c:pt idx="2">
-                    <c:v>600M/512</c:v>
+                    <c:v>NMD2023 itself</c:v>
                   </c:pt>
                   <c:pt idx="3">
-                    <c:v>v8</c:v>
+                    <c:v>Distilled</c:v>
                   </c:pt>
                   <c:pt idx="4">
-                    <c:v>v8b</c:v>
+                    <c:v>NFI head (OOF)</c:v>
                   </c:pt>
                 </c:lvl>
               </c:multiLvlStrCache>
@@ -499,27 +531,26 @@
                 <c:formatCode>General</c:formatCode>
                 <c:ptCount val="5"/>
                 <c:pt idx="0">
-                  <c:v>0.366</c:v>
+                  <c:v>46.5</c:v>
                 </c:pt>
                 <c:pt idx="1">
-                  <c:v>0.472</c:v>
+                  <c:v>46</c:v>
                 </c:pt>
                 <c:pt idx="2">
-                  <c:v>0.477</c:v>
+                  <c:v>49.3</c:v>
                 </c:pt>
                 <c:pt idx="3">
-                  <c:v>0.515</c:v>
+                  <c:v>52.7</c:v>
                 </c:pt>
                 <c:pt idx="4">
-                  <c:v>0.535</c:v>
+                  <c:v>63.7</c:v>
                 </c:pt>
               </c:numCache>
             </c:numRef>
           </c:val>
-          <c:smooth val="1"/>
         </c:ser>
         <c:dLbls>
-          <c:numFmt formatCode="0.000" sourceLinked="0"/>
+          <c:numFmt formatCode="0.0&quot;%&quot;" sourceLinked="0"/>
           <c:txPr>
             <a:bodyPr/>
             <a:lstStyle/>
@@ -534,7 +565,6 @@
               </a:pPr>
             </a:p>
           </c:txPr>
-          <c:dLblPos val="t"/>
           <c:showLegendKey val="0"/>
           <c:showVal val="1"/>
           <c:showCatName val="0"/>
@@ -543,11 +573,12 @@
           <c:showBubbleSize val="0"/>
           <c:showLeaderLines val="0"/>
         </c:dLbls>
-        <c:marker val="1"/>
+        <c:gapWidth val="40"/>
+        <c:overlap val="0"/>
         <c:axId val="2094734554"/>
         <c:axId val="2094734552"/>
         <c:axId val="2094734556"/>
-      </c:lineChart>
+      </c:barChart>
       <c:catAx>
         <c:axId val="2094734554"/>
         <c:scaling>
@@ -573,7 +604,7 @@
           <a:lstStyle/>
           <a:p>
             <a:pPr>
-              <a:defRPr sz="1200" b="0" i="0" u="none" strike="noStrike">
+              <a:defRPr sz="1000" b="0" i="0" u="none" strike="noStrike">
                 <a:solidFill>
                   <a:srgbClr val="FFFFFF"/>
                 </a:solidFill>
@@ -593,8 +624,8 @@
         <c:axId val="2094734552"/>
         <c:scaling>
           <c:orientation val="minMax"/>
-          <c:max val="0.6"/>
-          <c:min val="0.3"/>
+          <c:max val="68"/>
+          <c:min val="40"/>
         </c:scaling>
         <c:delete val="0"/>
         <c:axPos val="l"/>
@@ -640,7 +671,7 @@
         <c:crossAx val="2094734554"/>
         <c:crosses val="autoZero"/>
         <c:crossBetween val="between"/>
-        <c:majorUnit val="0.1"/>
+        <c:majorUnit val="5"/>
       </c:valAx>
       <c:spPr>
         <a:noFill/>
@@ -1847,8 +1878,8 @@
         </p:nvSpPr>
         <p:spPr>
           <a:xfrm>
-            <a:off x="594360" y="1005840"/>
-            <a:ext cx="7315200" cy="1371600"/>
+            <a:off x="594360" y="914400"/>
+            <a:ext cx="8229600" cy="1371600"/>
           </a:xfrm>
           <a:prstGeom prst="rect">
             <a:avLst/>
@@ -1864,7 +1895,7 @@
               <a:buNone/>
             </a:pPr>
             <a:r>
-              <a:rPr lang="en-US" sz="9200" b="1" dirty="0">
+              <a:rPr lang="en-US" sz="8000" b="1" dirty="0">
                 <a:solidFill>
                   <a:srgbClr val="FFFFFF"/>
                 </a:solidFill>
@@ -1872,9 +1903,9 @@
                 <a:ea typeface="Space Grotesk" pitchFamily="34" charset="-122"/>
                 <a:cs typeface="Space Grotesk" pitchFamily="34" charset="-120"/>
               </a:rPr>
-              <a:t>v8b</a:t>
-            </a:r>
-            <a:endParaRPr lang="en-US" sz="9200" dirty="0"/>
+              <a:t>v8b-NFI</a:t>
+            </a:r>
+            <a:endParaRPr lang="en-US" sz="8000" dirty="0"/>
           </a:p>
         </p:txBody>
       </p:sp>
@@ -1886,7 +1917,7 @@
         </p:nvSpPr>
         <p:spPr>
           <a:xfrm>
-            <a:off x="658368" y="2377440"/>
+            <a:off x="658368" y="2240280"/>
             <a:ext cx="10058400" cy="548640"/>
           </a:xfrm>
           <a:prstGeom prst="rect">
@@ -1911,7 +1942,7 @@
                 <a:ea typeface="Space Grotesk" pitchFamily="34" charset="-122"/>
                 <a:cs typeface="Space Grotesk" pitchFamily="34" charset="-120"/>
               </a:rPr>
-              <a:t>Multitemporal Sentinel-2 land-cover model for Sweden</a:t>
+              <a:t>Field-calibrated land-cover model for Sweden</a:t>
             </a:r>
             <a:endParaRPr lang="en-US" sz="2200" dirty="0"/>
           </a:p>
@@ -1925,7 +1956,7 @@
         </p:nvSpPr>
         <p:spPr>
           <a:xfrm>
-            <a:off x="640080" y="3200400"/>
+            <a:off x="640080" y="3108960"/>
             <a:ext cx="10881360" cy="1920240"/>
           </a:xfrm>
           <a:prstGeom prst="roundRect">
@@ -1954,7 +1985,7 @@
         </p:nvSpPr>
         <p:spPr>
           <a:xfrm>
-            <a:off x="1005840" y="3474720"/>
+            <a:off x="1005840" y="3383280"/>
             <a:ext cx="10149840" cy="822960"/>
           </a:xfrm>
           <a:prstGeom prst="rect">
@@ -1971,7 +2002,7 @@
               <a:buNone/>
             </a:pPr>
             <a:r>
-              <a:rPr lang="en-US" sz="2700" b="1" dirty="0">
+              <a:rPr lang="en-US" sz="2900" b="1" dirty="0">
                 <a:solidFill>
                   <a:srgbClr val="FFFFFF"/>
                 </a:solidFill>
@@ -1979,13 +2010,13 @@
                 <a:ea typeface="Space Grotesk" pitchFamily="34" charset="-122"/>
                 <a:cs typeface="Space Grotesk" pitchFamily="34" charset="-120"/>
               </a:rPr>
-              <a:t>v8b beats its own label source NMD2018 — </a:t>
+              <a:t>The model now beats NMD2023 — </a:t>
             </a:r>
             <a:pPr indent="0" marL="0">
               <a:buNone/>
             </a:pPr>
             <a:r>
-              <a:rPr lang="en-US" sz="2700" b="1" dirty="0">
+              <a:rPr lang="en-US" sz="2900" b="1" dirty="0">
                 <a:solidFill>
                   <a:srgbClr val="FF826C"/>
                 </a:solidFill>
@@ -1993,9 +2024,9 @@
                 <a:ea typeface="Space Grotesk" pitchFamily="34" charset="-122"/>
                 <a:cs typeface="Space Grotesk" pitchFamily="34" charset="-120"/>
               </a:rPr>
-              <a:t>and keeps pace with the new NMD2023</a:t>
-            </a:r>
-            <a:endParaRPr lang="en-US" sz="2700" dirty="0"/>
+              <a:t>on independent field data</a:t>
+            </a:r>
+            <a:endParaRPr lang="en-US" sz="2900" dirty="0"/>
           </a:p>
         </p:txBody>
       </p:sp>
@@ -2007,7 +2038,7 @@
         </p:nvSpPr>
         <p:spPr>
           <a:xfrm>
-            <a:off x="1005840" y="4480560"/>
+            <a:off x="1005840" y="4343400"/>
             <a:ext cx="10149840" cy="640080"/>
           </a:xfrm>
           <a:prstGeom prst="rect">
@@ -2032,7 +2063,7 @@
                 <a:ea typeface="Space Grotesk" pitchFamily="34" charset="-122"/>
                 <a:cs typeface="Space Grotesk" pitchFamily="34" charset="-120"/>
               </a:rPr>
-              <a:t>Field validation against the National Forest Inventory, 912 shared plots: overall 46.3% (v8b) · 40.6% (NMD2018) · 49.3% (NMD2023)</a:t>
+              <a:t>Held-out validation (209 NFI plots unseen by any training stage): full model 50.2% vs NMD2023 43.1% · forest-type layer 57.9%</a:t>
             </a:r>
             <a:endParaRPr lang="en-US" sz="1500" dirty="0"/>
           </a:p>
@@ -2046,8 +2077,8 @@
         </p:nvSpPr>
         <p:spPr>
           <a:xfrm>
-            <a:off x="640080" y="5440680"/>
-            <a:ext cx="2606040" cy="548640"/>
+            <a:off x="640080" y="5394960"/>
+            <a:ext cx="2697480" cy="548640"/>
           </a:xfrm>
           <a:prstGeom prst="rect">
             <a:avLst/>
@@ -2063,7 +2094,7 @@
               <a:buNone/>
             </a:pPr>
             <a:r>
-              <a:rPr lang="en-US" sz="2800" b="1" dirty="0">
+              <a:rPr lang="en-US" sz="2600" b="1" dirty="0">
                 <a:solidFill>
                   <a:srgbClr val="FFFFFF"/>
                 </a:solidFill>
@@ -2071,9 +2102,9 @@
                 <a:ea typeface="Space Grotesk" pitchFamily="34" charset="-122"/>
                 <a:cs typeface="Space Grotesk" pitchFamily="34" charset="-120"/>
               </a:rPr>
-              <a:t>23</a:t>
-            </a:r>
-            <a:endParaRPr lang="en-US" sz="2800" dirty="0"/>
+              <a:t>28</a:t>
+            </a:r>
+            <a:endParaRPr lang="en-US" sz="2600" dirty="0"/>
           </a:p>
         </p:txBody>
       </p:sp>
@@ -2085,8 +2116,8 @@
         </p:nvSpPr>
         <p:spPr>
           <a:xfrm>
-            <a:off x="640080" y="6035040"/>
-            <a:ext cx="2606040" cy="365760"/>
+            <a:off x="640080" y="5989320"/>
+            <a:ext cx="2697480" cy="365760"/>
           </a:xfrm>
           <a:prstGeom prst="rect">
             <a:avLst/>
@@ -2124,8 +2155,8 @@
         </p:nvSpPr>
         <p:spPr>
           <a:xfrm>
-            <a:off x="3502152" y="5440680"/>
-            <a:ext cx="2606040" cy="548640"/>
+            <a:off x="3502152" y="5394960"/>
+            <a:ext cx="2697480" cy="548640"/>
           </a:xfrm>
           <a:prstGeom prst="rect">
             <a:avLst/>
@@ -2141,7 +2172,7 @@
               <a:buNone/>
             </a:pPr>
             <a:r>
-              <a:rPr lang="en-US" sz="2800" b="1" dirty="0">
+              <a:rPr lang="en-US" sz="2600" b="1" dirty="0">
                 <a:solidFill>
                   <a:srgbClr val="FFFFFF"/>
                 </a:solidFill>
@@ -2151,7 +2182,7 @@
               </a:rPr>
               <a:t>7,882</a:t>
             </a:r>
-            <a:endParaRPr lang="en-US" sz="2800" dirty="0"/>
+            <a:endParaRPr lang="en-US" sz="2600" dirty="0"/>
           </a:p>
         </p:txBody>
       </p:sp>
@@ -2163,8 +2194,8 @@
         </p:nvSpPr>
         <p:spPr>
           <a:xfrm>
-            <a:off x="3502152" y="6035040"/>
-            <a:ext cx="2606040" cy="365760"/>
+            <a:off x="3502152" y="5989320"/>
+            <a:ext cx="2697480" cy="365760"/>
           </a:xfrm>
           <a:prstGeom prst="rect">
             <a:avLst/>
@@ -2202,8 +2233,8 @@
         </p:nvSpPr>
         <p:spPr>
           <a:xfrm>
-            <a:off x="6364224" y="5440680"/>
-            <a:ext cx="2606040" cy="548640"/>
+            <a:off x="6364224" y="5394960"/>
+            <a:ext cx="2697480" cy="548640"/>
           </a:xfrm>
           <a:prstGeom prst="rect">
             <a:avLst/>
@@ -2219,7 +2250,7 @@
               <a:buNone/>
             </a:pPr>
             <a:r>
-              <a:rPr lang="en-US" sz="2800" b="1" dirty="0">
+              <a:rPr lang="en-US" sz="2600" b="1" dirty="0">
                 <a:solidFill>
                   <a:srgbClr val="FFFFFF"/>
                 </a:solidFill>
@@ -2227,9 +2258,9 @@
                 <a:ea typeface="Space Grotesk" pitchFamily="34" charset="-122"/>
                 <a:cs typeface="Space Grotesk" pitchFamily="34" charset="-120"/>
               </a:rPr>
-              <a:t>Prithvi-600M</a:t>
-            </a:r>
-            <a:endParaRPr lang="en-US" sz="2800" dirty="0"/>
+              <a:t>944</a:t>
+            </a:r>
+            <a:endParaRPr lang="en-US" sz="2600" dirty="0"/>
           </a:p>
         </p:txBody>
       </p:sp>
@@ -2241,8 +2272,8 @@
         </p:nvSpPr>
         <p:spPr>
           <a:xfrm>
-            <a:off x="6364224" y="6035040"/>
-            <a:ext cx="2606040" cy="365760"/>
+            <a:off x="6364224" y="5989320"/>
+            <a:ext cx="2697480" cy="365760"/>
           </a:xfrm>
           <a:prstGeom prst="rect">
             <a:avLst/>
@@ -2266,7 +2297,7 @@
                 <a:ea typeface="Space Grotesk" pitchFamily="34" charset="-122"/>
                 <a:cs typeface="Space Grotesk" pitchFamily="34" charset="-120"/>
               </a:rPr>
-              <a:t>backbone, 504 px</a:t>
+              <a:t>NFI field plots</a:t>
             </a:r>
             <a:endParaRPr lang="en-US" sz="1300" dirty="0"/>
           </a:p>
@@ -2280,8 +2311,8 @@
         </p:nvSpPr>
         <p:spPr>
           <a:xfrm>
-            <a:off x="9226296" y="5440680"/>
-            <a:ext cx="2606040" cy="548640"/>
+            <a:off x="9226296" y="5394960"/>
+            <a:ext cx="2697480" cy="548640"/>
           </a:xfrm>
           <a:prstGeom prst="rect">
             <a:avLst/>
@@ -2297,7 +2328,7 @@
               <a:buNone/>
             </a:pPr>
             <a:r>
-              <a:rPr lang="en-US" sz="2800" b="1" dirty="0">
+              <a:rPr lang="en-US" sz="2600" b="1" dirty="0">
                 <a:solidFill>
                   <a:srgbClr val="FFFFFF"/>
                 </a:solidFill>
@@ -2305,9 +2336,9 @@
                 <a:ea typeface="Space Grotesk" pitchFamily="34" charset="-122"/>
                 <a:cs typeface="Space Grotesk" pitchFamily="34" charset="-120"/>
               </a:rPr>
-              <a:t>0.5352</a:t>
-            </a:r>
-            <a:endParaRPr lang="en-US" sz="2800" dirty="0"/>
+              <a:t>+0.07 / +0.15</a:t>
+            </a:r>
+            <a:endParaRPr lang="en-US" sz="2600" dirty="0"/>
           </a:p>
         </p:txBody>
       </p:sp>
@@ -2319,8 +2350,8 @@
         </p:nvSpPr>
         <p:spPr>
           <a:xfrm>
-            <a:off x="9226296" y="6035040"/>
-            <a:ext cx="2606040" cy="365760"/>
+            <a:off x="9226296" y="5989320"/>
+            <a:ext cx="2697480" cy="365760"/>
           </a:xfrm>
           <a:prstGeom prst="rect">
             <a:avLst/>
@@ -2344,7 +2375,7 @@
                 <a:ea typeface="Space Grotesk" pitchFamily="34" charset="-122"/>
                 <a:cs typeface="Space Grotesk" pitchFamily="34" charset="-120"/>
               </a:rPr>
-              <a:t>val mIoU (20 epochs)</a:t>
+              <a:t>over NMD2023 (held-out)</a:t>
             </a:r>
             <a:endParaRPr lang="en-US" sz="1300" dirty="0"/>
           </a:p>
@@ -2468,7 +2499,7 @@
                 <a:ea typeface="Space Grotesk" pitchFamily="34" charset="-122"/>
                 <a:cs typeface="Space Grotesk" pitchFamily="34" charset="-120"/>
               </a:rPr>
-              <a:t>Example — NMD reference vs v8b prediction</a:t>
+              <a:t>Example — NMD2023 vs the model</a:t>
             </a:r>
             <a:endParaRPr lang="en-US" sz="3200" dirty="0"/>
           </a:p>
@@ -2499,7 +2530,7 @@
               <a:buNone/>
             </a:pPr>
             <a:r>
-              <a:rPr lang="en-US" sz="1400" dirty="0">
+              <a:rPr lang="en-US" sz="1350" dirty="0">
                 <a:solidFill>
                   <a:srgbClr val="9DBDB0"/>
                 </a:solidFill>
@@ -2507,9 +2538,9 @@
                 <a:ea typeface="Space Grotesk" pitchFamily="34" charset="-122"/>
                 <a:cs typeface="Space Grotesk" pitchFamily="34" charset="-120"/>
               </a:rPr>
-              <a:t>One 5×5 km tile, 23-class unified schema (tile_331280_6541280, northern Sweden)</a:t>
-            </a:r>
-            <a:endParaRPr lang="en-US" sz="1400" dirty="0"/>
+              <a:t>One 5×5 km tile, unified palette (tile_331280_6541280). Left: NMD2023-based label. Right: distilled model.</a:t>
+            </a:r>
+            <a:endParaRPr lang="en-US" sz="1350" dirty="0"/>
           </a:p>
         </p:txBody>
       </p:sp>
@@ -2529,8 +2560,8 @@
         </p:blipFill>
         <p:spPr>
           <a:xfrm>
-            <a:off x="1737360" y="1783080"/>
-            <a:ext cx="3566160" cy="3566160"/>
+            <a:off x="1737360" y="1737360"/>
+            <a:ext cx="3520440" cy="3520440"/>
           </a:xfrm>
           <a:prstGeom prst="rect">
             <a:avLst/>
@@ -2553,8 +2584,8 @@
         </p:blipFill>
         <p:spPr>
           <a:xfrm>
-            <a:off x="7040880" y="1783080"/>
-            <a:ext cx="3566160" cy="3566160"/>
+            <a:off x="6995160" y="1737360"/>
+            <a:ext cx="3520440" cy="3520440"/>
           </a:xfrm>
           <a:prstGeom prst="rect">
             <a:avLst/>
@@ -2569,8 +2600,8 @@
         </p:nvSpPr>
         <p:spPr>
           <a:xfrm>
-            <a:off x="1737360" y="5422392"/>
-            <a:ext cx="3566160" cy="365760"/>
+            <a:off x="1737360" y="5330952"/>
+            <a:ext cx="3520440" cy="365760"/>
           </a:xfrm>
           <a:prstGeom prst="rect">
             <a:avLst/>
@@ -2594,7 +2625,7 @@
                 <a:ea typeface="Space Grotesk" pitchFamily="34" charset="-122"/>
                 <a:cs typeface="Space Grotesk" pitchFamily="34" charset="-120"/>
               </a:rPr>
-              <a:t>NMD-based reference</a:t>
+              <a:t>NMD2023 label</a:t>
             </a:r>
             <a:endParaRPr lang="en-US" sz="1500" dirty="0"/>
           </a:p>
@@ -2608,8 +2639,8 @@
         </p:nvSpPr>
         <p:spPr>
           <a:xfrm>
-            <a:off x="7040880" y="5422392"/>
-            <a:ext cx="3566160" cy="365760"/>
+            <a:off x="6995160" y="5330952"/>
+            <a:ext cx="3520440" cy="365760"/>
           </a:xfrm>
           <a:prstGeom prst="rect">
             <a:avLst/>
@@ -2633,7 +2664,7 @@
                 <a:ea typeface="Space Grotesk" pitchFamily="34" charset="-122"/>
                 <a:cs typeface="Space Grotesk" pitchFamily="34" charset="-120"/>
               </a:rPr>
-              <a:t>v8b</a:t>
+              <a:t>v8b-NFI (distilled)</a:t>
             </a:r>
             <a:endParaRPr lang="en-US" sz="1500" dirty="0"/>
           </a:p>
@@ -2647,8 +2678,8 @@
         </p:nvSpPr>
         <p:spPr>
           <a:xfrm>
-            <a:off x="822960" y="6071616"/>
-            <a:ext cx="201168" cy="201168"/>
+            <a:off x="685800" y="6007608"/>
+            <a:ext cx="182880" cy="182880"/>
           </a:xfrm>
           <a:prstGeom prst="rect">
             <a:avLst/>
@@ -2667,8 +2698,8 @@
         </p:nvSpPr>
         <p:spPr>
           <a:xfrm>
-            <a:off x="1115568" y="6025896"/>
-            <a:ext cx="2286000" cy="292608"/>
+            <a:off x="960120" y="5961888"/>
+            <a:ext cx="2286000" cy="274320"/>
           </a:xfrm>
           <a:prstGeom prst="rect">
             <a:avLst/>
@@ -2684,7 +2715,7 @@
               <a:buNone/>
             </a:pPr>
             <a:r>
-              <a:rPr lang="en-US" sz="1250" dirty="0">
+              <a:rPr lang="en-US" sz="1150" dirty="0">
                 <a:solidFill>
                   <a:srgbClr val="FFFFFF"/>
                 </a:solidFill>
@@ -2694,7 +2725,7 @@
               </a:rPr>
               <a:t>Pine</a:t>
             </a:r>
-            <a:endParaRPr lang="en-US" sz="1250" dirty="0"/>
+            <a:endParaRPr lang="en-US" sz="1150" dirty="0"/>
           </a:p>
         </p:txBody>
       </p:sp>
@@ -2706,8 +2737,8 @@
         </p:nvSpPr>
         <p:spPr>
           <a:xfrm>
-            <a:off x="3566160" y="6071616"/>
-            <a:ext cx="201168" cy="201168"/>
+            <a:off x="3429000" y="6007608"/>
+            <a:ext cx="182880" cy="182880"/>
           </a:xfrm>
           <a:prstGeom prst="rect">
             <a:avLst/>
@@ -2726,8 +2757,8 @@
         </p:nvSpPr>
         <p:spPr>
           <a:xfrm>
-            <a:off x="3858768" y="6025896"/>
-            <a:ext cx="2286000" cy="292608"/>
+            <a:off x="3703320" y="5961888"/>
+            <a:ext cx="2286000" cy="274320"/>
           </a:xfrm>
           <a:prstGeom prst="rect">
             <a:avLst/>
@@ -2743,7 +2774,7 @@
               <a:buNone/>
             </a:pPr>
             <a:r>
-              <a:rPr lang="en-US" sz="1250" dirty="0">
+              <a:rPr lang="en-US" sz="1150" dirty="0">
                 <a:solidFill>
                   <a:srgbClr val="FFFFFF"/>
                 </a:solidFill>
@@ -2753,7 +2784,7 @@
               </a:rPr>
               <a:t>Spruce</a:t>
             </a:r>
-            <a:endParaRPr lang="en-US" sz="1250" dirty="0"/>
+            <a:endParaRPr lang="en-US" sz="1150" dirty="0"/>
           </a:p>
         </p:txBody>
       </p:sp>
@@ -2765,8 +2796,8 @@
         </p:nvSpPr>
         <p:spPr>
           <a:xfrm>
-            <a:off x="6309360" y="6071616"/>
-            <a:ext cx="201168" cy="201168"/>
+            <a:off x="6172200" y="6007608"/>
+            <a:ext cx="182880" cy="182880"/>
           </a:xfrm>
           <a:prstGeom prst="rect">
             <a:avLst/>
@@ -2785,8 +2816,8 @@
         </p:nvSpPr>
         <p:spPr>
           <a:xfrm>
-            <a:off x="6601968" y="6025896"/>
-            <a:ext cx="2286000" cy="292608"/>
+            <a:off x="6446520" y="5961888"/>
+            <a:ext cx="2286000" cy="274320"/>
           </a:xfrm>
           <a:prstGeom prst="rect">
             <a:avLst/>
@@ -2802,7 +2833,7 @@
               <a:buNone/>
             </a:pPr>
             <a:r>
-              <a:rPr lang="en-US" sz="1250" dirty="0">
+              <a:rPr lang="en-US" sz="1150" dirty="0">
                 <a:solidFill>
                   <a:srgbClr val="FFFFFF"/>
                 </a:solidFill>
@@ -2812,7 +2843,7 @@
               </a:rPr>
               <a:t>Deciduous</a:t>
             </a:r>
-            <a:endParaRPr lang="en-US" sz="1250" dirty="0"/>
+            <a:endParaRPr lang="en-US" sz="1150" dirty="0"/>
           </a:p>
         </p:txBody>
       </p:sp>
@@ -2824,8 +2855,8 @@
         </p:nvSpPr>
         <p:spPr>
           <a:xfrm>
-            <a:off x="9052560" y="6071616"/>
-            <a:ext cx="201168" cy="201168"/>
+            <a:off x="8915400" y="6007608"/>
+            <a:ext cx="182880" cy="182880"/>
           </a:xfrm>
           <a:prstGeom prst="rect">
             <a:avLst/>
@@ -2844,8 +2875,8 @@
         </p:nvSpPr>
         <p:spPr>
           <a:xfrm>
-            <a:off x="9345168" y="6025896"/>
-            <a:ext cx="2286000" cy="292608"/>
+            <a:off x="9189720" y="5961888"/>
+            <a:ext cx="2286000" cy="274320"/>
           </a:xfrm>
           <a:prstGeom prst="rect">
             <a:avLst/>
@@ -2861,7 +2892,7 @@
               <a:buNone/>
             </a:pPr>
             <a:r>
-              <a:rPr lang="en-US" sz="1250" dirty="0">
+              <a:rPr lang="en-US" sz="1150" dirty="0">
                 <a:solidFill>
                   <a:srgbClr val="FFFFFF"/>
                 </a:solidFill>
@@ -2871,7 +2902,7 @@
               </a:rPr>
               <a:t>Mixed</a:t>
             </a:r>
-            <a:endParaRPr lang="en-US" sz="1250" dirty="0"/>
+            <a:endParaRPr lang="en-US" sz="1150" dirty="0"/>
           </a:p>
         </p:txBody>
       </p:sp>
@@ -2883,8 +2914,8 @@
         </p:nvSpPr>
         <p:spPr>
           <a:xfrm>
-            <a:off x="822960" y="6400800"/>
-            <a:ext cx="201168" cy="201168"/>
+            <a:off x="685800" y="6300216"/>
+            <a:ext cx="182880" cy="182880"/>
           </a:xfrm>
           <a:prstGeom prst="rect">
             <a:avLst/>
@@ -2903,8 +2934,8 @@
         </p:nvSpPr>
         <p:spPr>
           <a:xfrm>
-            <a:off x="1115568" y="6355080"/>
-            <a:ext cx="2286000" cy="292608"/>
+            <a:off x="960120" y="6254496"/>
+            <a:ext cx="2286000" cy="274320"/>
           </a:xfrm>
           <a:prstGeom prst="rect">
             <a:avLst/>
@@ -2920,7 +2951,7 @@
               <a:buNone/>
             </a:pPr>
             <a:r>
-              <a:rPr lang="en-US" sz="1250" dirty="0">
+              <a:rPr lang="en-US" sz="1150" dirty="0">
                 <a:solidFill>
                   <a:srgbClr val="FFFFFF"/>
                 </a:solidFill>
@@ -2930,7 +2961,7 @@
               </a:rPr>
               <a:t>Swamp forest</a:t>
             </a:r>
-            <a:endParaRPr lang="en-US" sz="1250" dirty="0"/>
+            <a:endParaRPr lang="en-US" sz="1150" dirty="0"/>
           </a:p>
         </p:txBody>
       </p:sp>
@@ -2942,8 +2973,67 @@
         </p:nvSpPr>
         <p:spPr>
           <a:xfrm>
-            <a:off x="3566160" y="6400800"/>
-            <a:ext cx="201168" cy="201168"/>
+            <a:off x="3429000" y="6300216"/>
+            <a:ext cx="182880" cy="182880"/>
+          </a:xfrm>
+          <a:prstGeom prst="rect">
+            <a:avLst/>
+          </a:prstGeom>
+          <a:solidFill>
+            <a:srgbClr val="00CED1"/>
+          </a:solidFill>
+          <a:ln/>
+        </p:spPr>
+      </p:sp>
+      <p:sp>
+        <p:nvSpPr>
+          <p:cNvPr id="20" name="Text 16"/>
+          <p:cNvSpPr/>
+          <p:nvPr/>
+        </p:nvSpPr>
+        <p:spPr>
+          <a:xfrm>
+            <a:off x="3703320" y="6254496"/>
+            <a:ext cx="2286000" cy="274320"/>
+          </a:xfrm>
+          <a:prstGeom prst="rect">
+            <a:avLst/>
+          </a:prstGeom>
+          <a:noFill/>
+          <a:ln/>
+        </p:spPr>
+        <p:txBody>
+          <a:bodyPr wrap="square" lIns="0" tIns="0" rIns="0" bIns="0" rtlCol="0" anchor="ctr"/>
+          <a:lstStyle/>
+          <a:p>
+            <a:pPr indent="0" marL="0">
+              <a:buNone/>
+            </a:pPr>
+            <a:r>
+              <a:rPr lang="en-US" sz="1150" dirty="0">
+                <a:solidFill>
+                  <a:srgbClr val="FFFFFF"/>
+                </a:solidFill>
+                <a:latin typeface="Space Grotesk" pitchFamily="34" charset="0"/>
+                <a:ea typeface="Space Grotesk" pitchFamily="34" charset="-122"/>
+                <a:cs typeface="Space Grotesk" pitchFamily="34" charset="-120"/>
+              </a:rPr>
+              <a:t>Clear-cut</a:t>
+            </a:r>
+            <a:endParaRPr lang="en-US" sz="1150" dirty="0"/>
+          </a:p>
+        </p:txBody>
+      </p:sp>
+      <p:sp>
+        <p:nvSpPr>
+          <p:cNvPr id="21" name="Shape 17"/>
+          <p:cNvSpPr/>
+          <p:nvPr/>
+        </p:nvSpPr>
+        <p:spPr>
+          <a:xfrm>
+            <a:off x="6172200" y="6300216"/>
+            <a:ext cx="182880" cy="182880"/>
           </a:xfrm>
           <a:prstGeom prst="rect">
             <a:avLst/>
@@ -2956,14 +3046,14 @@
       </p:sp>
       <p:sp>
         <p:nvSpPr>
-          <p:cNvPr id="20" name="Text 16"/>
-          <p:cNvSpPr/>
-          <p:nvPr/>
-        </p:nvSpPr>
-        <p:spPr>
-          <a:xfrm>
-            <a:off x="3858768" y="6355080"/>
-            <a:ext cx="2286000" cy="292608"/>
+          <p:cNvPr id="22" name="Text 18"/>
+          <p:cNvSpPr/>
+          <p:nvPr/>
+        </p:nvSpPr>
+        <p:spPr>
+          <a:xfrm>
+            <a:off x="6446520" y="6254496"/>
+            <a:ext cx="2286000" cy="274320"/>
           </a:xfrm>
           <a:prstGeom prst="rect">
             <a:avLst/>
@@ -2979,7 +3069,7 @@
               <a:buNone/>
             </a:pPr>
             <a:r>
-              <a:rPr lang="en-US" sz="1250" dirty="0">
+              <a:rPr lang="en-US" sz="1150" dirty="0">
                 <a:solidFill>
                   <a:srgbClr val="FFFFFF"/>
                 </a:solidFill>
@@ -2989,20 +3079,20 @@
               </a:rPr>
               <a:t>Open land</a:t>
             </a:r>
-            <a:endParaRPr lang="en-US" sz="1250" dirty="0"/>
-          </a:p>
-        </p:txBody>
-      </p:sp>
-      <p:sp>
-        <p:nvSpPr>
-          <p:cNvPr id="21" name="Shape 17"/>
-          <p:cNvSpPr/>
-          <p:nvPr/>
-        </p:nvSpPr>
-        <p:spPr>
-          <a:xfrm>
-            <a:off x="6309360" y="6400800"/>
-            <a:ext cx="201168" cy="201168"/>
+            <a:endParaRPr lang="en-US" sz="1150" dirty="0"/>
+          </a:p>
+        </p:txBody>
+      </p:sp>
+      <p:sp>
+        <p:nvSpPr>
+          <p:cNvPr id="23" name="Shape 19"/>
+          <p:cNvSpPr/>
+          <p:nvPr/>
+        </p:nvSpPr>
+        <p:spPr>
+          <a:xfrm>
+            <a:off x="8915400" y="6300216"/>
+            <a:ext cx="182880" cy="182880"/>
           </a:xfrm>
           <a:prstGeom prst="rect">
             <a:avLst/>
@@ -3015,14 +3105,14 @@
       </p:sp>
       <p:sp>
         <p:nvSpPr>
-          <p:cNvPr id="22" name="Text 18"/>
-          <p:cNvSpPr/>
-          <p:nvPr/>
-        </p:nvSpPr>
-        <p:spPr>
-          <a:xfrm>
-            <a:off x="6601968" y="6355080"/>
-            <a:ext cx="2286000" cy="292608"/>
+          <p:cNvPr id="24" name="Text 20"/>
+          <p:cNvSpPr/>
+          <p:nvPr/>
+        </p:nvSpPr>
+        <p:spPr>
+          <a:xfrm>
+            <a:off x="9189720" y="6254496"/>
+            <a:ext cx="2286000" cy="274320"/>
           </a:xfrm>
           <a:prstGeom prst="rect">
             <a:avLst/>
@@ -3038,7 +3128,7 @@
               <a:buNone/>
             </a:pPr>
             <a:r>
-              <a:rPr lang="en-US" sz="1250" dirty="0">
+              <a:rPr lang="en-US" sz="1150" dirty="0">
                 <a:solidFill>
                   <a:srgbClr val="FFFFFF"/>
                 </a:solidFill>
@@ -3048,20 +3138,20 @@
               </a:rPr>
               <a:t>Water</a:t>
             </a:r>
-            <a:endParaRPr lang="en-US" sz="1250" dirty="0"/>
-          </a:p>
-        </p:txBody>
-      </p:sp>
-      <p:sp>
-        <p:nvSpPr>
-          <p:cNvPr id="23" name="Shape 19"/>
-          <p:cNvSpPr/>
-          <p:nvPr/>
-        </p:nvSpPr>
-        <p:spPr>
-          <a:xfrm>
-            <a:off x="9052560" y="6400800"/>
-            <a:ext cx="201168" cy="201168"/>
+            <a:endParaRPr lang="en-US" sz="1150" dirty="0"/>
+          </a:p>
+        </p:txBody>
+      </p:sp>
+      <p:sp>
+        <p:nvSpPr>
+          <p:cNvPr id="25" name="Shape 21"/>
+          <p:cNvSpPr/>
+          <p:nvPr/>
+        </p:nvSpPr>
+        <p:spPr>
+          <a:xfrm>
+            <a:off x="685800" y="6592824"/>
+            <a:ext cx="182880" cy="182880"/>
           </a:xfrm>
           <a:prstGeom prst="rect">
             <a:avLst/>
@@ -3074,14 +3164,14 @@
       </p:sp>
       <p:sp>
         <p:nvSpPr>
-          <p:cNvPr id="24" name="Text 20"/>
-          <p:cNvSpPr/>
-          <p:nvPr/>
-        </p:nvSpPr>
-        <p:spPr>
-          <a:xfrm>
-            <a:off x="9345168" y="6355080"/>
-            <a:ext cx="2286000" cy="292608"/>
+          <p:cNvPr id="26" name="Text 22"/>
+          <p:cNvSpPr/>
+          <p:nvPr/>
+        </p:nvSpPr>
+        <p:spPr>
+          <a:xfrm>
+            <a:off x="960120" y="6547104"/>
+            <a:ext cx="2286000" cy="274320"/>
           </a:xfrm>
           <a:prstGeom prst="rect">
             <a:avLst/>
@@ -3097,7 +3187,7 @@
               <a:buNone/>
             </a:pPr>
             <a:r>
-              <a:rPr lang="en-US" sz="1250" dirty="0">
+              <a:rPr lang="en-US" sz="1150" dirty="0">
                 <a:solidFill>
                   <a:srgbClr val="FFFFFF"/>
                 </a:solidFill>
@@ -3107,7 +3197,184 @@
               </a:rPr>
               <a:t>Built-up</a:t>
             </a:r>
-            <a:endParaRPr lang="en-US" sz="1250" dirty="0"/>
+            <a:endParaRPr lang="en-US" sz="1150" dirty="0"/>
+          </a:p>
+        </p:txBody>
+      </p:sp>
+      <p:sp>
+        <p:nvSpPr>
+          <p:cNvPr id="27" name="Shape 23"/>
+          <p:cNvSpPr/>
+          <p:nvPr/>
+        </p:nvSpPr>
+        <p:spPr>
+          <a:xfrm>
+            <a:off x="3429000" y="6592824"/>
+            <a:ext cx="182880" cy="182880"/>
+          </a:xfrm>
+          <a:prstGeom prst="rect">
+            <a:avLst/>
+          </a:prstGeom>
+          <a:solidFill>
+            <a:srgbClr val="FFD27E"/>
+          </a:solidFill>
+          <a:ln/>
+        </p:spPr>
+      </p:sp>
+      <p:sp>
+        <p:nvSpPr>
+          <p:cNvPr id="28" name="Text 24"/>
+          <p:cNvSpPr/>
+          <p:nvPr/>
+        </p:nvSpPr>
+        <p:spPr>
+          <a:xfrm>
+            <a:off x="3703320" y="6547104"/>
+            <a:ext cx="2286000" cy="274320"/>
+          </a:xfrm>
+          <a:prstGeom prst="rect">
+            <a:avLst/>
+          </a:prstGeom>
+          <a:noFill/>
+          <a:ln/>
+        </p:spPr>
+        <p:txBody>
+          <a:bodyPr wrap="square" lIns="0" tIns="0" rIns="0" bIns="0" rtlCol="0" anchor="ctr"/>
+          <a:lstStyle/>
+          <a:p>
+            <a:pPr indent="0" marL="0">
+              <a:buNone/>
+            </a:pPr>
+            <a:r>
+              <a:rPr lang="en-US" sz="1150" dirty="0">
+                <a:solidFill>
+                  <a:srgbClr val="FFFFFF"/>
+                </a:solidFill>
+                <a:latin typeface="Space Grotesk" pitchFamily="34" charset="0"/>
+                <a:ea typeface="Space Grotesk" pitchFamily="34" charset="-122"/>
+                <a:cs typeface="Space Grotesk" pitchFamily="34" charset="-120"/>
+              </a:rPr>
+              <a:t>Grass-dom.</a:t>
+            </a:r>
+            <a:endParaRPr lang="en-US" sz="1150" dirty="0"/>
+          </a:p>
+        </p:txBody>
+      </p:sp>
+      <p:sp>
+        <p:nvSpPr>
+          <p:cNvPr id="29" name="Shape 25"/>
+          <p:cNvSpPr/>
+          <p:nvPr/>
+        </p:nvSpPr>
+        <p:spPr>
+          <a:xfrm>
+            <a:off x="6172200" y="6592824"/>
+            <a:ext cx="182880" cy="182880"/>
+          </a:xfrm>
+          <a:prstGeom prst="rect">
+            <a:avLst/>
+          </a:prstGeom>
+          <a:solidFill>
+            <a:srgbClr val="CDAA66"/>
+          </a:solidFill>
+          <a:ln/>
+        </p:spPr>
+      </p:sp>
+      <p:sp>
+        <p:nvSpPr>
+          <p:cNvPr id="30" name="Text 26"/>
+          <p:cNvSpPr/>
+          <p:nvPr/>
+        </p:nvSpPr>
+        <p:spPr>
+          <a:xfrm>
+            <a:off x="6446520" y="6547104"/>
+            <a:ext cx="2286000" cy="274320"/>
+          </a:xfrm>
+          <a:prstGeom prst="rect">
+            <a:avLst/>
+          </a:prstGeom>
+          <a:noFill/>
+          <a:ln/>
+        </p:spPr>
+        <p:txBody>
+          <a:bodyPr wrap="square" lIns="0" tIns="0" rIns="0" bIns="0" rtlCol="0" anchor="ctr"/>
+          <a:lstStyle/>
+          <a:p>
+            <a:pPr indent="0" marL="0">
+              <a:buNone/>
+            </a:pPr>
+            <a:r>
+              <a:rPr lang="en-US" sz="1150" dirty="0">
+                <a:solidFill>
+                  <a:srgbClr val="FFFFFF"/>
+                </a:solidFill>
+                <a:latin typeface="Space Grotesk" pitchFamily="34" charset="0"/>
+                <a:ea typeface="Space Grotesk" pitchFamily="34" charset="-122"/>
+                <a:cs typeface="Space Grotesk" pitchFamily="34" charset="-120"/>
+              </a:rPr>
+              <a:t>Dwarf-shrub</a:t>
+            </a:r>
+            <a:endParaRPr lang="en-US" sz="1150" dirty="0"/>
+          </a:p>
+        </p:txBody>
+      </p:sp>
+      <p:sp>
+        <p:nvSpPr>
+          <p:cNvPr id="31" name="Shape 27"/>
+          <p:cNvSpPr/>
+          <p:nvPr/>
+        </p:nvSpPr>
+        <p:spPr>
+          <a:xfrm>
+            <a:off x="8915400" y="6592824"/>
+            <a:ext cx="182880" cy="182880"/>
+          </a:xfrm>
+          <a:prstGeom prst="rect">
+            <a:avLst/>
+          </a:prstGeom>
+          <a:solidFill>
+            <a:srgbClr val="ABC8A6"/>
+          </a:solidFill>
+          <a:ln/>
+        </p:spPr>
+      </p:sp>
+      <p:sp>
+        <p:nvSpPr>
+          <p:cNvPr id="32" name="Text 28"/>
+          <p:cNvSpPr/>
+          <p:nvPr/>
+        </p:nvSpPr>
+        <p:spPr>
+          <a:xfrm>
+            <a:off x="9189720" y="6547104"/>
+            <a:ext cx="2286000" cy="274320"/>
+          </a:xfrm>
+          <a:prstGeom prst="rect">
+            <a:avLst/>
+          </a:prstGeom>
+          <a:noFill/>
+          <a:ln/>
+        </p:spPr>
+        <p:txBody>
+          <a:bodyPr wrap="square" lIns="0" tIns="0" rIns="0" bIns="0" rtlCol="0" anchor="ctr"/>
+          <a:lstStyle/>
+          <a:p>
+            <a:pPr indent="0" marL="0">
+              <a:buNone/>
+            </a:pPr>
+            <a:r>
+              <a:rPr lang="en-US" sz="1150" dirty="0">
+                <a:solidFill>
+                  <a:srgbClr val="FFFFFF"/>
+                </a:solidFill>
+                <a:latin typeface="Space Grotesk" pitchFamily="34" charset="0"/>
+                <a:ea typeface="Space Grotesk" pitchFamily="34" charset="-122"/>
+                <a:cs typeface="Space Grotesk" pitchFamily="34" charset="-120"/>
+              </a:rPr>
+              <a:t>Shrub-dom.</a:t>
+            </a:r>
+            <a:endParaRPr lang="en-US" sz="1150" dirty="0"/>
           </a:p>
         </p:txBody>
       </p:sp>
@@ -3221,7 +3488,7 @@
               <a:buNone/>
             </a:pPr>
             <a:r>
-              <a:rPr lang="en-US" sz="3600" b="1" dirty="0">
+              <a:rPr lang="en-US" sz="3400" b="1" dirty="0">
                 <a:solidFill>
                   <a:srgbClr val="FFFFFF"/>
                 </a:solidFill>
@@ -3229,9 +3496,9 @@
                 <a:ea typeface="Space Grotesk" pitchFamily="34" charset="-122"/>
                 <a:cs typeface="Space Grotesk" pitchFamily="34" charset="-120"/>
               </a:rPr>
-              <a:t>Overall accuracy vs field truth</a:t>
-            </a:r>
-            <a:endParaRPr lang="en-US" sz="3600" dirty="0"/>
+              <a:t>Held-out results — overall accuracy</a:t>
+            </a:r>
+            <a:endParaRPr lang="en-US" sz="3400" dirty="0"/>
           </a:p>
         </p:txBody>
       </p:sp>
@@ -3243,8 +3510,8 @@
         </p:nvSpPr>
         <p:spPr>
           <a:xfrm>
-            <a:off x="658368" y="1188720"/>
-            <a:ext cx="10058400" cy="457200"/>
+            <a:off x="658368" y="1170432"/>
+            <a:ext cx="10972800" cy="457200"/>
           </a:xfrm>
           <a:prstGeom prst="rect">
             <a:avLst/>
@@ -3260,7 +3527,7 @@
               <a:buNone/>
             </a:pPr>
             <a:r>
-              <a:rPr lang="en-US" sz="1500" dirty="0">
+              <a:rPr lang="en-US" sz="1400" dirty="0">
                 <a:solidFill>
                   <a:srgbClr val="9DBDB0"/>
                 </a:solidFill>
@@ -3268,9 +3535,9 @@
                 <a:ea typeface="Space Grotesk" pitchFamily="34" charset="-122"/>
                 <a:cs typeface="Space Grotesk" pitchFamily="34" charset="-120"/>
               </a:rPr>
-              <a:t>5-class (4 forest types + non-forest), same 912 NFI plots where NMD2023 v2.1 exists</a:t>
-            </a:r>
-            <a:endParaRPr lang="en-US" sz="1500" dirty="0"/>
+              <a:t>209 NFI plots on tiles unseen by head training, distillation and finetune. NMD2023 scored on the exact same plots.</a:t>
+            </a:r>
+            <a:endParaRPr lang="en-US" sz="1400" dirty="0"/>
           </a:p>
         </p:txBody>
       </p:sp>
@@ -3281,8 +3548,8 @@
           <p:nvPr/>
         </p:nvGraphicFramePr>
         <p:xfrm>
-          <a:off x="640080" y="1828800"/>
-          <a:ext cx="6675120" cy="4480560"/>
+          <a:off x="640080" y="1874520"/>
+          <a:ext cx="6675120" cy="4389120"/>
         </p:xfrm>
         <a:graphic xmlns:a="http://schemas.openxmlformats.org/drawingml/2006/main">
           <a:graphicData uri="http://schemas.openxmlformats.org/drawingml/2006/chart">
@@ -3298,8 +3565,8 @@
         </p:nvSpPr>
         <p:spPr>
           <a:xfrm>
-            <a:off x="7680960" y="1965960"/>
-            <a:ext cx="3931920" cy="640080"/>
+            <a:off x="7680960" y="2011680"/>
+            <a:ext cx="3931920" cy="457200"/>
           </a:xfrm>
           <a:prstGeom prst="rect">
             <a:avLst/>
@@ -3315,7 +3582,7 @@
               <a:buNone/>
             </a:pPr>
             <a:r>
-              <a:rPr lang="en-US" sz="2000" b="1" dirty="0">
+              <a:rPr lang="en-US" sz="2100" b="1" dirty="0">
                 <a:solidFill>
                   <a:srgbClr val="CDFCE3"/>
                 </a:solidFill>
@@ -3323,9 +3590,9 @@
                 <a:ea typeface="Space Grotesk" pitchFamily="34" charset="-122"/>
                 <a:cs typeface="Space Grotesk" pitchFamily="34" charset="-120"/>
               </a:rPr>
-              <a:t>Student beats teacher — nearly level with the next generation</a:t>
-            </a:r>
-            <a:endParaRPr lang="en-US" sz="2000" dirty="0"/>
+              <a:t>Honest evaluation</a:t>
+            </a:r>
+            <a:endParaRPr lang="en-US" sz="2100" dirty="0"/>
           </a:p>
         </p:txBody>
       </p:sp>
@@ -3337,7 +3604,7 @@
         </p:nvSpPr>
         <p:spPr>
           <a:xfrm>
-            <a:off x="7680960" y="2843784"/>
+            <a:off x="7680960" y="2752344"/>
             <a:ext cx="146304" cy="146304"/>
           </a:xfrm>
           <a:prstGeom prst="ellipse">
@@ -3357,8 +3624,8 @@
         </p:nvSpPr>
         <p:spPr>
           <a:xfrm>
-            <a:off x="7973568" y="2743200"/>
-            <a:ext cx="3657600" cy="1005840"/>
+            <a:off x="7973568" y="2651760"/>
+            <a:ext cx="3657600" cy="1097280"/>
           </a:xfrm>
           <a:prstGeom prst="rect">
             <a:avLst/>
@@ -3374,7 +3641,7 @@
               <a:buNone/>
             </a:pPr>
             <a:r>
-              <a:rPr lang="en-US" sz="1450" dirty="0">
+              <a:rPr lang="en-US" sz="1400" dirty="0">
                 <a:solidFill>
                   <a:srgbClr val="FFFFFF"/>
                 </a:solidFill>
@@ -3382,9 +3649,9 @@
                 <a:ea typeface="Space Grotesk" pitchFamily="34" charset="-122"/>
                 <a:cs typeface="Space Grotesk" pitchFamily="34" charset="-120"/>
               </a:rPr>
-              <a:t>v8b is trained ON NMD2018 — yet +5.7 pp better at the field points.</a:t>
-            </a:r>
-            <a:endParaRPr lang="en-US" sz="1450" dirty="0"/>
+              <a:t>Thresholds and head trained ONLY on the 735 train-split plots — the 209 are untouched.</a:t>
+            </a:r>
+            <a:endParaRPr lang="en-US" sz="1400" dirty="0"/>
           </a:p>
         </p:txBody>
       </p:sp>
@@ -3396,7 +3663,7 @@
         </p:nvSpPr>
         <p:spPr>
           <a:xfrm>
-            <a:off x="7680960" y="3986784"/>
+            <a:off x="7680960" y="3941064"/>
             <a:ext cx="146304" cy="146304"/>
           </a:xfrm>
           <a:prstGeom prst="ellipse">
@@ -3416,8 +3683,8 @@
         </p:nvSpPr>
         <p:spPr>
           <a:xfrm>
-            <a:off x="7973568" y="3886200"/>
-            <a:ext cx="3657600" cy="1005840"/>
+            <a:off x="7973568" y="3840480"/>
+            <a:ext cx="3657600" cy="1097280"/>
           </a:xfrm>
           <a:prstGeom prst="rect">
             <a:avLst/>
@@ -3433,7 +3700,7 @@
               <a:buNone/>
             </a:pPr>
             <a:r>
-              <a:rPr lang="en-US" sz="1450" dirty="0">
+              <a:rPr lang="en-US" sz="1400" dirty="0">
                 <a:solidFill>
                   <a:srgbClr val="FFFFFF"/>
                 </a:solidFill>
@@ -3441,9 +3708,9 @@
                 <a:ea typeface="Space Grotesk" pitchFamily="34" charset="-122"/>
                 <a:cs typeface="Space Grotesk" pitchFamily="34" charset="-120"/>
               </a:rPr>
-              <a:t>The new NMD2023 (laser + 2023 S2) leads at 49.3% — but only +3.0 pp over v8b.</a:t>
-            </a:r>
-            <a:endParaRPr lang="en-US" sz="1450" dirty="0"/>
+              <a:t>Distilled model = full 28-class product, every class functional (+7.2 pp).</a:t>
+            </a:r>
+            <a:endParaRPr lang="en-US" sz="1400" dirty="0"/>
           </a:p>
         </p:txBody>
       </p:sp>
@@ -3476,7 +3743,7 @@
         <p:spPr>
           <a:xfrm>
             <a:off x="7973568" y="5029200"/>
-            <a:ext cx="3657600" cy="1005840"/>
+            <a:ext cx="3657600" cy="1097280"/>
           </a:xfrm>
           <a:prstGeom prst="rect">
             <a:avLst/>
@@ -3492,7 +3759,7 @@
               <a:buNone/>
             </a:pPr>
             <a:r>
-              <a:rPr lang="en-US" sz="1450" dirty="0">
+              <a:rPr lang="en-US" sz="1400" dirty="0">
                 <a:solidFill>
                   <a:srgbClr val="FFFFFF"/>
                 </a:solidFill>
@@ -3500,9 +3767,9 @@
                 <a:ea typeface="Space Grotesk" pitchFamily="34" charset="-122"/>
                 <a:cs typeface="Space Grotesk" pitchFamily="34" charset="-120"/>
               </a:rPr>
-              <a:t>v8b wins deciduous and mixed on F1; NMD2023 wins pine and spruce.</a:t>
-            </a:r>
-            <a:endParaRPr lang="en-US" sz="1450" dirty="0"/>
+              <a:t>The fraction layer (NFI collapse rule) reaches 57.9% on forest type — pine F1 0.74.</a:t>
+            </a:r>
+            <a:endParaRPr lang="en-US" sz="1400" dirty="0"/>
           </a:p>
         </p:txBody>
       </p:sp>
@@ -3624,7 +3891,7 @@
                 <a:ea typeface="Space Grotesk" pitchFamily="34" charset="-122"/>
                 <a:cs typeface="Space Grotesk" pitchFamily="34" charset="-120"/>
               </a:rPr>
-              <a:t>Standard measures — user's / producer's / F1</a:t>
+              <a:t>Per class — F1 on the held-out plots</a:t>
             </a:r>
             <a:endParaRPr lang="en-US" sz="3200" dirty="0"/>
           </a:p>
@@ -3655,7 +3922,7 @@
               <a:buNone/>
             </a:pPr>
             <a:r>
-              <a:rPr lang="en-US" sz="1350" dirty="0">
+              <a:rPr lang="en-US" sz="1400" dirty="0">
                 <a:solidFill>
                   <a:srgbClr val="9DBDB0"/>
                 </a:solidFill>
@@ -3663,9 +3930,9 @@
                 <a:ea typeface="Space Grotesk" pitchFamily="34" charset="-122"/>
                 <a:cs typeface="Space Grotesk" pitchFamily="34" charset="-120"/>
               </a:rPr>
-              <a:t>Confusion matrix over all plots (4 forest types + non-forest), three sources on the exact same 912 field plots</a:t>
-            </a:r>
-            <a:endParaRPr lang="en-US" sz="1350" dirty="0"/>
+              <a:t>Three sources on the exact same 209 field plots</a:t>
+            </a:r>
+            <a:endParaRPr lang="en-US" sz="1400" dirty="0"/>
           </a:p>
         </p:txBody>
       </p:sp>
@@ -3724,7 +3991,7 @@
                 <a:ea typeface="Space Grotesk" pitchFamily="34" charset="-122"/>
                 <a:cs typeface="Space Grotesk" pitchFamily="34" charset="-120"/>
               </a:rPr>
-              <a:t>Overall accuracy (5-class)</a:t>
+              <a:t>Overall accuracy</a:t>
             </a:r>
             <a:endParaRPr lang="en-US" sz="1300" dirty="0"/>
           </a:p>
@@ -3769,7 +4036,63 @@
               <a:buNone/>
             </a:pPr>
             <a:r>
-              <a:rPr lang="en-US" sz="2000" b="1" dirty="0">
+              <a:rPr lang="en-US" sz="1900" b="1" dirty="0">
+                <a:solidFill>
+                  <a:srgbClr val="FFFFFF"/>
+                </a:solidFill>
+                <a:latin typeface="Space Grotesk" pitchFamily="34" charset="0"/>
+                <a:ea typeface="Space Grotesk" pitchFamily="34" charset="-122"/>
+                <a:cs typeface="Space Grotesk" pitchFamily="34" charset="-120"/>
+              </a:rPr>
+              <a:t>43.1%</a:t>
+            </a:r>
+            <a:pPr indent="0" marL="0">
+              <a:buNone/>
+            </a:pPr>
+            <a:r>
+              <a:rPr lang="en-US" sz="1200" dirty="0">
+                <a:solidFill>
+                  <a:srgbClr val="9DBDB0"/>
+                </a:solidFill>
+                <a:latin typeface="Space Grotesk" pitchFamily="34" charset="0"/>
+                <a:ea typeface="Space Grotesk" pitchFamily="34" charset="-122"/>
+                <a:cs typeface="Space Grotesk" pitchFamily="34" charset="-120"/>
+              </a:rPr>
+              <a:t>   Distilled </a:t>
+            </a:r>
+            <a:pPr indent="0" marL="0">
+              <a:buNone/>
+            </a:pPr>
+            <a:r>
+              <a:rPr lang="en-US" sz="1900" b="1" dirty="0">
+                <a:solidFill>
+                  <a:srgbClr val="FF826C"/>
+                </a:solidFill>
+                <a:latin typeface="Space Grotesk" pitchFamily="34" charset="0"/>
+                <a:ea typeface="Space Grotesk" pitchFamily="34" charset="-122"/>
+                <a:cs typeface="Space Grotesk" pitchFamily="34" charset="-120"/>
+              </a:rPr>
+              <a:t>50.2%</a:t>
+            </a:r>
+            <a:pPr indent="0" marL="0">
+              <a:buNone/>
+            </a:pPr>
+            <a:r>
+              <a:rPr lang="en-US" sz="1200" dirty="0">
+                <a:solidFill>
+                  <a:srgbClr val="9DBDB0"/>
+                </a:solidFill>
+                <a:latin typeface="Space Grotesk" pitchFamily="34" charset="0"/>
+                <a:ea typeface="Space Grotesk" pitchFamily="34" charset="-122"/>
+                <a:cs typeface="Space Grotesk" pitchFamily="34" charset="-120"/>
+              </a:rPr>
+              <a:t>   Fractions </a:t>
+            </a:r>
+            <a:pPr indent="0" marL="0">
+              <a:buNone/>
+            </a:pPr>
+            <a:r>
+              <a:rPr lang="en-US" sz="1900" b="1" dirty="0">
                 <a:solidFill>
                   <a:srgbClr val="CDFCE3"/>
                 </a:solidFill>
@@ -3777,63 +4100,7 @@
                 <a:ea typeface="Space Grotesk" pitchFamily="34" charset="-122"/>
                 <a:cs typeface="Space Grotesk" pitchFamily="34" charset="-120"/>
               </a:rPr>
-              <a:t>49.3%</a:t>
-            </a:r>
-            <a:pPr indent="0" marL="0">
-              <a:buNone/>
-            </a:pPr>
-            <a:r>
-              <a:rPr lang="en-US" sz="1200" dirty="0">
-                <a:solidFill>
-                  <a:srgbClr val="9DBDB0"/>
-                </a:solidFill>
-                <a:latin typeface="Space Grotesk" pitchFamily="34" charset="0"/>
-                <a:ea typeface="Space Grotesk" pitchFamily="34" charset="-122"/>
-                <a:cs typeface="Space Grotesk" pitchFamily="34" charset="-120"/>
-              </a:rPr>
-              <a:t>   v8b </a:t>
-            </a:r>
-            <a:pPr indent="0" marL="0">
-              <a:buNone/>
-            </a:pPr>
-            <a:r>
-              <a:rPr lang="en-US" sz="2000" b="1" dirty="0">
-                <a:solidFill>
-                  <a:srgbClr val="FF826C"/>
-                </a:solidFill>
-                <a:latin typeface="Space Grotesk" pitchFamily="34" charset="0"/>
-                <a:ea typeface="Space Grotesk" pitchFamily="34" charset="-122"/>
-                <a:cs typeface="Space Grotesk" pitchFamily="34" charset="-120"/>
-              </a:rPr>
-              <a:t>46.3%</a:t>
-            </a:r>
-            <a:pPr indent="0" marL="0">
-              <a:buNone/>
-            </a:pPr>
-            <a:r>
-              <a:rPr lang="en-US" sz="1200" dirty="0">
-                <a:solidFill>
-                  <a:srgbClr val="9DBDB0"/>
-                </a:solidFill>
-                <a:latin typeface="Space Grotesk" pitchFamily="34" charset="0"/>
-                <a:ea typeface="Space Grotesk" pitchFamily="34" charset="-122"/>
-                <a:cs typeface="Space Grotesk" pitchFamily="34" charset="-120"/>
-              </a:rPr>
-              <a:t>   NMD2018 </a:t>
-            </a:r>
-            <a:pPr indent="0" marL="0">
-              <a:buNone/>
-            </a:pPr>
-            <a:r>
-              <a:rPr lang="en-US" sz="2000" b="1" dirty="0">
-                <a:solidFill>
-                  <a:srgbClr val="FFFFFF"/>
-                </a:solidFill>
-                <a:latin typeface="Space Grotesk" pitchFamily="34" charset="0"/>
-                <a:ea typeface="Space Grotesk" pitchFamily="34" charset="-122"/>
-                <a:cs typeface="Space Grotesk" pitchFamily="34" charset="-120"/>
-              </a:rPr>
-              <a:t>40.6%</a:t>
+              <a:t>57.9%</a:t>
             </a:r>
             <a:endParaRPr lang="en-US" sz="1200" dirty="0"/>
           </a:p>
@@ -3939,7 +4206,63 @@
               <a:buNone/>
             </a:pPr>
             <a:r>
-              <a:rPr lang="en-US" sz="2000" b="1" dirty="0">
+              <a:rPr lang="en-US" sz="1900" b="1" dirty="0">
+                <a:solidFill>
+                  <a:srgbClr val="FFFFFF"/>
+                </a:solidFill>
+                <a:latin typeface="Space Grotesk" pitchFamily="34" charset="0"/>
+                <a:ea typeface="Space Grotesk" pitchFamily="34" charset="-122"/>
+                <a:cs typeface="Space Grotesk" pitchFamily="34" charset="-120"/>
+              </a:rPr>
+              <a:t>0.298</a:t>
+            </a:r>
+            <a:pPr indent="0" marL="0">
+              <a:buNone/>
+            </a:pPr>
+            <a:r>
+              <a:rPr lang="en-US" sz="1200" dirty="0">
+                <a:solidFill>
+                  <a:srgbClr val="9DBDB0"/>
+                </a:solidFill>
+                <a:latin typeface="Space Grotesk" pitchFamily="34" charset="0"/>
+                <a:ea typeface="Space Grotesk" pitchFamily="34" charset="-122"/>
+                <a:cs typeface="Space Grotesk" pitchFamily="34" charset="-120"/>
+              </a:rPr>
+              <a:t>   Distilled </a:t>
+            </a:r>
+            <a:pPr indent="0" marL="0">
+              <a:buNone/>
+            </a:pPr>
+            <a:r>
+              <a:rPr lang="en-US" sz="1900" b="1" dirty="0">
+                <a:solidFill>
+                  <a:srgbClr val="FF826C"/>
+                </a:solidFill>
+                <a:latin typeface="Space Grotesk" pitchFamily="34" charset="0"/>
+                <a:ea typeface="Space Grotesk" pitchFamily="34" charset="-122"/>
+                <a:cs typeface="Space Grotesk" pitchFamily="34" charset="-120"/>
+              </a:rPr>
+              <a:t>0.371</a:t>
+            </a:r>
+            <a:pPr indent="0" marL="0">
+              <a:buNone/>
+            </a:pPr>
+            <a:r>
+              <a:rPr lang="en-US" sz="1200" dirty="0">
+                <a:solidFill>
+                  <a:srgbClr val="9DBDB0"/>
+                </a:solidFill>
+                <a:latin typeface="Space Grotesk" pitchFamily="34" charset="0"/>
+                <a:ea typeface="Space Grotesk" pitchFamily="34" charset="-122"/>
+                <a:cs typeface="Space Grotesk" pitchFamily="34" charset="-120"/>
+              </a:rPr>
+              <a:t>   Fractions </a:t>
+            </a:r>
+            <a:pPr indent="0" marL="0">
+              <a:buNone/>
+            </a:pPr>
+            <a:r>
+              <a:rPr lang="en-US" sz="1900" b="1" dirty="0">
                 <a:solidFill>
                   <a:srgbClr val="CDFCE3"/>
                 </a:solidFill>
@@ -3947,63 +4270,7 @@
                 <a:ea typeface="Space Grotesk" pitchFamily="34" charset="-122"/>
                 <a:cs typeface="Space Grotesk" pitchFamily="34" charset="-120"/>
               </a:rPr>
-              <a:t>0.366</a:t>
-            </a:r>
-            <a:pPr indent="0" marL="0">
-              <a:buNone/>
-            </a:pPr>
-            <a:r>
-              <a:rPr lang="en-US" sz="1200" dirty="0">
-                <a:solidFill>
-                  <a:srgbClr val="9DBDB0"/>
-                </a:solidFill>
-                <a:latin typeface="Space Grotesk" pitchFamily="34" charset="0"/>
-                <a:ea typeface="Space Grotesk" pitchFamily="34" charset="-122"/>
-                <a:cs typeface="Space Grotesk" pitchFamily="34" charset="-120"/>
-              </a:rPr>
-              <a:t>   v8b </a:t>
-            </a:r>
-            <a:pPr indent="0" marL="0">
-              <a:buNone/>
-            </a:pPr>
-            <a:r>
-              <a:rPr lang="en-US" sz="2000" b="1" dirty="0">
-                <a:solidFill>
-                  <a:srgbClr val="FF826C"/>
-                </a:solidFill>
-                <a:latin typeface="Space Grotesk" pitchFamily="34" charset="0"/>
-                <a:ea typeface="Space Grotesk" pitchFamily="34" charset="-122"/>
-                <a:cs typeface="Space Grotesk" pitchFamily="34" charset="-120"/>
-              </a:rPr>
-              <a:t>0.335</a:t>
-            </a:r>
-            <a:pPr indent="0" marL="0">
-              <a:buNone/>
-            </a:pPr>
-            <a:r>
-              <a:rPr lang="en-US" sz="1200" dirty="0">
-                <a:solidFill>
-                  <a:srgbClr val="9DBDB0"/>
-                </a:solidFill>
-                <a:latin typeface="Space Grotesk" pitchFamily="34" charset="0"/>
-                <a:ea typeface="Space Grotesk" pitchFamily="34" charset="-122"/>
-                <a:cs typeface="Space Grotesk" pitchFamily="34" charset="-120"/>
-              </a:rPr>
-              <a:t>   NMD2018 </a:t>
-            </a:r>
-            <a:pPr indent="0" marL="0">
-              <a:buNone/>
-            </a:pPr>
-            <a:r>
-              <a:rPr lang="en-US" sz="2000" b="1" dirty="0">
-                <a:solidFill>
-                  <a:srgbClr val="FFFFFF"/>
-                </a:solidFill>
-                <a:latin typeface="Space Grotesk" pitchFamily="34" charset="0"/>
-                <a:ea typeface="Space Grotesk" pitchFamily="34" charset="-122"/>
-                <a:cs typeface="Space Grotesk" pitchFamily="34" charset="-120"/>
-              </a:rPr>
-              <a:t>0.257</a:t>
+              <a:t>0.420</a:t>
             </a:r>
             <a:endParaRPr lang="en-US" sz="1200" dirty="0"/>
           </a:p>
@@ -4024,7 +4291,7 @@
           </p:nvPr>
         </p:nvGraphicFramePr>
         <p:xfrm>
-          <a:off x="640080" y="2743200"/>
+          <a:off x="640080" y="2788920"/>
           <a:ext cx="11109960" cy="914400"/>
         </p:xfrm>
         <a:graphic>
@@ -4032,981 +4299,12 @@
             <a:tbl>
               <a:tblPr/>
               <a:tblGrid>
-                <a:gridCol w="2057400"/>
-                <a:gridCol w="1005840"/>
-                <a:gridCol w="1005840"/>
-                <a:gridCol w="1005840"/>
-                <a:gridCol w="1005840"/>
-                <a:gridCol w="1005840"/>
-                <a:gridCol w="1005840"/>
-                <a:gridCol w="1005840"/>
-                <a:gridCol w="1005840"/>
-                <a:gridCol w="1005840"/>
+                <a:gridCol w="2880360"/>
+                <a:gridCol w="2743200"/>
+                <a:gridCol w="2743200"/>
+                <a:gridCol w="2743200"/>
               </a:tblGrid>
-              <a:tr h="365760">
-                <a:tc>
-                  <a:txBody>
-                    <a:bodyPr/>
-                    <a:lstStyle/>
-                    <a:p>
-                      <a:pPr algn="l" indent="0" marL="0">
-                        <a:buNone/>
-                      </a:pPr>
-                      <a:r>
-                        <a:rPr lang="en-US" sz="1150" b="1" dirty="0">
-                          <a:solidFill>
-                            <a:srgbClr val="FFFFFF"/>
-                          </a:solidFill>
-                          <a:latin typeface="Space Grotesk" pitchFamily="34" charset="0"/>
-                          <a:ea typeface="Space Grotesk" pitchFamily="34" charset="-122"/>
-                          <a:cs typeface="Space Grotesk" pitchFamily="34" charset="-120"/>
-                        </a:rPr>
-                        <a:t>Class</a:t>
-                      </a:r>
-                      <a:endParaRPr lang="en-US" sz="1150" dirty="0">
-                        <a:latin typeface="Space Grotesk" charset="0"/>
-                        <a:ea typeface="Space Grotesk" charset="0"/>
-                        <a:cs typeface="Space Grotesk" charset="0"/>
-                      </a:endParaRPr>
-                    </a:p>
-                  </a:txBody>
-                  <a:tcPr marL="91440" marR="91440" marT="45720" marB="45720" anchor="ctr">
-                    <a:lnL w="12700" cap="flat" cmpd="sng" algn="ctr">
-                      <a:solidFill>
-                        <a:srgbClr val="1C5248"/>
-                      </a:solidFill>
-                      <a:prstDash val="solid"/>
-                      <a:round/>
-                      <a:headEnd type="none" w="med" len="med"/>
-                      <a:tailEnd type="none" w="med" len="med"/>
-                    </a:lnL>
-                    <a:lnR w="12700" cap="flat" cmpd="sng" algn="ctr">
-                      <a:solidFill>
-                        <a:srgbClr val="1C5248"/>
-                      </a:solidFill>
-                      <a:prstDash val="solid"/>
-                      <a:round/>
-                      <a:headEnd type="none" w="med" len="med"/>
-                      <a:tailEnd type="none" w="med" len="med"/>
-                    </a:lnR>
-                    <a:lnT w="12700" cap="flat" cmpd="sng" algn="ctr">
-                      <a:solidFill>
-                        <a:srgbClr val="1C5248"/>
-                      </a:solidFill>
-                      <a:prstDash val="solid"/>
-                      <a:round/>
-                      <a:headEnd type="none" w="med" len="med"/>
-                      <a:tailEnd type="none" w="med" len="med"/>
-                    </a:lnT>
-                    <a:lnB w="12700" cap="flat" cmpd="sng" algn="ctr">
-                      <a:solidFill>
-                        <a:srgbClr val="1C5248"/>
-                      </a:solidFill>
-                      <a:prstDash val="solid"/>
-                      <a:round/>
-                      <a:headEnd type="none" w="med" len="med"/>
-                      <a:tailEnd type="none" w="med" len="med"/>
-                    </a:lnB>
-                    <a:solidFill>
-                      <a:srgbClr val="0A322C"/>
-                    </a:solidFill>
-                  </a:tcPr>
-                </a:tc>
-                <a:tc gridSpan="3">
-                  <a:txBody>
-                    <a:bodyPr/>
-                    <a:lstStyle/>
-                    <a:p>
-                      <a:pPr algn="ctr" indent="0" marL="0">
-                        <a:buNone/>
-                      </a:pPr>
-                      <a:r>
-                        <a:rPr lang="en-US" sz="1150" b="1" dirty="0">
-                          <a:solidFill>
-                            <a:srgbClr val="FF826C"/>
-                          </a:solidFill>
-                          <a:latin typeface="Space Grotesk" pitchFamily="34" charset="0"/>
-                          <a:ea typeface="Space Grotesk" pitchFamily="34" charset="-122"/>
-                          <a:cs typeface="Space Grotesk" pitchFamily="34" charset="-120"/>
-                        </a:rPr>
-                        <a:t>v8b</a:t>
-                      </a:r>
-                      <a:endParaRPr lang="en-US" sz="1150" dirty="0">
-                        <a:latin typeface="Space Grotesk" charset="0"/>
-                        <a:ea typeface="Space Grotesk" charset="0"/>
-                        <a:cs typeface="Space Grotesk" charset="0"/>
-                      </a:endParaRPr>
-                    </a:p>
-                  </a:txBody>
-                  <a:tcPr marL="91440" marR="91440" marT="45720" marB="45720" anchor="ctr">
-                    <a:lnL w="12700" cap="flat" cmpd="sng" algn="ctr">
-                      <a:solidFill>
-                        <a:srgbClr val="1C5248"/>
-                      </a:solidFill>
-                      <a:prstDash val="solid"/>
-                      <a:round/>
-                      <a:headEnd type="none" w="med" len="med"/>
-                      <a:tailEnd type="none" w="med" len="med"/>
-                    </a:lnL>
-                    <a:lnR w="12700" cap="flat" cmpd="sng" algn="ctr">
-                      <a:solidFill>
-                        <a:srgbClr val="1C5248"/>
-                      </a:solidFill>
-                      <a:prstDash val="solid"/>
-                      <a:round/>
-                      <a:headEnd type="none" w="med" len="med"/>
-                      <a:tailEnd type="none" w="med" len="med"/>
-                    </a:lnR>
-                    <a:lnT w="12700" cap="flat" cmpd="sng" algn="ctr">
-                      <a:solidFill>
-                        <a:srgbClr val="1C5248"/>
-                      </a:solidFill>
-                      <a:prstDash val="solid"/>
-                      <a:round/>
-                      <a:headEnd type="none" w="med" len="med"/>
-                      <a:tailEnd type="none" w="med" len="med"/>
-                    </a:lnT>
-                    <a:lnB w="12700" cap="flat" cmpd="sng" algn="ctr">
-                      <a:solidFill>
-                        <a:srgbClr val="1C5248"/>
-                      </a:solidFill>
-                      <a:prstDash val="solid"/>
-                      <a:round/>
-                      <a:headEnd type="none" w="med" len="med"/>
-                      <a:tailEnd type="none" w="med" len="med"/>
-                    </a:lnB>
-                    <a:solidFill>
-                      <a:srgbClr val="0A322C"/>
-                    </a:solidFill>
-                  </a:tcPr>
-                </a:tc>
-                <a:tc hMerge="1">
-                  <a:tcPr/>
-                </a:tc>
-                <a:tc hMerge="1">
-                  <a:tcPr/>
-                </a:tc>
-                <a:tc gridSpan="3">
-                  <a:txBody>
-                    <a:bodyPr/>
-                    <a:lstStyle/>
-                    <a:p>
-                      <a:pPr algn="ctr" indent="0" marL="0">
-                        <a:buNone/>
-                      </a:pPr>
-                      <a:r>
-                        <a:rPr lang="en-US" sz="1150" b="1" dirty="0">
-                          <a:solidFill>
-                            <a:srgbClr val="CDFCE3"/>
-                          </a:solidFill>
-                          <a:latin typeface="Space Grotesk" pitchFamily="34" charset="0"/>
-                          <a:ea typeface="Space Grotesk" pitchFamily="34" charset="-122"/>
-                          <a:cs typeface="Space Grotesk" pitchFamily="34" charset="-120"/>
-                        </a:rPr>
-                        <a:t>NMD2023</a:t>
-                      </a:r>
-                      <a:endParaRPr lang="en-US" sz="1150" dirty="0">
-                        <a:latin typeface="Space Grotesk" charset="0"/>
-                        <a:ea typeface="Space Grotesk" charset="0"/>
-                        <a:cs typeface="Space Grotesk" charset="0"/>
-                      </a:endParaRPr>
-                    </a:p>
-                  </a:txBody>
-                  <a:tcPr marL="91440" marR="91440" marT="45720" marB="45720" anchor="ctr">
-                    <a:lnL w="12700" cap="flat" cmpd="sng" algn="ctr">
-                      <a:solidFill>
-                        <a:srgbClr val="1C5248"/>
-                      </a:solidFill>
-                      <a:prstDash val="solid"/>
-                      <a:round/>
-                      <a:headEnd type="none" w="med" len="med"/>
-                      <a:tailEnd type="none" w="med" len="med"/>
-                    </a:lnL>
-                    <a:lnR w="12700" cap="flat" cmpd="sng" algn="ctr">
-                      <a:solidFill>
-                        <a:srgbClr val="1C5248"/>
-                      </a:solidFill>
-                      <a:prstDash val="solid"/>
-                      <a:round/>
-                      <a:headEnd type="none" w="med" len="med"/>
-                      <a:tailEnd type="none" w="med" len="med"/>
-                    </a:lnR>
-                    <a:lnT w="12700" cap="flat" cmpd="sng" algn="ctr">
-                      <a:solidFill>
-                        <a:srgbClr val="1C5248"/>
-                      </a:solidFill>
-                      <a:prstDash val="solid"/>
-                      <a:round/>
-                      <a:headEnd type="none" w="med" len="med"/>
-                      <a:tailEnd type="none" w="med" len="med"/>
-                    </a:lnT>
-                    <a:lnB w="12700" cap="flat" cmpd="sng" algn="ctr">
-                      <a:solidFill>
-                        <a:srgbClr val="1C5248"/>
-                      </a:solidFill>
-                      <a:prstDash val="solid"/>
-                      <a:round/>
-                      <a:headEnd type="none" w="med" len="med"/>
-                      <a:tailEnd type="none" w="med" len="med"/>
-                    </a:lnB>
-                    <a:solidFill>
-                      <a:srgbClr val="0A322C"/>
-                    </a:solidFill>
-                  </a:tcPr>
-                </a:tc>
-                <a:tc hMerge="1">
-                  <a:tcPr/>
-                </a:tc>
-                <a:tc hMerge="1">
-                  <a:tcPr/>
-                </a:tc>
-                <a:tc gridSpan="3">
-                  <a:txBody>
-                    <a:bodyPr/>
-                    <a:lstStyle/>
-                    <a:p>
-                      <a:pPr algn="ctr" indent="0" marL="0">
-                        <a:buNone/>
-                      </a:pPr>
-                      <a:r>
-                        <a:rPr lang="en-US" sz="1150" b="1" dirty="0">
-                          <a:solidFill>
-                            <a:srgbClr val="FFFFFF"/>
-                          </a:solidFill>
-                          <a:latin typeface="Space Grotesk" pitchFamily="34" charset="0"/>
-                          <a:ea typeface="Space Grotesk" pitchFamily="34" charset="-122"/>
-                          <a:cs typeface="Space Grotesk" pitchFamily="34" charset="-120"/>
-                        </a:rPr>
-                        <a:t>NMD2018</a:t>
-                      </a:r>
-                      <a:endParaRPr lang="en-US" sz="1150" dirty="0">
-                        <a:latin typeface="Space Grotesk" charset="0"/>
-                        <a:ea typeface="Space Grotesk" charset="0"/>
-                        <a:cs typeface="Space Grotesk" charset="0"/>
-                      </a:endParaRPr>
-                    </a:p>
-                  </a:txBody>
-                  <a:tcPr marL="91440" marR="91440" marT="45720" marB="45720" anchor="ctr">
-                    <a:lnL w="12700" cap="flat" cmpd="sng" algn="ctr">
-                      <a:solidFill>
-                        <a:srgbClr val="1C5248"/>
-                      </a:solidFill>
-                      <a:prstDash val="solid"/>
-                      <a:round/>
-                      <a:headEnd type="none" w="med" len="med"/>
-                      <a:tailEnd type="none" w="med" len="med"/>
-                    </a:lnL>
-                    <a:lnR w="12700" cap="flat" cmpd="sng" algn="ctr">
-                      <a:solidFill>
-                        <a:srgbClr val="1C5248"/>
-                      </a:solidFill>
-                      <a:prstDash val="solid"/>
-                      <a:round/>
-                      <a:headEnd type="none" w="med" len="med"/>
-                      <a:tailEnd type="none" w="med" len="med"/>
-                    </a:lnR>
-                    <a:lnT w="12700" cap="flat" cmpd="sng" algn="ctr">
-                      <a:solidFill>
-                        <a:srgbClr val="1C5248"/>
-                      </a:solidFill>
-                      <a:prstDash val="solid"/>
-                      <a:round/>
-                      <a:headEnd type="none" w="med" len="med"/>
-                      <a:tailEnd type="none" w="med" len="med"/>
-                    </a:lnT>
-                    <a:lnB w="12700" cap="flat" cmpd="sng" algn="ctr">
-                      <a:solidFill>
-                        <a:srgbClr val="1C5248"/>
-                      </a:solidFill>
-                      <a:prstDash val="solid"/>
-                      <a:round/>
-                      <a:headEnd type="none" w="med" len="med"/>
-                      <a:tailEnd type="none" w="med" len="med"/>
-                    </a:lnB>
-                    <a:solidFill>
-                      <a:srgbClr val="0A322C"/>
-                    </a:solidFill>
-                  </a:tcPr>
-                </a:tc>
-                <a:tc hMerge="1">
-                  <a:tcPr/>
-                </a:tc>
-                <a:tc hMerge="1">
-                  <a:tcPr/>
-                </a:tc>
-              </a:tr>
-              <a:tr h="310896">
-                <a:tc>
-                  <a:txBody>
-                    <a:bodyPr/>
-                    <a:lstStyle/>
-                    <a:p>
-                      <a:pPr algn="ctr" indent="0" marL="0">
-                        <a:buNone/>
-                      </a:pPr>
-                      <a:endParaRPr lang="en-US" sz="1000" dirty="0">
-                        <a:latin typeface="Space Grotesk" charset="0"/>
-                        <a:ea typeface="Space Grotesk" charset="0"/>
-                        <a:cs typeface="Space Grotesk" charset="0"/>
-                      </a:endParaRPr>
-                    </a:p>
-                  </a:txBody>
-                  <a:tcPr marL="91440" marR="91440" marT="45720" marB="45720" anchor="ctr">
-                    <a:lnL w="12700" cap="flat" cmpd="sng" algn="ctr">
-                      <a:solidFill>
-                        <a:srgbClr val="1C5248"/>
-                      </a:solidFill>
-                      <a:prstDash val="solid"/>
-                      <a:round/>
-                      <a:headEnd type="none" w="med" len="med"/>
-                      <a:tailEnd type="none" w="med" len="med"/>
-                    </a:lnL>
-                    <a:lnR w="12700" cap="flat" cmpd="sng" algn="ctr">
-                      <a:solidFill>
-                        <a:srgbClr val="1C5248"/>
-                      </a:solidFill>
-                      <a:prstDash val="solid"/>
-                      <a:round/>
-                      <a:headEnd type="none" w="med" len="med"/>
-                      <a:tailEnd type="none" w="med" len="med"/>
-                    </a:lnR>
-                    <a:lnT w="12700" cap="flat" cmpd="sng" algn="ctr">
-                      <a:solidFill>
-                        <a:srgbClr val="1C5248"/>
-                      </a:solidFill>
-                      <a:prstDash val="solid"/>
-                      <a:round/>
-                      <a:headEnd type="none" w="med" len="med"/>
-                      <a:tailEnd type="none" w="med" len="med"/>
-                    </a:lnT>
-                    <a:lnB w="12700" cap="flat" cmpd="sng" algn="ctr">
-                      <a:solidFill>
-                        <a:srgbClr val="1C5248"/>
-                      </a:solidFill>
-                      <a:prstDash val="solid"/>
-                      <a:round/>
-                      <a:headEnd type="none" w="med" len="med"/>
-                      <a:tailEnd type="none" w="med" len="med"/>
-                    </a:lnB>
-                    <a:solidFill>
-                      <a:srgbClr val="0A322C"/>
-                    </a:solidFill>
-                  </a:tcPr>
-                </a:tc>
-                <a:tc>
-                  <a:txBody>
-                    <a:bodyPr/>
-                    <a:lstStyle/>
-                    <a:p>
-                      <a:pPr algn="ctr" indent="0" marL="0">
-                        <a:buNone/>
-                      </a:pPr>
-                      <a:r>
-                        <a:rPr lang="en-US" sz="1000" b="1" dirty="0">
-                          <a:solidFill>
-                            <a:srgbClr val="9DBDB0"/>
-                          </a:solidFill>
-                          <a:latin typeface="Space Grotesk" pitchFamily="34" charset="0"/>
-                          <a:ea typeface="Space Grotesk" pitchFamily="34" charset="-122"/>
-                          <a:cs typeface="Space Grotesk" pitchFamily="34" charset="-120"/>
-                        </a:rPr>
-                        <a:t>U</a:t>
-                      </a:r>
-                      <a:endParaRPr lang="en-US" sz="1000" dirty="0">
-                        <a:latin typeface="Space Grotesk" charset="0"/>
-                        <a:ea typeface="Space Grotesk" charset="0"/>
-                        <a:cs typeface="Space Grotesk" charset="0"/>
-                      </a:endParaRPr>
-                    </a:p>
-                  </a:txBody>
-                  <a:tcPr marL="91440" marR="91440" marT="45720" marB="45720" anchor="ctr">
-                    <a:lnL w="12700" cap="flat" cmpd="sng" algn="ctr">
-                      <a:solidFill>
-                        <a:srgbClr val="1C5248"/>
-                      </a:solidFill>
-                      <a:prstDash val="solid"/>
-                      <a:round/>
-                      <a:headEnd type="none" w="med" len="med"/>
-                      <a:tailEnd type="none" w="med" len="med"/>
-                    </a:lnL>
-                    <a:lnR w="12700" cap="flat" cmpd="sng" algn="ctr">
-                      <a:solidFill>
-                        <a:srgbClr val="1C5248"/>
-                      </a:solidFill>
-                      <a:prstDash val="solid"/>
-                      <a:round/>
-                      <a:headEnd type="none" w="med" len="med"/>
-                      <a:tailEnd type="none" w="med" len="med"/>
-                    </a:lnR>
-                    <a:lnT w="12700" cap="flat" cmpd="sng" algn="ctr">
-                      <a:solidFill>
-                        <a:srgbClr val="1C5248"/>
-                      </a:solidFill>
-                      <a:prstDash val="solid"/>
-                      <a:round/>
-                      <a:headEnd type="none" w="med" len="med"/>
-                      <a:tailEnd type="none" w="med" len="med"/>
-                    </a:lnT>
-                    <a:lnB w="12700" cap="flat" cmpd="sng" algn="ctr">
-                      <a:solidFill>
-                        <a:srgbClr val="1C5248"/>
-                      </a:solidFill>
-                      <a:prstDash val="solid"/>
-                      <a:round/>
-                      <a:headEnd type="none" w="med" len="med"/>
-                      <a:tailEnd type="none" w="med" len="med"/>
-                    </a:lnB>
-                    <a:solidFill>
-                      <a:srgbClr val="0A322C"/>
-                    </a:solidFill>
-                  </a:tcPr>
-                </a:tc>
-                <a:tc>
-                  <a:txBody>
-                    <a:bodyPr/>
-                    <a:lstStyle/>
-                    <a:p>
-                      <a:pPr algn="ctr" indent="0" marL="0">
-                        <a:buNone/>
-                      </a:pPr>
-                      <a:r>
-                        <a:rPr lang="en-US" sz="1000" b="1" dirty="0">
-                          <a:solidFill>
-                            <a:srgbClr val="9DBDB0"/>
-                          </a:solidFill>
-                          <a:latin typeface="Space Grotesk" pitchFamily="34" charset="0"/>
-                          <a:ea typeface="Space Grotesk" pitchFamily="34" charset="-122"/>
-                          <a:cs typeface="Space Grotesk" pitchFamily="34" charset="-120"/>
-                        </a:rPr>
-                        <a:t>P</a:t>
-                      </a:r>
-                      <a:endParaRPr lang="en-US" sz="1000" dirty="0">
-                        <a:latin typeface="Space Grotesk" charset="0"/>
-                        <a:ea typeface="Space Grotesk" charset="0"/>
-                        <a:cs typeface="Space Grotesk" charset="0"/>
-                      </a:endParaRPr>
-                    </a:p>
-                  </a:txBody>
-                  <a:tcPr marL="91440" marR="91440" marT="45720" marB="45720" anchor="ctr">
-                    <a:lnL w="12700" cap="flat" cmpd="sng" algn="ctr">
-                      <a:solidFill>
-                        <a:srgbClr val="1C5248"/>
-                      </a:solidFill>
-                      <a:prstDash val="solid"/>
-                      <a:round/>
-                      <a:headEnd type="none" w="med" len="med"/>
-                      <a:tailEnd type="none" w="med" len="med"/>
-                    </a:lnL>
-                    <a:lnR w="12700" cap="flat" cmpd="sng" algn="ctr">
-                      <a:solidFill>
-                        <a:srgbClr val="1C5248"/>
-                      </a:solidFill>
-                      <a:prstDash val="solid"/>
-                      <a:round/>
-                      <a:headEnd type="none" w="med" len="med"/>
-                      <a:tailEnd type="none" w="med" len="med"/>
-                    </a:lnR>
-                    <a:lnT w="12700" cap="flat" cmpd="sng" algn="ctr">
-                      <a:solidFill>
-                        <a:srgbClr val="1C5248"/>
-                      </a:solidFill>
-                      <a:prstDash val="solid"/>
-                      <a:round/>
-                      <a:headEnd type="none" w="med" len="med"/>
-                      <a:tailEnd type="none" w="med" len="med"/>
-                    </a:lnT>
-                    <a:lnB w="12700" cap="flat" cmpd="sng" algn="ctr">
-                      <a:solidFill>
-                        <a:srgbClr val="1C5248"/>
-                      </a:solidFill>
-                      <a:prstDash val="solid"/>
-                      <a:round/>
-                      <a:headEnd type="none" w="med" len="med"/>
-                      <a:tailEnd type="none" w="med" len="med"/>
-                    </a:lnB>
-                    <a:solidFill>
-                      <a:srgbClr val="0A322C"/>
-                    </a:solidFill>
-                  </a:tcPr>
-                </a:tc>
-                <a:tc>
-                  <a:txBody>
-                    <a:bodyPr/>
-                    <a:lstStyle/>
-                    <a:p>
-                      <a:pPr algn="ctr" indent="0" marL="0">
-                        <a:buNone/>
-                      </a:pPr>
-                      <a:r>
-                        <a:rPr lang="en-US" sz="1000" b="1" dirty="0">
-                          <a:solidFill>
-                            <a:srgbClr val="9DBDB0"/>
-                          </a:solidFill>
-                          <a:latin typeface="Space Grotesk" pitchFamily="34" charset="0"/>
-                          <a:ea typeface="Space Grotesk" pitchFamily="34" charset="-122"/>
-                          <a:cs typeface="Space Grotesk" pitchFamily="34" charset="-120"/>
-                        </a:rPr>
-                        <a:t>F1</a:t>
-                      </a:r>
-                      <a:endParaRPr lang="en-US" sz="1000" dirty="0">
-                        <a:latin typeface="Space Grotesk" charset="0"/>
-                        <a:ea typeface="Space Grotesk" charset="0"/>
-                        <a:cs typeface="Space Grotesk" charset="0"/>
-                      </a:endParaRPr>
-                    </a:p>
-                  </a:txBody>
-                  <a:tcPr marL="91440" marR="91440" marT="45720" marB="45720" anchor="ctr">
-                    <a:lnL w="12700" cap="flat" cmpd="sng" algn="ctr">
-                      <a:solidFill>
-                        <a:srgbClr val="1C5248"/>
-                      </a:solidFill>
-                      <a:prstDash val="solid"/>
-                      <a:round/>
-                      <a:headEnd type="none" w="med" len="med"/>
-                      <a:tailEnd type="none" w="med" len="med"/>
-                    </a:lnL>
-                    <a:lnR w="12700" cap="flat" cmpd="sng" algn="ctr">
-                      <a:solidFill>
-                        <a:srgbClr val="1C5248"/>
-                      </a:solidFill>
-                      <a:prstDash val="solid"/>
-                      <a:round/>
-                      <a:headEnd type="none" w="med" len="med"/>
-                      <a:tailEnd type="none" w="med" len="med"/>
-                    </a:lnR>
-                    <a:lnT w="12700" cap="flat" cmpd="sng" algn="ctr">
-                      <a:solidFill>
-                        <a:srgbClr val="1C5248"/>
-                      </a:solidFill>
-                      <a:prstDash val="solid"/>
-                      <a:round/>
-                      <a:headEnd type="none" w="med" len="med"/>
-                      <a:tailEnd type="none" w="med" len="med"/>
-                    </a:lnT>
-                    <a:lnB w="12700" cap="flat" cmpd="sng" algn="ctr">
-                      <a:solidFill>
-                        <a:srgbClr val="1C5248"/>
-                      </a:solidFill>
-                      <a:prstDash val="solid"/>
-                      <a:round/>
-                      <a:headEnd type="none" w="med" len="med"/>
-                      <a:tailEnd type="none" w="med" len="med"/>
-                    </a:lnB>
-                    <a:solidFill>
-                      <a:srgbClr val="17564A"/>
-                    </a:solidFill>
-                  </a:tcPr>
-                </a:tc>
-                <a:tc>
-                  <a:txBody>
-                    <a:bodyPr/>
-                    <a:lstStyle/>
-                    <a:p>
-                      <a:pPr algn="ctr" indent="0" marL="0">
-                        <a:buNone/>
-                      </a:pPr>
-                      <a:r>
-                        <a:rPr lang="en-US" sz="1000" b="1" dirty="0">
-                          <a:solidFill>
-                            <a:srgbClr val="9DBDB0"/>
-                          </a:solidFill>
-                          <a:latin typeface="Space Grotesk" pitchFamily="34" charset="0"/>
-                          <a:ea typeface="Space Grotesk" pitchFamily="34" charset="-122"/>
-                          <a:cs typeface="Space Grotesk" pitchFamily="34" charset="-120"/>
-                        </a:rPr>
-                        <a:t>U</a:t>
-                      </a:r>
-                      <a:endParaRPr lang="en-US" sz="1000" dirty="0">
-                        <a:latin typeface="Space Grotesk" charset="0"/>
-                        <a:ea typeface="Space Grotesk" charset="0"/>
-                        <a:cs typeface="Space Grotesk" charset="0"/>
-                      </a:endParaRPr>
-                    </a:p>
-                  </a:txBody>
-                  <a:tcPr marL="91440" marR="91440" marT="45720" marB="45720" anchor="ctr">
-                    <a:lnL w="12700" cap="flat" cmpd="sng" algn="ctr">
-                      <a:solidFill>
-                        <a:srgbClr val="1C5248"/>
-                      </a:solidFill>
-                      <a:prstDash val="solid"/>
-                      <a:round/>
-                      <a:headEnd type="none" w="med" len="med"/>
-                      <a:tailEnd type="none" w="med" len="med"/>
-                    </a:lnL>
-                    <a:lnR w="12700" cap="flat" cmpd="sng" algn="ctr">
-                      <a:solidFill>
-                        <a:srgbClr val="1C5248"/>
-                      </a:solidFill>
-                      <a:prstDash val="solid"/>
-                      <a:round/>
-                      <a:headEnd type="none" w="med" len="med"/>
-                      <a:tailEnd type="none" w="med" len="med"/>
-                    </a:lnR>
-                    <a:lnT w="12700" cap="flat" cmpd="sng" algn="ctr">
-                      <a:solidFill>
-                        <a:srgbClr val="1C5248"/>
-                      </a:solidFill>
-                      <a:prstDash val="solid"/>
-                      <a:round/>
-                      <a:headEnd type="none" w="med" len="med"/>
-                      <a:tailEnd type="none" w="med" len="med"/>
-                    </a:lnT>
-                    <a:lnB w="12700" cap="flat" cmpd="sng" algn="ctr">
-                      <a:solidFill>
-                        <a:srgbClr val="1C5248"/>
-                      </a:solidFill>
-                      <a:prstDash val="solid"/>
-                      <a:round/>
-                      <a:headEnd type="none" w="med" len="med"/>
-                      <a:tailEnd type="none" w="med" len="med"/>
-                    </a:lnB>
-                    <a:solidFill>
-                      <a:srgbClr val="0A322C"/>
-                    </a:solidFill>
-                  </a:tcPr>
-                </a:tc>
-                <a:tc>
-                  <a:txBody>
-                    <a:bodyPr/>
-                    <a:lstStyle/>
-                    <a:p>
-                      <a:pPr algn="ctr" indent="0" marL="0">
-                        <a:buNone/>
-                      </a:pPr>
-                      <a:r>
-                        <a:rPr lang="en-US" sz="1000" b="1" dirty="0">
-                          <a:solidFill>
-                            <a:srgbClr val="9DBDB0"/>
-                          </a:solidFill>
-                          <a:latin typeface="Space Grotesk" pitchFamily="34" charset="0"/>
-                          <a:ea typeface="Space Grotesk" pitchFamily="34" charset="-122"/>
-                          <a:cs typeface="Space Grotesk" pitchFamily="34" charset="-120"/>
-                        </a:rPr>
-                        <a:t>P</a:t>
-                      </a:r>
-                      <a:endParaRPr lang="en-US" sz="1000" dirty="0">
-                        <a:latin typeface="Space Grotesk" charset="0"/>
-                        <a:ea typeface="Space Grotesk" charset="0"/>
-                        <a:cs typeface="Space Grotesk" charset="0"/>
-                      </a:endParaRPr>
-                    </a:p>
-                  </a:txBody>
-                  <a:tcPr marL="91440" marR="91440" marT="45720" marB="45720" anchor="ctr">
-                    <a:lnL w="12700" cap="flat" cmpd="sng" algn="ctr">
-                      <a:solidFill>
-                        <a:srgbClr val="1C5248"/>
-                      </a:solidFill>
-                      <a:prstDash val="solid"/>
-                      <a:round/>
-                      <a:headEnd type="none" w="med" len="med"/>
-                      <a:tailEnd type="none" w="med" len="med"/>
-                    </a:lnL>
-                    <a:lnR w="12700" cap="flat" cmpd="sng" algn="ctr">
-                      <a:solidFill>
-                        <a:srgbClr val="1C5248"/>
-                      </a:solidFill>
-                      <a:prstDash val="solid"/>
-                      <a:round/>
-                      <a:headEnd type="none" w="med" len="med"/>
-                      <a:tailEnd type="none" w="med" len="med"/>
-                    </a:lnR>
-                    <a:lnT w="12700" cap="flat" cmpd="sng" algn="ctr">
-                      <a:solidFill>
-                        <a:srgbClr val="1C5248"/>
-                      </a:solidFill>
-                      <a:prstDash val="solid"/>
-                      <a:round/>
-                      <a:headEnd type="none" w="med" len="med"/>
-                      <a:tailEnd type="none" w="med" len="med"/>
-                    </a:lnT>
-                    <a:lnB w="12700" cap="flat" cmpd="sng" algn="ctr">
-                      <a:solidFill>
-                        <a:srgbClr val="1C5248"/>
-                      </a:solidFill>
-                      <a:prstDash val="solid"/>
-                      <a:round/>
-                      <a:headEnd type="none" w="med" len="med"/>
-                      <a:tailEnd type="none" w="med" len="med"/>
-                    </a:lnB>
-                    <a:solidFill>
-                      <a:srgbClr val="0A322C"/>
-                    </a:solidFill>
-                  </a:tcPr>
-                </a:tc>
-                <a:tc>
-                  <a:txBody>
-                    <a:bodyPr/>
-                    <a:lstStyle/>
-                    <a:p>
-                      <a:pPr algn="ctr" indent="0" marL="0">
-                        <a:buNone/>
-                      </a:pPr>
-                      <a:r>
-                        <a:rPr lang="en-US" sz="1000" b="1" dirty="0">
-                          <a:solidFill>
-                            <a:srgbClr val="9DBDB0"/>
-                          </a:solidFill>
-                          <a:latin typeface="Space Grotesk" pitchFamily="34" charset="0"/>
-                          <a:ea typeface="Space Grotesk" pitchFamily="34" charset="-122"/>
-                          <a:cs typeface="Space Grotesk" pitchFamily="34" charset="-120"/>
-                        </a:rPr>
-                        <a:t>F1</a:t>
-                      </a:r>
-                      <a:endParaRPr lang="en-US" sz="1000" dirty="0">
-                        <a:latin typeface="Space Grotesk" charset="0"/>
-                        <a:ea typeface="Space Grotesk" charset="0"/>
-                        <a:cs typeface="Space Grotesk" charset="0"/>
-                      </a:endParaRPr>
-                    </a:p>
-                  </a:txBody>
-                  <a:tcPr marL="91440" marR="91440" marT="45720" marB="45720" anchor="ctr">
-                    <a:lnL w="12700" cap="flat" cmpd="sng" algn="ctr">
-                      <a:solidFill>
-                        <a:srgbClr val="1C5248"/>
-                      </a:solidFill>
-                      <a:prstDash val="solid"/>
-                      <a:round/>
-                      <a:headEnd type="none" w="med" len="med"/>
-                      <a:tailEnd type="none" w="med" len="med"/>
-                    </a:lnL>
-                    <a:lnR w="12700" cap="flat" cmpd="sng" algn="ctr">
-                      <a:solidFill>
-                        <a:srgbClr val="1C5248"/>
-                      </a:solidFill>
-                      <a:prstDash val="solid"/>
-                      <a:round/>
-                      <a:headEnd type="none" w="med" len="med"/>
-                      <a:tailEnd type="none" w="med" len="med"/>
-                    </a:lnR>
-                    <a:lnT w="12700" cap="flat" cmpd="sng" algn="ctr">
-                      <a:solidFill>
-                        <a:srgbClr val="1C5248"/>
-                      </a:solidFill>
-                      <a:prstDash val="solid"/>
-                      <a:round/>
-                      <a:headEnd type="none" w="med" len="med"/>
-                      <a:tailEnd type="none" w="med" len="med"/>
-                    </a:lnT>
-                    <a:lnB w="12700" cap="flat" cmpd="sng" algn="ctr">
-                      <a:solidFill>
-                        <a:srgbClr val="1C5248"/>
-                      </a:solidFill>
-                      <a:prstDash val="solid"/>
-                      <a:round/>
-                      <a:headEnd type="none" w="med" len="med"/>
-                      <a:tailEnd type="none" w="med" len="med"/>
-                    </a:lnB>
-                    <a:solidFill>
-                      <a:srgbClr val="17564A"/>
-                    </a:solidFill>
-                  </a:tcPr>
-                </a:tc>
-                <a:tc>
-                  <a:txBody>
-                    <a:bodyPr/>
-                    <a:lstStyle/>
-                    <a:p>
-                      <a:pPr algn="ctr" indent="0" marL="0">
-                        <a:buNone/>
-                      </a:pPr>
-                      <a:r>
-                        <a:rPr lang="en-US" sz="1000" b="1" dirty="0">
-                          <a:solidFill>
-                            <a:srgbClr val="9DBDB0"/>
-                          </a:solidFill>
-                          <a:latin typeface="Space Grotesk" pitchFamily="34" charset="0"/>
-                          <a:ea typeface="Space Grotesk" pitchFamily="34" charset="-122"/>
-                          <a:cs typeface="Space Grotesk" pitchFamily="34" charset="-120"/>
-                        </a:rPr>
-                        <a:t>U</a:t>
-                      </a:r>
-                      <a:endParaRPr lang="en-US" sz="1000" dirty="0">
-                        <a:latin typeface="Space Grotesk" charset="0"/>
-                        <a:ea typeface="Space Grotesk" charset="0"/>
-                        <a:cs typeface="Space Grotesk" charset="0"/>
-                      </a:endParaRPr>
-                    </a:p>
-                  </a:txBody>
-                  <a:tcPr marL="91440" marR="91440" marT="45720" marB="45720" anchor="ctr">
-                    <a:lnL w="12700" cap="flat" cmpd="sng" algn="ctr">
-                      <a:solidFill>
-                        <a:srgbClr val="1C5248"/>
-                      </a:solidFill>
-                      <a:prstDash val="solid"/>
-                      <a:round/>
-                      <a:headEnd type="none" w="med" len="med"/>
-                      <a:tailEnd type="none" w="med" len="med"/>
-                    </a:lnL>
-                    <a:lnR w="12700" cap="flat" cmpd="sng" algn="ctr">
-                      <a:solidFill>
-                        <a:srgbClr val="1C5248"/>
-                      </a:solidFill>
-                      <a:prstDash val="solid"/>
-                      <a:round/>
-                      <a:headEnd type="none" w="med" len="med"/>
-                      <a:tailEnd type="none" w="med" len="med"/>
-                    </a:lnR>
-                    <a:lnT w="12700" cap="flat" cmpd="sng" algn="ctr">
-                      <a:solidFill>
-                        <a:srgbClr val="1C5248"/>
-                      </a:solidFill>
-                      <a:prstDash val="solid"/>
-                      <a:round/>
-                      <a:headEnd type="none" w="med" len="med"/>
-                      <a:tailEnd type="none" w="med" len="med"/>
-                    </a:lnT>
-                    <a:lnB w="12700" cap="flat" cmpd="sng" algn="ctr">
-                      <a:solidFill>
-                        <a:srgbClr val="1C5248"/>
-                      </a:solidFill>
-                      <a:prstDash val="solid"/>
-                      <a:round/>
-                      <a:headEnd type="none" w="med" len="med"/>
-                      <a:tailEnd type="none" w="med" len="med"/>
-                    </a:lnB>
-                    <a:solidFill>
-                      <a:srgbClr val="0A322C"/>
-                    </a:solidFill>
-                  </a:tcPr>
-                </a:tc>
-                <a:tc>
-                  <a:txBody>
-                    <a:bodyPr/>
-                    <a:lstStyle/>
-                    <a:p>
-                      <a:pPr algn="ctr" indent="0" marL="0">
-                        <a:buNone/>
-                      </a:pPr>
-                      <a:r>
-                        <a:rPr lang="en-US" sz="1000" b="1" dirty="0">
-                          <a:solidFill>
-                            <a:srgbClr val="9DBDB0"/>
-                          </a:solidFill>
-                          <a:latin typeface="Space Grotesk" pitchFamily="34" charset="0"/>
-                          <a:ea typeface="Space Grotesk" pitchFamily="34" charset="-122"/>
-                          <a:cs typeface="Space Grotesk" pitchFamily="34" charset="-120"/>
-                        </a:rPr>
-                        <a:t>P</a:t>
-                      </a:r>
-                      <a:endParaRPr lang="en-US" sz="1000" dirty="0">
-                        <a:latin typeface="Space Grotesk" charset="0"/>
-                        <a:ea typeface="Space Grotesk" charset="0"/>
-                        <a:cs typeface="Space Grotesk" charset="0"/>
-                      </a:endParaRPr>
-                    </a:p>
-                  </a:txBody>
-                  <a:tcPr marL="91440" marR="91440" marT="45720" marB="45720" anchor="ctr">
-                    <a:lnL w="12700" cap="flat" cmpd="sng" algn="ctr">
-                      <a:solidFill>
-                        <a:srgbClr val="1C5248"/>
-                      </a:solidFill>
-                      <a:prstDash val="solid"/>
-                      <a:round/>
-                      <a:headEnd type="none" w="med" len="med"/>
-                      <a:tailEnd type="none" w="med" len="med"/>
-                    </a:lnL>
-                    <a:lnR w="12700" cap="flat" cmpd="sng" algn="ctr">
-                      <a:solidFill>
-                        <a:srgbClr val="1C5248"/>
-                      </a:solidFill>
-                      <a:prstDash val="solid"/>
-                      <a:round/>
-                      <a:headEnd type="none" w="med" len="med"/>
-                      <a:tailEnd type="none" w="med" len="med"/>
-                    </a:lnR>
-                    <a:lnT w="12700" cap="flat" cmpd="sng" algn="ctr">
-                      <a:solidFill>
-                        <a:srgbClr val="1C5248"/>
-                      </a:solidFill>
-                      <a:prstDash val="solid"/>
-                      <a:round/>
-                      <a:headEnd type="none" w="med" len="med"/>
-                      <a:tailEnd type="none" w="med" len="med"/>
-                    </a:lnT>
-                    <a:lnB w="12700" cap="flat" cmpd="sng" algn="ctr">
-                      <a:solidFill>
-                        <a:srgbClr val="1C5248"/>
-                      </a:solidFill>
-                      <a:prstDash val="solid"/>
-                      <a:round/>
-                      <a:headEnd type="none" w="med" len="med"/>
-                      <a:tailEnd type="none" w="med" len="med"/>
-                    </a:lnB>
-                    <a:solidFill>
-                      <a:srgbClr val="0A322C"/>
-                    </a:solidFill>
-                  </a:tcPr>
-                </a:tc>
-                <a:tc>
-                  <a:txBody>
-                    <a:bodyPr/>
-                    <a:lstStyle/>
-                    <a:p>
-                      <a:pPr algn="ctr" indent="0" marL="0">
-                        <a:buNone/>
-                      </a:pPr>
-                      <a:r>
-                        <a:rPr lang="en-US" sz="1000" b="1" dirty="0">
-                          <a:solidFill>
-                            <a:srgbClr val="9DBDB0"/>
-                          </a:solidFill>
-                          <a:latin typeface="Space Grotesk" pitchFamily="34" charset="0"/>
-                          <a:ea typeface="Space Grotesk" pitchFamily="34" charset="-122"/>
-                          <a:cs typeface="Space Grotesk" pitchFamily="34" charset="-120"/>
-                        </a:rPr>
-                        <a:t>F1</a:t>
-                      </a:r>
-                      <a:endParaRPr lang="en-US" sz="1000" dirty="0">
-                        <a:latin typeface="Space Grotesk" charset="0"/>
-                        <a:ea typeface="Space Grotesk" charset="0"/>
-                        <a:cs typeface="Space Grotesk" charset="0"/>
-                      </a:endParaRPr>
-                    </a:p>
-                  </a:txBody>
-                  <a:tcPr marL="91440" marR="91440" marT="45720" marB="45720" anchor="ctr">
-                    <a:lnL w="12700" cap="flat" cmpd="sng" algn="ctr">
-                      <a:solidFill>
-                        <a:srgbClr val="1C5248"/>
-                      </a:solidFill>
-                      <a:prstDash val="solid"/>
-                      <a:round/>
-                      <a:headEnd type="none" w="med" len="med"/>
-                      <a:tailEnd type="none" w="med" len="med"/>
-                    </a:lnL>
-                    <a:lnR w="12700" cap="flat" cmpd="sng" algn="ctr">
-                      <a:solidFill>
-                        <a:srgbClr val="1C5248"/>
-                      </a:solidFill>
-                      <a:prstDash val="solid"/>
-                      <a:round/>
-                      <a:headEnd type="none" w="med" len="med"/>
-                      <a:tailEnd type="none" w="med" len="med"/>
-                    </a:lnR>
-                    <a:lnT w="12700" cap="flat" cmpd="sng" algn="ctr">
-                      <a:solidFill>
-                        <a:srgbClr val="1C5248"/>
-                      </a:solidFill>
-                      <a:prstDash val="solid"/>
-                      <a:round/>
-                      <a:headEnd type="none" w="med" len="med"/>
-                      <a:tailEnd type="none" w="med" len="med"/>
-                    </a:lnT>
-                    <a:lnB w="12700" cap="flat" cmpd="sng" algn="ctr">
-                      <a:solidFill>
-                        <a:srgbClr val="1C5248"/>
-                      </a:solidFill>
-                      <a:prstDash val="solid"/>
-                      <a:round/>
-                      <a:headEnd type="none" w="med" len="med"/>
-                      <a:tailEnd type="none" w="med" len="med"/>
-                    </a:lnB>
-                    <a:solidFill>
-                      <a:srgbClr val="17564A"/>
-                    </a:solidFill>
-                  </a:tcPr>
-                </a:tc>
-              </a:tr>
-              <a:tr h="548640">
+              <a:tr h="512064">
                 <a:tc>
                   <a:txBody>
                     <a:bodyPr/>
@@ -5024,9 +4322,283 @@
                           <a:ea typeface="Space Grotesk" pitchFamily="34" charset="-122"/>
                           <a:cs typeface="Space Grotesk" pitchFamily="34" charset="-120"/>
                         </a:rPr>
+                        <a:t>Class</a:t>
+                      </a:r>
+                      <a:endParaRPr lang="en-US" sz="1200" dirty="0">
+                        <a:latin typeface="Space Grotesk" charset="0"/>
+                        <a:ea typeface="Space Grotesk" charset="0"/>
+                        <a:cs typeface="Space Grotesk" charset="0"/>
+                      </a:endParaRPr>
+                    </a:p>
+                  </a:txBody>
+                  <a:tcPr marL="91440" marR="91440" marT="45720" marB="45720" anchor="ctr">
+                    <a:lnL w="12700" cap="flat" cmpd="sng" algn="ctr">
+                      <a:solidFill>
+                        <a:srgbClr val="1C5248"/>
+                      </a:solidFill>
+                      <a:prstDash val="solid"/>
+                      <a:round/>
+                      <a:headEnd type="none" w="med" len="med"/>
+                      <a:tailEnd type="none" w="med" len="med"/>
+                    </a:lnL>
+                    <a:lnR w="12700" cap="flat" cmpd="sng" algn="ctr">
+                      <a:solidFill>
+                        <a:srgbClr val="1C5248"/>
+                      </a:solidFill>
+                      <a:prstDash val="solid"/>
+                      <a:round/>
+                      <a:headEnd type="none" w="med" len="med"/>
+                      <a:tailEnd type="none" w="med" len="med"/>
+                    </a:lnR>
+                    <a:lnT w="12700" cap="flat" cmpd="sng" algn="ctr">
+                      <a:solidFill>
+                        <a:srgbClr val="1C5248"/>
+                      </a:solidFill>
+                      <a:prstDash val="solid"/>
+                      <a:round/>
+                      <a:headEnd type="none" w="med" len="med"/>
+                      <a:tailEnd type="none" w="med" len="med"/>
+                    </a:lnT>
+                    <a:lnB w="12700" cap="flat" cmpd="sng" algn="ctr">
+                      <a:solidFill>
+                        <a:srgbClr val="1C5248"/>
+                      </a:solidFill>
+                      <a:prstDash val="solid"/>
+                      <a:round/>
+                      <a:headEnd type="none" w="med" len="med"/>
+                      <a:tailEnd type="none" w="med" len="med"/>
+                    </a:lnB>
+                    <a:solidFill>
+                      <a:srgbClr val="0A322C"/>
+                    </a:solidFill>
+                  </a:tcPr>
+                </a:tc>
+                <a:tc>
+                  <a:txBody>
+                    <a:bodyPr/>
+                    <a:lstStyle/>
+                    <a:p>
+                      <a:pPr algn="ctr" indent="0" marL="0">
+                        <a:buNone/>
+                      </a:pPr>
+                      <a:r>
+                        <a:rPr lang="en-US" sz="1200" b="1" dirty="0">
+                          <a:solidFill>
+                            <a:srgbClr val="FFFFFF"/>
+                          </a:solidFill>
+                          <a:latin typeface="Space Grotesk" pitchFamily="34" charset="0"/>
+                          <a:ea typeface="Space Grotesk" pitchFamily="34" charset="-122"/>
+                          <a:cs typeface="Space Grotesk" pitchFamily="34" charset="-120"/>
+                        </a:rPr>
+                        <a:t>NMD2023</a:t>
+                      </a:r>
+                      <a:endParaRPr lang="en-US" sz="1200" dirty="0">
+                        <a:latin typeface="Space Grotesk" charset="0"/>
+                        <a:ea typeface="Space Grotesk" charset="0"/>
+                        <a:cs typeface="Space Grotesk" charset="0"/>
+                      </a:endParaRPr>
+                    </a:p>
+                  </a:txBody>
+                  <a:tcPr marL="91440" marR="91440" marT="45720" marB="45720" anchor="ctr">
+                    <a:lnL w="12700" cap="flat" cmpd="sng" algn="ctr">
+                      <a:solidFill>
+                        <a:srgbClr val="1C5248"/>
+                      </a:solidFill>
+                      <a:prstDash val="solid"/>
+                      <a:round/>
+                      <a:headEnd type="none" w="med" len="med"/>
+                      <a:tailEnd type="none" w="med" len="med"/>
+                    </a:lnL>
+                    <a:lnR w="12700" cap="flat" cmpd="sng" algn="ctr">
+                      <a:solidFill>
+                        <a:srgbClr val="1C5248"/>
+                      </a:solidFill>
+                      <a:prstDash val="solid"/>
+                      <a:round/>
+                      <a:headEnd type="none" w="med" len="med"/>
+                      <a:tailEnd type="none" w="med" len="med"/>
+                    </a:lnR>
+                    <a:lnT w="12700" cap="flat" cmpd="sng" algn="ctr">
+                      <a:solidFill>
+                        <a:srgbClr val="1C5248"/>
+                      </a:solidFill>
+                      <a:prstDash val="solid"/>
+                      <a:round/>
+                      <a:headEnd type="none" w="med" len="med"/>
+                      <a:tailEnd type="none" w="med" len="med"/>
+                    </a:lnT>
+                    <a:lnB w="12700" cap="flat" cmpd="sng" algn="ctr">
+                      <a:solidFill>
+                        <a:srgbClr val="1C5248"/>
+                      </a:solidFill>
+                      <a:prstDash val="solid"/>
+                      <a:round/>
+                      <a:headEnd type="none" w="med" len="med"/>
+                      <a:tailEnd type="none" w="med" len="med"/>
+                    </a:lnB>
+                    <a:solidFill>
+                      <a:srgbClr val="0A322C"/>
+                    </a:solidFill>
+                  </a:tcPr>
+                </a:tc>
+                <a:tc>
+                  <a:txBody>
+                    <a:bodyPr/>
+                    <a:lstStyle/>
+                    <a:p>
+                      <a:pPr algn="ctr" indent="0" marL="0">
+                        <a:buNone/>
+                      </a:pPr>
+                      <a:r>
+                        <a:rPr lang="en-US" sz="1200" b="1" dirty="0">
+                          <a:solidFill>
+                            <a:srgbClr val="FF826C"/>
+                          </a:solidFill>
+                          <a:latin typeface="Space Grotesk" pitchFamily="34" charset="0"/>
+                          <a:ea typeface="Space Grotesk" pitchFamily="34" charset="-122"/>
+                          <a:cs typeface="Space Grotesk" pitchFamily="34" charset="-120"/>
+                        </a:rPr>
+                        <a:t>Distilled</a:t>
+                      </a:r>
+                      <a:endParaRPr lang="en-US" sz="1200" dirty="0">
+                        <a:latin typeface="Space Grotesk" charset="0"/>
+                        <a:ea typeface="Space Grotesk" charset="0"/>
+                        <a:cs typeface="Space Grotesk" charset="0"/>
+                      </a:endParaRPr>
+                    </a:p>
+                  </a:txBody>
+                  <a:tcPr marL="91440" marR="91440" marT="45720" marB="45720" anchor="ctr">
+                    <a:lnL w="12700" cap="flat" cmpd="sng" algn="ctr">
+                      <a:solidFill>
+                        <a:srgbClr val="1C5248"/>
+                      </a:solidFill>
+                      <a:prstDash val="solid"/>
+                      <a:round/>
+                      <a:headEnd type="none" w="med" len="med"/>
+                      <a:tailEnd type="none" w="med" len="med"/>
+                    </a:lnL>
+                    <a:lnR w="12700" cap="flat" cmpd="sng" algn="ctr">
+                      <a:solidFill>
+                        <a:srgbClr val="1C5248"/>
+                      </a:solidFill>
+                      <a:prstDash val="solid"/>
+                      <a:round/>
+                      <a:headEnd type="none" w="med" len="med"/>
+                      <a:tailEnd type="none" w="med" len="med"/>
+                    </a:lnR>
+                    <a:lnT w="12700" cap="flat" cmpd="sng" algn="ctr">
+                      <a:solidFill>
+                        <a:srgbClr val="1C5248"/>
+                      </a:solidFill>
+                      <a:prstDash val="solid"/>
+                      <a:round/>
+                      <a:headEnd type="none" w="med" len="med"/>
+                      <a:tailEnd type="none" w="med" len="med"/>
+                    </a:lnT>
+                    <a:lnB w="12700" cap="flat" cmpd="sng" algn="ctr">
+                      <a:solidFill>
+                        <a:srgbClr val="1C5248"/>
+                      </a:solidFill>
+                      <a:prstDash val="solid"/>
+                      <a:round/>
+                      <a:headEnd type="none" w="med" len="med"/>
+                      <a:tailEnd type="none" w="med" len="med"/>
+                    </a:lnB>
+                    <a:solidFill>
+                      <a:srgbClr val="0A322C"/>
+                    </a:solidFill>
+                  </a:tcPr>
+                </a:tc>
+                <a:tc>
+                  <a:txBody>
+                    <a:bodyPr/>
+                    <a:lstStyle/>
+                    <a:p>
+                      <a:pPr algn="ctr" indent="0" marL="0">
+                        <a:buNone/>
+                      </a:pPr>
+                      <a:r>
+                        <a:rPr lang="en-US" sz="1200" b="1" dirty="0">
+                          <a:solidFill>
+                            <a:srgbClr val="CDFCE3"/>
+                          </a:solidFill>
+                          <a:latin typeface="Space Grotesk" pitchFamily="34" charset="0"/>
+                          <a:ea typeface="Space Grotesk" pitchFamily="34" charset="-122"/>
+                          <a:cs typeface="Space Grotesk" pitchFamily="34" charset="-120"/>
+                        </a:rPr>
+                        <a:t>Fractions</a:t>
+                      </a:r>
+                      <a:endParaRPr lang="en-US" sz="1200" dirty="0">
+                        <a:latin typeface="Space Grotesk" charset="0"/>
+                        <a:ea typeface="Space Grotesk" charset="0"/>
+                        <a:cs typeface="Space Grotesk" charset="0"/>
+                      </a:endParaRPr>
+                    </a:p>
+                  </a:txBody>
+                  <a:tcPr marL="91440" marR="91440" marT="45720" marB="45720" anchor="ctr">
+                    <a:lnL w="12700" cap="flat" cmpd="sng" algn="ctr">
+                      <a:solidFill>
+                        <a:srgbClr val="1C5248"/>
+                      </a:solidFill>
+                      <a:prstDash val="solid"/>
+                      <a:round/>
+                      <a:headEnd type="none" w="med" len="med"/>
+                      <a:tailEnd type="none" w="med" len="med"/>
+                    </a:lnL>
+                    <a:lnR w="12700" cap="flat" cmpd="sng" algn="ctr">
+                      <a:solidFill>
+                        <a:srgbClr val="1C5248"/>
+                      </a:solidFill>
+                      <a:prstDash val="solid"/>
+                      <a:round/>
+                      <a:headEnd type="none" w="med" len="med"/>
+                      <a:tailEnd type="none" w="med" len="med"/>
+                    </a:lnR>
+                    <a:lnT w="12700" cap="flat" cmpd="sng" algn="ctr">
+                      <a:solidFill>
+                        <a:srgbClr val="1C5248"/>
+                      </a:solidFill>
+                      <a:prstDash val="solid"/>
+                      <a:round/>
+                      <a:headEnd type="none" w="med" len="med"/>
+                      <a:tailEnd type="none" w="med" len="med"/>
+                    </a:lnT>
+                    <a:lnB w="12700" cap="flat" cmpd="sng" algn="ctr">
+                      <a:solidFill>
+                        <a:srgbClr val="1C5248"/>
+                      </a:solidFill>
+                      <a:prstDash val="solid"/>
+                      <a:round/>
+                      <a:headEnd type="none" w="med" len="med"/>
+                      <a:tailEnd type="none" w="med" len="med"/>
+                    </a:lnB>
+                    <a:solidFill>
+                      <a:srgbClr val="0A322C"/>
+                    </a:solidFill>
+                  </a:tcPr>
+                </a:tc>
+              </a:tr>
+              <a:tr h="512064">
+                <a:tc>
+                  <a:txBody>
+                    <a:bodyPr/>
+                    <a:lstStyle/>
+                    <a:p>
+                      <a:pPr algn="l" indent="0" marL="0">
+                        <a:buNone/>
+                      </a:pPr>
+                      <a:r>
+                        <a:rPr lang="en-US" sz="1300" b="1" dirty="0">
+                          <a:solidFill>
+                            <a:srgbClr val="FFFFFF"/>
+                          </a:solidFill>
+                          <a:latin typeface="Space Grotesk" pitchFamily="34" charset="0"/>
+                          <a:ea typeface="Space Grotesk" pitchFamily="34" charset="-122"/>
+                          <a:cs typeface="Space Grotesk" pitchFamily="34" charset="-120"/>
+                        </a:rPr>
                         <a:t>Pine</a:t>
                       </a:r>
-                      <a:endParaRPr lang="en-US" sz="1200" dirty="0">
+                      <a:endParaRPr lang="en-US" sz="1300" dirty="0">
                         <a:latin typeface="Space Grotesk" charset="0"/>
                         <a:ea typeface="Space Grotesk" charset="0"/>
                         <a:cs typeface="Space Grotesk" charset="0"/>
@@ -5084,17 +4656,17 @@
                         <a:buNone/>
                       </a:pPr>
                       <a:r>
-                        <a:rPr lang="en-US" sz="1150" dirty="0">
+                        <a:rPr lang="en-US" sz="1300" dirty="0">
                           <a:solidFill>
-                            <a:srgbClr val="9DBDB0"/>
+                            <a:srgbClr val="FFFFFF"/>
                           </a:solidFill>
                           <a:latin typeface="Space Grotesk" pitchFamily="34" charset="0"/>
                           <a:ea typeface="Space Grotesk" pitchFamily="34" charset="-122"/>
                           <a:cs typeface="Space Grotesk" pitchFamily="34" charset="-120"/>
                         </a:rPr>
-                        <a:t>0.81</a:t>
+                        <a:t>0.59</a:t>
                       </a:r>
-                      <a:endParaRPr lang="en-US" sz="1150" dirty="0">
+                      <a:endParaRPr lang="en-US" sz="1300" dirty="0">
                         <a:latin typeface="Space Grotesk" charset="0"/>
                         <a:ea typeface="Space Grotesk" charset="0"/>
                         <a:cs typeface="Space Grotesk" charset="0"/>
@@ -5152,17 +4724,17 @@
                         <a:buNone/>
                       </a:pPr>
                       <a:r>
-                        <a:rPr lang="en-US" sz="1150" dirty="0">
+                        <a:rPr lang="en-US" sz="1300" dirty="0">
                           <a:solidFill>
-                            <a:srgbClr val="9DBDB0"/>
+                            <a:srgbClr val="FFFFFF"/>
                           </a:solidFill>
                           <a:latin typeface="Space Grotesk" pitchFamily="34" charset="0"/>
                           <a:ea typeface="Space Grotesk" pitchFamily="34" charset="-122"/>
                           <a:cs typeface="Space Grotesk" pitchFamily="34" charset="-120"/>
                         </a:rPr>
-                        <a:t>0.44</a:t>
+                        <a:t>0.61</a:t>
                       </a:r>
-                      <a:endParaRPr lang="en-US" sz="1150" dirty="0">
+                      <a:endParaRPr lang="en-US" sz="1300" dirty="0">
                         <a:latin typeface="Space Grotesk" charset="0"/>
                         <a:ea typeface="Space Grotesk" charset="0"/>
                         <a:cs typeface="Space Grotesk" charset="0"/>
@@ -5220,17 +4792,17 @@
                         <a:buNone/>
                       </a:pPr>
                       <a:r>
-                        <a:rPr lang="en-US" sz="1150" b="1" dirty="0">
+                        <a:rPr lang="en-US" sz="1300" b="1" dirty="0">
                           <a:solidFill>
-                            <a:srgbClr val="FFFFFF"/>
+                            <a:srgbClr val="CDFCE3"/>
                           </a:solidFill>
                           <a:latin typeface="Space Grotesk" pitchFamily="34" charset="0"/>
                           <a:ea typeface="Space Grotesk" pitchFamily="34" charset="-122"/>
                           <a:cs typeface="Space Grotesk" pitchFamily="34" charset="-120"/>
                         </a:rPr>
-                        <a:t>0.57</a:t>
+                        <a:t>0.74</a:t>
                       </a:r>
-                      <a:endParaRPr lang="en-US" sz="1150" dirty="0">
+                      <a:endParaRPr lang="en-US" sz="1300" dirty="0">
                         <a:latin typeface="Space Grotesk" charset="0"/>
                         <a:ea typeface="Space Grotesk" charset="0"/>
                         <a:cs typeface="Space Grotesk" charset="0"/>
@@ -5275,7 +4847,77 @@
                       <a:tailEnd type="none" w="med" len="med"/>
                     </a:lnB>
                     <a:solidFill>
-                      <a:srgbClr val="17564A"/>
+                      <a:srgbClr val="1E6B54"/>
+                    </a:solidFill>
+                  </a:tcPr>
+                </a:tc>
+              </a:tr>
+              <a:tr h="512064">
+                <a:tc>
+                  <a:txBody>
+                    <a:bodyPr/>
+                    <a:lstStyle/>
+                    <a:p>
+                      <a:pPr algn="l" indent="0" marL="0">
+                        <a:buNone/>
+                      </a:pPr>
+                      <a:r>
+                        <a:rPr lang="en-US" sz="1300" b="1" dirty="0">
+                          <a:solidFill>
+                            <a:srgbClr val="FFFFFF"/>
+                          </a:solidFill>
+                          <a:latin typeface="Space Grotesk" pitchFamily="34" charset="0"/>
+                          <a:ea typeface="Space Grotesk" pitchFamily="34" charset="-122"/>
+                          <a:cs typeface="Space Grotesk" pitchFamily="34" charset="-120"/>
+                        </a:rPr>
+                        <a:t>Spruce</a:t>
+                      </a:r>
+                      <a:endParaRPr lang="en-US" sz="1300" dirty="0">
+                        <a:latin typeface="Space Grotesk" charset="0"/>
+                        <a:ea typeface="Space Grotesk" charset="0"/>
+                        <a:cs typeface="Space Grotesk" charset="0"/>
+                      </a:endParaRPr>
+                    </a:p>
+                  </a:txBody>
+                  <a:tcPr marL="91440" marR="91440" marT="45720" marB="45720" anchor="ctr">
+                    <a:lnL w="12700" cap="flat" cmpd="sng" algn="ctr">
+                      <a:solidFill>
+                        <a:srgbClr val="1C5248"/>
+                      </a:solidFill>
+                      <a:prstDash val="solid"/>
+                      <a:round/>
+                      <a:headEnd type="none" w="med" len="med"/>
+                      <a:tailEnd type="none" w="med" len="med"/>
+                    </a:lnL>
+                    <a:lnR w="12700" cap="flat" cmpd="sng" algn="ctr">
+                      <a:solidFill>
+                        <a:srgbClr val="1C5248"/>
+                      </a:solidFill>
+                      <a:prstDash val="solid"/>
+                      <a:round/>
+                      <a:headEnd type="none" w="med" len="med"/>
+                      <a:tailEnd type="none" w="med" len="med"/>
+                    </a:lnR>
+                    <a:lnT w="12700" cap="flat" cmpd="sng" algn="ctr">
+                      <a:solidFill>
+                        <a:srgbClr val="1C5248"/>
+                      </a:solidFill>
+                      <a:prstDash val="solid"/>
+                      <a:round/>
+                      <a:headEnd type="none" w="med" len="med"/>
+                      <a:tailEnd type="none" w="med" len="med"/>
+                    </a:lnT>
+                    <a:lnB w="12700" cap="flat" cmpd="sng" algn="ctr">
+                      <a:solidFill>
+                        <a:srgbClr val="1C5248"/>
+                      </a:solidFill>
+                      <a:prstDash val="solid"/>
+                      <a:round/>
+                      <a:headEnd type="none" w="med" len="med"/>
+                      <a:tailEnd type="none" w="med" len="med"/>
+                    </a:lnB>
+                    <a:solidFill>
+                      <a:srgbClr val="123F38"/>
                     </a:solidFill>
                   </a:tcPr>
                 </a:tc>
@@ -5288,17 +4930,223 @@
                         <a:buNone/>
                       </a:pPr>
                       <a:r>
-                        <a:rPr lang="en-US" sz="1150" dirty="0">
+                        <a:rPr lang="en-US" sz="1300" dirty="0">
                           <a:solidFill>
-                            <a:srgbClr val="9DBDB0"/>
+                            <a:srgbClr val="FFFFFF"/>
                           </a:solidFill>
                           <a:latin typeface="Space Grotesk" pitchFamily="34" charset="0"/>
                           <a:ea typeface="Space Grotesk" pitchFamily="34" charset="-122"/>
                           <a:cs typeface="Space Grotesk" pitchFamily="34" charset="-120"/>
                         </a:rPr>
-                        <a:t>0.82</a:t>
+                        <a:t>0.56</a:t>
                       </a:r>
-                      <a:endParaRPr lang="en-US" sz="1150" dirty="0">
+                      <a:endParaRPr lang="en-US" sz="1300" dirty="0">
+                        <a:latin typeface="Space Grotesk" charset="0"/>
+                        <a:ea typeface="Space Grotesk" charset="0"/>
+                        <a:cs typeface="Space Grotesk" charset="0"/>
+                      </a:endParaRPr>
+                    </a:p>
+                  </a:txBody>
+                  <a:tcPr marL="91440" marR="91440" marT="45720" marB="45720" anchor="ctr">
+                    <a:lnL w="12700" cap="flat" cmpd="sng" algn="ctr">
+                      <a:solidFill>
+                        <a:srgbClr val="1C5248"/>
+                      </a:solidFill>
+                      <a:prstDash val="solid"/>
+                      <a:round/>
+                      <a:headEnd type="none" w="med" len="med"/>
+                      <a:tailEnd type="none" w="med" len="med"/>
+                    </a:lnL>
+                    <a:lnR w="12700" cap="flat" cmpd="sng" algn="ctr">
+                      <a:solidFill>
+                        <a:srgbClr val="1C5248"/>
+                      </a:solidFill>
+                      <a:prstDash val="solid"/>
+                      <a:round/>
+                      <a:headEnd type="none" w="med" len="med"/>
+                      <a:tailEnd type="none" w="med" len="med"/>
+                    </a:lnR>
+                    <a:lnT w="12700" cap="flat" cmpd="sng" algn="ctr">
+                      <a:solidFill>
+                        <a:srgbClr val="1C5248"/>
+                      </a:solidFill>
+                      <a:prstDash val="solid"/>
+                      <a:round/>
+                      <a:headEnd type="none" w="med" len="med"/>
+                      <a:tailEnd type="none" w="med" len="med"/>
+                    </a:lnT>
+                    <a:lnB w="12700" cap="flat" cmpd="sng" algn="ctr">
+                      <a:solidFill>
+                        <a:srgbClr val="1C5248"/>
+                      </a:solidFill>
+                      <a:prstDash val="solid"/>
+                      <a:round/>
+                      <a:headEnd type="none" w="med" len="med"/>
+                      <a:tailEnd type="none" w="med" len="med"/>
+                    </a:lnB>
+                    <a:solidFill>
+                      <a:srgbClr val="123F38"/>
+                    </a:solidFill>
+                  </a:tcPr>
+                </a:tc>
+                <a:tc>
+                  <a:txBody>
+                    <a:bodyPr/>
+                    <a:lstStyle/>
+                    <a:p>
+                      <a:pPr algn="ctr" indent="0" marL="0">
+                        <a:buNone/>
+                      </a:pPr>
+                      <a:r>
+                        <a:rPr lang="en-US" sz="1300" b="1" dirty="0">
+                          <a:solidFill>
+                            <a:srgbClr val="CDFCE3"/>
+                          </a:solidFill>
+                          <a:latin typeface="Space Grotesk" pitchFamily="34" charset="0"/>
+                          <a:ea typeface="Space Grotesk" pitchFamily="34" charset="-122"/>
+                          <a:cs typeface="Space Grotesk" pitchFamily="34" charset="-120"/>
+                        </a:rPr>
+                        <a:t>0.63</a:t>
+                      </a:r>
+                      <a:endParaRPr lang="en-US" sz="1300" dirty="0">
+                        <a:latin typeface="Space Grotesk" charset="0"/>
+                        <a:ea typeface="Space Grotesk" charset="0"/>
+                        <a:cs typeface="Space Grotesk" charset="0"/>
+                      </a:endParaRPr>
+                    </a:p>
+                  </a:txBody>
+                  <a:tcPr marL="91440" marR="91440" marT="45720" marB="45720" anchor="ctr">
+                    <a:lnL w="12700" cap="flat" cmpd="sng" algn="ctr">
+                      <a:solidFill>
+                        <a:srgbClr val="1C5248"/>
+                      </a:solidFill>
+                      <a:prstDash val="solid"/>
+                      <a:round/>
+                      <a:headEnd type="none" w="med" len="med"/>
+                      <a:tailEnd type="none" w="med" len="med"/>
+                    </a:lnL>
+                    <a:lnR w="12700" cap="flat" cmpd="sng" algn="ctr">
+                      <a:solidFill>
+                        <a:srgbClr val="1C5248"/>
+                      </a:solidFill>
+                      <a:prstDash val="solid"/>
+                      <a:round/>
+                      <a:headEnd type="none" w="med" len="med"/>
+                      <a:tailEnd type="none" w="med" len="med"/>
+                    </a:lnR>
+                    <a:lnT w="12700" cap="flat" cmpd="sng" algn="ctr">
+                      <a:solidFill>
+                        <a:srgbClr val="1C5248"/>
+                      </a:solidFill>
+                      <a:prstDash val="solid"/>
+                      <a:round/>
+                      <a:headEnd type="none" w="med" len="med"/>
+                      <a:tailEnd type="none" w="med" len="med"/>
+                    </a:lnT>
+                    <a:lnB w="12700" cap="flat" cmpd="sng" algn="ctr">
+                      <a:solidFill>
+                        <a:srgbClr val="1C5248"/>
+                      </a:solidFill>
+                      <a:prstDash val="solid"/>
+                      <a:round/>
+                      <a:headEnd type="none" w="med" len="med"/>
+                      <a:tailEnd type="none" w="med" len="med"/>
+                    </a:lnB>
+                    <a:solidFill>
+                      <a:srgbClr val="1E6B54"/>
+                    </a:solidFill>
+                  </a:tcPr>
+                </a:tc>
+                <a:tc>
+                  <a:txBody>
+                    <a:bodyPr/>
+                    <a:lstStyle/>
+                    <a:p>
+                      <a:pPr algn="ctr" indent="0" marL="0">
+                        <a:buNone/>
+                      </a:pPr>
+                      <a:r>
+                        <a:rPr lang="en-US" sz="1300" dirty="0">
+                          <a:solidFill>
+                            <a:srgbClr val="FFFFFF"/>
+                          </a:solidFill>
+                          <a:latin typeface="Space Grotesk" pitchFamily="34" charset="0"/>
+                          <a:ea typeface="Space Grotesk" pitchFamily="34" charset="-122"/>
+                          <a:cs typeface="Space Grotesk" pitchFamily="34" charset="-120"/>
+                        </a:rPr>
+                        <a:t>0.55</a:t>
+                      </a:r>
+                      <a:endParaRPr lang="en-US" sz="1300" dirty="0">
+                        <a:latin typeface="Space Grotesk" charset="0"/>
+                        <a:ea typeface="Space Grotesk" charset="0"/>
+                        <a:cs typeface="Space Grotesk" charset="0"/>
+                      </a:endParaRPr>
+                    </a:p>
+                  </a:txBody>
+                  <a:tcPr marL="91440" marR="91440" marT="45720" marB="45720" anchor="ctr">
+                    <a:lnL w="12700" cap="flat" cmpd="sng" algn="ctr">
+                      <a:solidFill>
+                        <a:srgbClr val="1C5248"/>
+                      </a:solidFill>
+                      <a:prstDash val="solid"/>
+                      <a:round/>
+                      <a:headEnd type="none" w="med" len="med"/>
+                      <a:tailEnd type="none" w="med" len="med"/>
+                    </a:lnL>
+                    <a:lnR w="12700" cap="flat" cmpd="sng" algn="ctr">
+                      <a:solidFill>
+                        <a:srgbClr val="1C5248"/>
+                      </a:solidFill>
+                      <a:prstDash val="solid"/>
+                      <a:round/>
+                      <a:headEnd type="none" w="med" len="med"/>
+                      <a:tailEnd type="none" w="med" len="med"/>
+                    </a:lnR>
+                    <a:lnT w="12700" cap="flat" cmpd="sng" algn="ctr">
+                      <a:solidFill>
+                        <a:srgbClr val="1C5248"/>
+                      </a:solidFill>
+                      <a:prstDash val="solid"/>
+                      <a:round/>
+                      <a:headEnd type="none" w="med" len="med"/>
+                      <a:tailEnd type="none" w="med" len="med"/>
+                    </a:lnT>
+                    <a:lnB w="12700" cap="flat" cmpd="sng" algn="ctr">
+                      <a:solidFill>
+                        <a:srgbClr val="1C5248"/>
+                      </a:solidFill>
+                      <a:prstDash val="solid"/>
+                      <a:round/>
+                      <a:headEnd type="none" w="med" len="med"/>
+                      <a:tailEnd type="none" w="med" len="med"/>
+                    </a:lnB>
+                    <a:solidFill>
+                      <a:srgbClr val="123F38"/>
+                    </a:solidFill>
+                  </a:tcPr>
+                </a:tc>
+              </a:tr>
+              <a:tr h="512064">
+                <a:tc>
+                  <a:txBody>
+                    <a:bodyPr/>
+                    <a:lstStyle/>
+                    <a:p>
+                      <a:pPr algn="l" indent="0" marL="0">
+                        <a:buNone/>
+                      </a:pPr>
+                      <a:r>
+                        <a:rPr lang="en-US" sz="1300" b="1" dirty="0">
+                          <a:solidFill>
+                            <a:srgbClr val="FFFFFF"/>
+                          </a:solidFill>
+                          <a:latin typeface="Space Grotesk" pitchFamily="34" charset="0"/>
+                          <a:ea typeface="Space Grotesk" pitchFamily="34" charset="-122"/>
+                          <a:cs typeface="Space Grotesk" pitchFamily="34" charset="-120"/>
+                        </a:rPr>
+                        <a:t>Deciduous</a:t>
+                      </a:r>
+                      <a:endParaRPr lang="en-US" sz="1300" dirty="0">
                         <a:latin typeface="Space Grotesk" charset="0"/>
                         <a:ea typeface="Space Grotesk" charset="0"/>
                         <a:cs typeface="Space Grotesk" charset="0"/>
@@ -5356,17 +5204,17 @@
                         <a:buNone/>
                       </a:pPr>
                       <a:r>
-                        <a:rPr lang="en-US" sz="1150" dirty="0">
+                        <a:rPr lang="en-US" sz="1300" dirty="0">
                           <a:solidFill>
-                            <a:srgbClr val="9DBDB0"/>
+                            <a:srgbClr val="FFFFFF"/>
                           </a:solidFill>
                           <a:latin typeface="Space Grotesk" pitchFamily="34" charset="0"/>
                           <a:ea typeface="Space Grotesk" pitchFamily="34" charset="-122"/>
                           <a:cs typeface="Space Grotesk" pitchFamily="34" charset="-120"/>
                         </a:rPr>
-                        <a:t>0.48</a:t>
+                        <a:t>0.30</a:t>
                       </a:r>
-                      <a:endParaRPr lang="en-US" sz="1150" dirty="0">
+                      <a:endParaRPr lang="en-US" sz="1300" dirty="0">
                         <a:latin typeface="Space Grotesk" charset="0"/>
                         <a:ea typeface="Space Grotesk" charset="0"/>
                         <a:cs typeface="Space Grotesk" charset="0"/>
@@ -5424,7 +5272,75 @@
                         <a:buNone/>
                       </a:pPr>
                       <a:r>
-                        <a:rPr lang="en-US" sz="1150" b="1" dirty="0">
+                        <a:rPr lang="en-US" sz="1300" dirty="0">
+                          <a:solidFill>
+                            <a:srgbClr val="FFFFFF"/>
+                          </a:solidFill>
+                          <a:latin typeface="Space Grotesk" pitchFamily="34" charset="0"/>
+                          <a:ea typeface="Space Grotesk" pitchFamily="34" charset="-122"/>
+                          <a:cs typeface="Space Grotesk" pitchFamily="34" charset="-120"/>
+                        </a:rPr>
+                        <a:t>0.43</a:t>
+                      </a:r>
+                      <a:endParaRPr lang="en-US" sz="1300" dirty="0">
+                        <a:latin typeface="Space Grotesk" charset="0"/>
+                        <a:ea typeface="Space Grotesk" charset="0"/>
+                        <a:cs typeface="Space Grotesk" charset="0"/>
+                      </a:endParaRPr>
+                    </a:p>
+                  </a:txBody>
+                  <a:tcPr marL="91440" marR="91440" marT="45720" marB="45720" anchor="ctr">
+                    <a:lnL w="12700" cap="flat" cmpd="sng" algn="ctr">
+                      <a:solidFill>
+                        <a:srgbClr val="1C5248"/>
+                      </a:solidFill>
+                      <a:prstDash val="solid"/>
+                      <a:round/>
+                      <a:headEnd type="none" w="med" len="med"/>
+                      <a:tailEnd type="none" w="med" len="med"/>
+                    </a:lnL>
+                    <a:lnR w="12700" cap="flat" cmpd="sng" algn="ctr">
+                      <a:solidFill>
+                        <a:srgbClr val="1C5248"/>
+                      </a:solidFill>
+                      <a:prstDash val="solid"/>
+                      <a:round/>
+                      <a:headEnd type="none" w="med" len="med"/>
+                      <a:tailEnd type="none" w="med" len="med"/>
+                    </a:lnR>
+                    <a:lnT w="12700" cap="flat" cmpd="sng" algn="ctr">
+                      <a:solidFill>
+                        <a:srgbClr val="1C5248"/>
+                      </a:solidFill>
+                      <a:prstDash val="solid"/>
+                      <a:round/>
+                      <a:headEnd type="none" w="med" len="med"/>
+                      <a:tailEnd type="none" w="med" len="med"/>
+                    </a:lnT>
+                    <a:lnB w="12700" cap="flat" cmpd="sng" algn="ctr">
+                      <a:solidFill>
+                        <a:srgbClr val="1C5248"/>
+                      </a:solidFill>
+                      <a:prstDash val="solid"/>
+                      <a:round/>
+                      <a:headEnd type="none" w="med" len="med"/>
+                      <a:tailEnd type="none" w="med" len="med"/>
+                    </a:lnB>
+                    <a:solidFill>
+                      <a:srgbClr val="0C3A33"/>
+                    </a:solidFill>
+                  </a:tcPr>
+                </a:tc>
+                <a:tc>
+                  <a:txBody>
+                    <a:bodyPr/>
+                    <a:lstStyle/>
+                    <a:p>
+                      <a:pPr algn="ctr" indent="0" marL="0">
+                        <a:buNone/>
+                      </a:pPr>
+                      <a:r>
+                        <a:rPr lang="en-US" sz="1300" b="1" dirty="0">
                           <a:solidFill>
                             <a:srgbClr val="CDFCE3"/>
                           </a:solidFill>
@@ -5432,9 +5348,215 @@
                           <a:ea typeface="Space Grotesk" pitchFamily="34" charset="-122"/>
                           <a:cs typeface="Space Grotesk" pitchFamily="34" charset="-120"/>
                         </a:rPr>
-                        <a:t>0.61</a:t>
+                        <a:t>0.59</a:t>
                       </a:r>
-                      <a:endParaRPr lang="en-US" sz="1150" dirty="0">
+                      <a:endParaRPr lang="en-US" sz="1300" dirty="0">
+                        <a:latin typeface="Space Grotesk" charset="0"/>
+                        <a:ea typeface="Space Grotesk" charset="0"/>
+                        <a:cs typeface="Space Grotesk" charset="0"/>
+                      </a:endParaRPr>
+                    </a:p>
+                  </a:txBody>
+                  <a:tcPr marL="91440" marR="91440" marT="45720" marB="45720" anchor="ctr">
+                    <a:lnL w="12700" cap="flat" cmpd="sng" algn="ctr">
+                      <a:solidFill>
+                        <a:srgbClr val="1C5248"/>
+                      </a:solidFill>
+                      <a:prstDash val="solid"/>
+                      <a:round/>
+                      <a:headEnd type="none" w="med" len="med"/>
+                      <a:tailEnd type="none" w="med" len="med"/>
+                    </a:lnL>
+                    <a:lnR w="12700" cap="flat" cmpd="sng" algn="ctr">
+                      <a:solidFill>
+                        <a:srgbClr val="1C5248"/>
+                      </a:solidFill>
+                      <a:prstDash val="solid"/>
+                      <a:round/>
+                      <a:headEnd type="none" w="med" len="med"/>
+                      <a:tailEnd type="none" w="med" len="med"/>
+                    </a:lnR>
+                    <a:lnT w="12700" cap="flat" cmpd="sng" algn="ctr">
+                      <a:solidFill>
+                        <a:srgbClr val="1C5248"/>
+                      </a:solidFill>
+                      <a:prstDash val="solid"/>
+                      <a:round/>
+                      <a:headEnd type="none" w="med" len="med"/>
+                      <a:tailEnd type="none" w="med" len="med"/>
+                    </a:lnT>
+                    <a:lnB w="12700" cap="flat" cmpd="sng" algn="ctr">
+                      <a:solidFill>
+                        <a:srgbClr val="1C5248"/>
+                      </a:solidFill>
+                      <a:prstDash val="solid"/>
+                      <a:round/>
+                      <a:headEnd type="none" w="med" len="med"/>
+                      <a:tailEnd type="none" w="med" len="med"/>
+                    </a:lnB>
+                    <a:solidFill>
+                      <a:srgbClr val="1E6B54"/>
+                    </a:solidFill>
+                  </a:tcPr>
+                </a:tc>
+              </a:tr>
+              <a:tr h="512064">
+                <a:tc>
+                  <a:txBody>
+                    <a:bodyPr/>
+                    <a:lstStyle/>
+                    <a:p>
+                      <a:pPr algn="l" indent="0" marL="0">
+                        <a:buNone/>
+                      </a:pPr>
+                      <a:r>
+                        <a:rPr lang="en-US" sz="1300" b="1" dirty="0">
+                          <a:solidFill>
+                            <a:srgbClr val="FFFFFF"/>
+                          </a:solidFill>
+                          <a:latin typeface="Space Grotesk" pitchFamily="34" charset="0"/>
+                          <a:ea typeface="Space Grotesk" pitchFamily="34" charset="-122"/>
+                          <a:cs typeface="Space Grotesk" pitchFamily="34" charset="-120"/>
+                        </a:rPr>
+                        <a:t>Mixed</a:t>
+                      </a:r>
+                      <a:endParaRPr lang="en-US" sz="1300" dirty="0">
+                        <a:latin typeface="Space Grotesk" charset="0"/>
+                        <a:ea typeface="Space Grotesk" charset="0"/>
+                        <a:cs typeface="Space Grotesk" charset="0"/>
+                      </a:endParaRPr>
+                    </a:p>
+                  </a:txBody>
+                  <a:tcPr marL="91440" marR="91440" marT="45720" marB="45720" anchor="ctr">
+                    <a:lnL w="12700" cap="flat" cmpd="sng" algn="ctr">
+                      <a:solidFill>
+                        <a:srgbClr val="1C5248"/>
+                      </a:solidFill>
+                      <a:prstDash val="solid"/>
+                      <a:round/>
+                      <a:headEnd type="none" w="med" len="med"/>
+                      <a:tailEnd type="none" w="med" len="med"/>
+                    </a:lnL>
+                    <a:lnR w="12700" cap="flat" cmpd="sng" algn="ctr">
+                      <a:solidFill>
+                        <a:srgbClr val="1C5248"/>
+                      </a:solidFill>
+                      <a:prstDash val="solid"/>
+                      <a:round/>
+                      <a:headEnd type="none" w="med" len="med"/>
+                      <a:tailEnd type="none" w="med" len="med"/>
+                    </a:lnR>
+                    <a:lnT w="12700" cap="flat" cmpd="sng" algn="ctr">
+                      <a:solidFill>
+                        <a:srgbClr val="1C5248"/>
+                      </a:solidFill>
+                      <a:prstDash val="solid"/>
+                      <a:round/>
+                      <a:headEnd type="none" w="med" len="med"/>
+                      <a:tailEnd type="none" w="med" len="med"/>
+                    </a:lnT>
+                    <a:lnB w="12700" cap="flat" cmpd="sng" algn="ctr">
+                      <a:solidFill>
+                        <a:srgbClr val="1C5248"/>
+                      </a:solidFill>
+                      <a:prstDash val="solid"/>
+                      <a:round/>
+                      <a:headEnd type="none" w="med" len="med"/>
+                      <a:tailEnd type="none" w="med" len="med"/>
+                    </a:lnB>
+                    <a:solidFill>
+                      <a:srgbClr val="123F38"/>
+                    </a:solidFill>
+                  </a:tcPr>
+                </a:tc>
+                <a:tc>
+                  <a:txBody>
+                    <a:bodyPr/>
+                    <a:lstStyle/>
+                    <a:p>
+                      <a:pPr algn="ctr" indent="0" marL="0">
+                        <a:buNone/>
+                      </a:pPr>
+                      <a:r>
+                        <a:rPr lang="en-US" sz="1300" dirty="0">
+                          <a:solidFill>
+                            <a:srgbClr val="FFFFFF"/>
+                          </a:solidFill>
+                          <a:latin typeface="Space Grotesk" pitchFamily="34" charset="0"/>
+                          <a:ea typeface="Space Grotesk" pitchFamily="34" charset="-122"/>
+                          <a:cs typeface="Space Grotesk" pitchFamily="34" charset="-120"/>
+                        </a:rPr>
+                        <a:t>0.28</a:t>
+                      </a:r>
+                      <a:endParaRPr lang="en-US" sz="1300" dirty="0">
+                        <a:latin typeface="Space Grotesk" charset="0"/>
+                        <a:ea typeface="Space Grotesk" charset="0"/>
+                        <a:cs typeface="Space Grotesk" charset="0"/>
+                      </a:endParaRPr>
+                    </a:p>
+                  </a:txBody>
+                  <a:tcPr marL="91440" marR="91440" marT="45720" marB="45720" anchor="ctr">
+                    <a:lnL w="12700" cap="flat" cmpd="sng" algn="ctr">
+                      <a:solidFill>
+                        <a:srgbClr val="1C5248"/>
+                      </a:solidFill>
+                      <a:prstDash val="solid"/>
+                      <a:round/>
+                      <a:headEnd type="none" w="med" len="med"/>
+                      <a:tailEnd type="none" w="med" len="med"/>
+                    </a:lnL>
+                    <a:lnR w="12700" cap="flat" cmpd="sng" algn="ctr">
+                      <a:solidFill>
+                        <a:srgbClr val="1C5248"/>
+                      </a:solidFill>
+                      <a:prstDash val="solid"/>
+                      <a:round/>
+                      <a:headEnd type="none" w="med" len="med"/>
+                      <a:tailEnd type="none" w="med" len="med"/>
+                    </a:lnR>
+                    <a:lnT w="12700" cap="flat" cmpd="sng" algn="ctr">
+                      <a:solidFill>
+                        <a:srgbClr val="1C5248"/>
+                      </a:solidFill>
+                      <a:prstDash val="solid"/>
+                      <a:round/>
+                      <a:headEnd type="none" w="med" len="med"/>
+                      <a:tailEnd type="none" w="med" len="med"/>
+                    </a:lnT>
+                    <a:lnB w="12700" cap="flat" cmpd="sng" algn="ctr">
+                      <a:solidFill>
+                        <a:srgbClr val="1C5248"/>
+                      </a:solidFill>
+                      <a:prstDash val="solid"/>
+                      <a:round/>
+                      <a:headEnd type="none" w="med" len="med"/>
+                      <a:tailEnd type="none" w="med" len="med"/>
+                    </a:lnB>
+                    <a:solidFill>
+                      <a:srgbClr val="123F38"/>
+                    </a:solidFill>
+                  </a:tcPr>
+                </a:tc>
+                <a:tc>
+                  <a:txBody>
+                    <a:bodyPr/>
+                    <a:lstStyle/>
+                    <a:p>
+                      <a:pPr algn="ctr" indent="0" marL="0">
+                        <a:buNone/>
+                      </a:pPr>
+                      <a:r>
+                        <a:rPr lang="en-US" sz="1300" b="1" dirty="0">
+                          <a:solidFill>
+                            <a:srgbClr val="CDFCE3"/>
+                          </a:solidFill>
+                          <a:latin typeface="Space Grotesk" pitchFamily="34" charset="0"/>
+                          <a:ea typeface="Space Grotesk" pitchFamily="34" charset="-122"/>
+                          <a:cs typeface="Space Grotesk" pitchFamily="34" charset="-120"/>
+                        </a:rPr>
+                        <a:t>0.30</a:t>
+                      </a:r>
+                      <a:endParaRPr lang="en-US" sz="1300" dirty="0">
                         <a:latin typeface="Space Grotesk" charset="0"/>
                         <a:ea typeface="Space Grotesk" charset="0"/>
                         <a:cs typeface="Space Grotesk" charset="0"/>
@@ -5492,17 +5614,87 @@
                         <a:buNone/>
                       </a:pPr>
                       <a:r>
-                        <a:rPr lang="en-US" sz="1150" dirty="0">
+                        <a:rPr lang="en-US" sz="1300" dirty="0">
                           <a:solidFill>
-                            <a:srgbClr val="9DBDB0"/>
+                            <a:srgbClr val="FFFFFF"/>
                           </a:solidFill>
                           <a:latin typeface="Space Grotesk" pitchFamily="34" charset="0"/>
                           <a:ea typeface="Space Grotesk" pitchFamily="34" charset="-122"/>
                           <a:cs typeface="Space Grotesk" pitchFamily="34" charset="-120"/>
                         </a:rPr>
-                        <a:t>0.71</a:t>
+                        <a:t>0.29</a:t>
                       </a:r>
-                      <a:endParaRPr lang="en-US" sz="1150" dirty="0">
+                      <a:endParaRPr lang="en-US" sz="1300" dirty="0">
+                        <a:latin typeface="Space Grotesk" charset="0"/>
+                        <a:ea typeface="Space Grotesk" charset="0"/>
+                        <a:cs typeface="Space Grotesk" charset="0"/>
+                      </a:endParaRPr>
+                    </a:p>
+                  </a:txBody>
+                  <a:tcPr marL="91440" marR="91440" marT="45720" marB="45720" anchor="ctr">
+                    <a:lnL w="12700" cap="flat" cmpd="sng" algn="ctr">
+                      <a:solidFill>
+                        <a:srgbClr val="1C5248"/>
+                      </a:solidFill>
+                      <a:prstDash val="solid"/>
+                      <a:round/>
+                      <a:headEnd type="none" w="med" len="med"/>
+                      <a:tailEnd type="none" w="med" len="med"/>
+                    </a:lnL>
+                    <a:lnR w="12700" cap="flat" cmpd="sng" algn="ctr">
+                      <a:solidFill>
+                        <a:srgbClr val="1C5248"/>
+                      </a:solidFill>
+                      <a:prstDash val="solid"/>
+                      <a:round/>
+                      <a:headEnd type="none" w="med" len="med"/>
+                      <a:tailEnd type="none" w="med" len="med"/>
+                    </a:lnR>
+                    <a:lnT w="12700" cap="flat" cmpd="sng" algn="ctr">
+                      <a:solidFill>
+                        <a:srgbClr val="1C5248"/>
+                      </a:solidFill>
+                      <a:prstDash val="solid"/>
+                      <a:round/>
+                      <a:headEnd type="none" w="med" len="med"/>
+                      <a:tailEnd type="none" w="med" len="med"/>
+                    </a:lnT>
+                    <a:lnB w="12700" cap="flat" cmpd="sng" algn="ctr">
+                      <a:solidFill>
+                        <a:srgbClr val="1C5248"/>
+                      </a:solidFill>
+                      <a:prstDash val="solid"/>
+                      <a:round/>
+                      <a:headEnd type="none" w="med" len="med"/>
+                      <a:tailEnd type="none" w="med" len="med"/>
+                    </a:lnB>
+                    <a:solidFill>
+                      <a:srgbClr val="123F38"/>
+                    </a:solidFill>
+                  </a:tcPr>
+                </a:tc>
+              </a:tr>
+              <a:tr h="512064">
+                <a:tc>
+                  <a:txBody>
+                    <a:bodyPr/>
+                    <a:lstStyle/>
+                    <a:p>
+                      <a:pPr algn="l" indent="0" marL="0">
+                        <a:buNone/>
+                      </a:pPr>
+                      <a:r>
+                        <a:rPr lang="en-US" sz="1300" b="1" dirty="0">
+                          <a:solidFill>
+                            <a:srgbClr val="FFFFFF"/>
+                          </a:solidFill>
+                          <a:latin typeface="Space Grotesk" pitchFamily="34" charset="0"/>
+                          <a:ea typeface="Space Grotesk" pitchFamily="34" charset="-122"/>
+                          <a:cs typeface="Space Grotesk" pitchFamily="34" charset="-120"/>
+                        </a:rPr>
+                        <a:t>Non-forest</a:t>
+                      </a:r>
+                      <a:endParaRPr lang="en-US" sz="1300" dirty="0">
                         <a:latin typeface="Space Grotesk" charset="0"/>
                         <a:ea typeface="Space Grotesk" charset="0"/>
                         <a:cs typeface="Space Grotesk" charset="0"/>
@@ -5560,17 +5752,17 @@
                         <a:buNone/>
                       </a:pPr>
                       <a:r>
-                        <a:rPr lang="en-US" sz="1150" dirty="0">
+                        <a:rPr lang="en-US" sz="1300" dirty="0">
                           <a:solidFill>
-                            <a:srgbClr val="9DBDB0"/>
+                            <a:srgbClr val="FFFFFF"/>
                           </a:solidFill>
                           <a:latin typeface="Space Grotesk" pitchFamily="34" charset="0"/>
                           <a:ea typeface="Space Grotesk" pitchFamily="34" charset="-122"/>
                           <a:cs typeface="Space Grotesk" pitchFamily="34" charset="-120"/>
                         </a:rPr>
-                        <a:t>0.44</a:t>
+                        <a:t>0.24</a:t>
                       </a:r>
-                      <a:endParaRPr lang="en-US" sz="1150" dirty="0">
+                      <a:endParaRPr lang="en-US" sz="1300" dirty="0">
                         <a:latin typeface="Space Grotesk" charset="0"/>
                         <a:ea typeface="Space Grotesk" charset="0"/>
                         <a:cs typeface="Space Grotesk" charset="0"/>
@@ -5628,485 +5820,7 @@
                         <a:buNone/>
                       </a:pPr>
                       <a:r>
-                        <a:rPr lang="en-US" sz="1150" b="1" dirty="0">
-                          <a:solidFill>
-                            <a:srgbClr val="FFFFFF"/>
-                          </a:solidFill>
-                          <a:latin typeface="Space Grotesk" pitchFamily="34" charset="0"/>
-                          <a:ea typeface="Space Grotesk" pitchFamily="34" charset="-122"/>
-                          <a:cs typeface="Space Grotesk" pitchFamily="34" charset="-120"/>
-                        </a:rPr>
-                        <a:t>0.54</a:t>
-                      </a:r>
-                      <a:endParaRPr lang="en-US" sz="1150" dirty="0">
-                        <a:latin typeface="Space Grotesk" charset="0"/>
-                        <a:ea typeface="Space Grotesk" charset="0"/>
-                        <a:cs typeface="Space Grotesk" charset="0"/>
-                      </a:endParaRPr>
-                    </a:p>
-                  </a:txBody>
-                  <a:tcPr marL="91440" marR="91440" marT="45720" marB="45720" anchor="ctr">
-                    <a:lnL w="12700" cap="flat" cmpd="sng" algn="ctr">
-                      <a:solidFill>
-                        <a:srgbClr val="1C5248"/>
-                      </a:solidFill>
-                      <a:prstDash val="solid"/>
-                      <a:round/>
-                      <a:headEnd type="none" w="med" len="med"/>
-                      <a:tailEnd type="none" w="med" len="med"/>
-                    </a:lnL>
-                    <a:lnR w="12700" cap="flat" cmpd="sng" algn="ctr">
-                      <a:solidFill>
-                        <a:srgbClr val="1C5248"/>
-                      </a:solidFill>
-                      <a:prstDash val="solid"/>
-                      <a:round/>
-                      <a:headEnd type="none" w="med" len="med"/>
-                      <a:tailEnd type="none" w="med" len="med"/>
-                    </a:lnR>
-                    <a:lnT w="12700" cap="flat" cmpd="sng" algn="ctr">
-                      <a:solidFill>
-                        <a:srgbClr val="1C5248"/>
-                      </a:solidFill>
-                      <a:prstDash val="solid"/>
-                      <a:round/>
-                      <a:headEnd type="none" w="med" len="med"/>
-                      <a:tailEnd type="none" w="med" len="med"/>
-                    </a:lnT>
-                    <a:lnB w="12700" cap="flat" cmpd="sng" algn="ctr">
-                      <a:solidFill>
-                        <a:srgbClr val="1C5248"/>
-                      </a:solidFill>
-                      <a:prstDash val="solid"/>
-                      <a:round/>
-                      <a:headEnd type="none" w="med" len="med"/>
-                      <a:tailEnd type="none" w="med" len="med"/>
-                    </a:lnB>
-                    <a:solidFill>
-                      <a:srgbClr val="17564A"/>
-                    </a:solidFill>
-                  </a:tcPr>
-                </a:tc>
-              </a:tr>
-              <a:tr h="548640">
-                <a:tc>
-                  <a:txBody>
-                    <a:bodyPr/>
-                    <a:lstStyle/>
-                    <a:p>
-                      <a:pPr algn="l" indent="0" marL="0">
-                        <a:buNone/>
-                      </a:pPr>
-                      <a:r>
-                        <a:rPr lang="en-US" sz="1200" b="1" dirty="0">
-                          <a:solidFill>
-                            <a:srgbClr val="FFFFFF"/>
-                          </a:solidFill>
-                          <a:latin typeface="Space Grotesk" pitchFamily="34" charset="0"/>
-                          <a:ea typeface="Space Grotesk" pitchFamily="34" charset="-122"/>
-                          <a:cs typeface="Space Grotesk" pitchFamily="34" charset="-120"/>
-                        </a:rPr>
-                        <a:t>Spruce</a:t>
-                      </a:r>
-                      <a:endParaRPr lang="en-US" sz="1200" dirty="0">
-                        <a:latin typeface="Space Grotesk" charset="0"/>
-                        <a:ea typeface="Space Grotesk" charset="0"/>
-                        <a:cs typeface="Space Grotesk" charset="0"/>
-                      </a:endParaRPr>
-                    </a:p>
-                  </a:txBody>
-                  <a:tcPr marL="91440" marR="91440" marT="45720" marB="45720" anchor="ctr">
-                    <a:lnL w="12700" cap="flat" cmpd="sng" algn="ctr">
-                      <a:solidFill>
-                        <a:srgbClr val="1C5248"/>
-                      </a:solidFill>
-                      <a:prstDash val="solid"/>
-                      <a:round/>
-                      <a:headEnd type="none" w="med" len="med"/>
-                      <a:tailEnd type="none" w="med" len="med"/>
-                    </a:lnL>
-                    <a:lnR w="12700" cap="flat" cmpd="sng" algn="ctr">
-                      <a:solidFill>
-                        <a:srgbClr val="1C5248"/>
-                      </a:solidFill>
-                      <a:prstDash val="solid"/>
-                      <a:round/>
-                      <a:headEnd type="none" w="med" len="med"/>
-                      <a:tailEnd type="none" w="med" len="med"/>
-                    </a:lnR>
-                    <a:lnT w="12700" cap="flat" cmpd="sng" algn="ctr">
-                      <a:solidFill>
-                        <a:srgbClr val="1C5248"/>
-                      </a:solidFill>
-                      <a:prstDash val="solid"/>
-                      <a:round/>
-                      <a:headEnd type="none" w="med" len="med"/>
-                      <a:tailEnd type="none" w="med" len="med"/>
-                    </a:lnT>
-                    <a:lnB w="12700" cap="flat" cmpd="sng" algn="ctr">
-                      <a:solidFill>
-                        <a:srgbClr val="1C5248"/>
-                      </a:solidFill>
-                      <a:prstDash val="solid"/>
-                      <a:round/>
-                      <a:headEnd type="none" w="med" len="med"/>
-                      <a:tailEnd type="none" w="med" len="med"/>
-                    </a:lnB>
-                    <a:solidFill>
-                      <a:srgbClr val="123F38"/>
-                    </a:solidFill>
-                  </a:tcPr>
-                </a:tc>
-                <a:tc>
-                  <a:txBody>
-                    <a:bodyPr/>
-                    <a:lstStyle/>
-                    <a:p>
-                      <a:pPr algn="ctr" indent="0" marL="0">
-                        <a:buNone/>
-                      </a:pPr>
-                      <a:r>
-                        <a:rPr lang="en-US" sz="1150" dirty="0">
-                          <a:solidFill>
-                            <a:srgbClr val="9DBDB0"/>
-                          </a:solidFill>
-                          <a:latin typeface="Space Grotesk" pitchFamily="34" charset="0"/>
-                          <a:ea typeface="Space Grotesk" pitchFamily="34" charset="-122"/>
-                          <a:cs typeface="Space Grotesk" pitchFamily="34" charset="-120"/>
-                        </a:rPr>
-                        <a:t>0.66</a:t>
-                      </a:r>
-                      <a:endParaRPr lang="en-US" sz="1150" dirty="0">
-                        <a:latin typeface="Space Grotesk" charset="0"/>
-                        <a:ea typeface="Space Grotesk" charset="0"/>
-                        <a:cs typeface="Space Grotesk" charset="0"/>
-                      </a:endParaRPr>
-                    </a:p>
-                  </a:txBody>
-                  <a:tcPr marL="91440" marR="91440" marT="45720" marB="45720" anchor="ctr">
-                    <a:lnL w="12700" cap="flat" cmpd="sng" algn="ctr">
-                      <a:solidFill>
-                        <a:srgbClr val="1C5248"/>
-                      </a:solidFill>
-                      <a:prstDash val="solid"/>
-                      <a:round/>
-                      <a:headEnd type="none" w="med" len="med"/>
-                      <a:tailEnd type="none" w="med" len="med"/>
-                    </a:lnL>
-                    <a:lnR w="12700" cap="flat" cmpd="sng" algn="ctr">
-                      <a:solidFill>
-                        <a:srgbClr val="1C5248"/>
-                      </a:solidFill>
-                      <a:prstDash val="solid"/>
-                      <a:round/>
-                      <a:headEnd type="none" w="med" len="med"/>
-                      <a:tailEnd type="none" w="med" len="med"/>
-                    </a:lnR>
-                    <a:lnT w="12700" cap="flat" cmpd="sng" algn="ctr">
-                      <a:solidFill>
-                        <a:srgbClr val="1C5248"/>
-                      </a:solidFill>
-                      <a:prstDash val="solid"/>
-                      <a:round/>
-                      <a:headEnd type="none" w="med" len="med"/>
-                      <a:tailEnd type="none" w="med" len="med"/>
-                    </a:lnT>
-                    <a:lnB w="12700" cap="flat" cmpd="sng" algn="ctr">
-                      <a:solidFill>
-                        <a:srgbClr val="1C5248"/>
-                      </a:solidFill>
-                      <a:prstDash val="solid"/>
-                      <a:round/>
-                      <a:headEnd type="none" w="med" len="med"/>
-                      <a:tailEnd type="none" w="med" len="med"/>
-                    </a:lnB>
-                    <a:solidFill>
-                      <a:srgbClr val="123F38"/>
-                    </a:solidFill>
-                  </a:tcPr>
-                </a:tc>
-                <a:tc>
-                  <a:txBody>
-                    <a:bodyPr/>
-                    <a:lstStyle/>
-                    <a:p>
-                      <a:pPr algn="ctr" indent="0" marL="0">
-                        <a:buNone/>
-                      </a:pPr>
-                      <a:r>
-                        <a:rPr lang="en-US" sz="1150" dirty="0">
-                          <a:solidFill>
-                            <a:srgbClr val="9DBDB0"/>
-                          </a:solidFill>
-                          <a:latin typeface="Space Grotesk" pitchFamily="34" charset="0"/>
-                          <a:ea typeface="Space Grotesk" pitchFamily="34" charset="-122"/>
-                          <a:cs typeface="Space Grotesk" pitchFamily="34" charset="-120"/>
-                        </a:rPr>
-                        <a:t>0.47</a:t>
-                      </a:r>
-                      <a:endParaRPr lang="en-US" sz="1150" dirty="0">
-                        <a:latin typeface="Space Grotesk" charset="0"/>
-                        <a:ea typeface="Space Grotesk" charset="0"/>
-                        <a:cs typeface="Space Grotesk" charset="0"/>
-                      </a:endParaRPr>
-                    </a:p>
-                  </a:txBody>
-                  <a:tcPr marL="91440" marR="91440" marT="45720" marB="45720" anchor="ctr">
-                    <a:lnL w="12700" cap="flat" cmpd="sng" algn="ctr">
-                      <a:solidFill>
-                        <a:srgbClr val="1C5248"/>
-                      </a:solidFill>
-                      <a:prstDash val="solid"/>
-                      <a:round/>
-                      <a:headEnd type="none" w="med" len="med"/>
-                      <a:tailEnd type="none" w="med" len="med"/>
-                    </a:lnL>
-                    <a:lnR w="12700" cap="flat" cmpd="sng" algn="ctr">
-                      <a:solidFill>
-                        <a:srgbClr val="1C5248"/>
-                      </a:solidFill>
-                      <a:prstDash val="solid"/>
-                      <a:round/>
-                      <a:headEnd type="none" w="med" len="med"/>
-                      <a:tailEnd type="none" w="med" len="med"/>
-                    </a:lnR>
-                    <a:lnT w="12700" cap="flat" cmpd="sng" algn="ctr">
-                      <a:solidFill>
-                        <a:srgbClr val="1C5248"/>
-                      </a:solidFill>
-                      <a:prstDash val="solid"/>
-                      <a:round/>
-                      <a:headEnd type="none" w="med" len="med"/>
-                      <a:tailEnd type="none" w="med" len="med"/>
-                    </a:lnT>
-                    <a:lnB w="12700" cap="flat" cmpd="sng" algn="ctr">
-                      <a:solidFill>
-                        <a:srgbClr val="1C5248"/>
-                      </a:solidFill>
-                      <a:prstDash val="solid"/>
-                      <a:round/>
-                      <a:headEnd type="none" w="med" len="med"/>
-                      <a:tailEnd type="none" w="med" len="med"/>
-                    </a:lnB>
-                    <a:solidFill>
-                      <a:srgbClr val="123F38"/>
-                    </a:solidFill>
-                  </a:tcPr>
-                </a:tc>
-                <a:tc>
-                  <a:txBody>
-                    <a:bodyPr/>
-                    <a:lstStyle/>
-                    <a:p>
-                      <a:pPr algn="ctr" indent="0" marL="0">
-                        <a:buNone/>
-                      </a:pPr>
-                      <a:r>
-                        <a:rPr lang="en-US" sz="1150" b="1" dirty="0">
-                          <a:solidFill>
-                            <a:srgbClr val="FFFFFF"/>
-                          </a:solidFill>
-                          <a:latin typeface="Space Grotesk" pitchFamily="34" charset="0"/>
-                          <a:ea typeface="Space Grotesk" pitchFamily="34" charset="-122"/>
-                          <a:cs typeface="Space Grotesk" pitchFamily="34" charset="-120"/>
-                        </a:rPr>
-                        <a:t>0.55</a:t>
-                      </a:r>
-                      <a:endParaRPr lang="en-US" sz="1150" dirty="0">
-                        <a:latin typeface="Space Grotesk" charset="0"/>
-                        <a:ea typeface="Space Grotesk" charset="0"/>
-                        <a:cs typeface="Space Grotesk" charset="0"/>
-                      </a:endParaRPr>
-                    </a:p>
-                  </a:txBody>
-                  <a:tcPr marL="91440" marR="91440" marT="45720" marB="45720" anchor="ctr">
-                    <a:lnL w="12700" cap="flat" cmpd="sng" algn="ctr">
-                      <a:solidFill>
-                        <a:srgbClr val="1C5248"/>
-                      </a:solidFill>
-                      <a:prstDash val="solid"/>
-                      <a:round/>
-                      <a:headEnd type="none" w="med" len="med"/>
-                      <a:tailEnd type="none" w="med" len="med"/>
-                    </a:lnL>
-                    <a:lnR w="12700" cap="flat" cmpd="sng" algn="ctr">
-                      <a:solidFill>
-                        <a:srgbClr val="1C5248"/>
-                      </a:solidFill>
-                      <a:prstDash val="solid"/>
-                      <a:round/>
-                      <a:headEnd type="none" w="med" len="med"/>
-                      <a:tailEnd type="none" w="med" len="med"/>
-                    </a:lnR>
-                    <a:lnT w="12700" cap="flat" cmpd="sng" algn="ctr">
-                      <a:solidFill>
-                        <a:srgbClr val="1C5248"/>
-                      </a:solidFill>
-                      <a:prstDash val="solid"/>
-                      <a:round/>
-                      <a:headEnd type="none" w="med" len="med"/>
-                      <a:tailEnd type="none" w="med" len="med"/>
-                    </a:lnT>
-                    <a:lnB w="12700" cap="flat" cmpd="sng" algn="ctr">
-                      <a:solidFill>
-                        <a:srgbClr val="1C5248"/>
-                      </a:solidFill>
-                      <a:prstDash val="solid"/>
-                      <a:round/>
-                      <a:headEnd type="none" w="med" len="med"/>
-                      <a:tailEnd type="none" w="med" len="med"/>
-                    </a:lnB>
-                    <a:solidFill>
-                      <a:srgbClr val="17564A"/>
-                    </a:solidFill>
-                  </a:tcPr>
-                </a:tc>
-                <a:tc>
-                  <a:txBody>
-                    <a:bodyPr/>
-                    <a:lstStyle/>
-                    <a:p>
-                      <a:pPr algn="ctr" indent="0" marL="0">
-                        <a:buNone/>
-                      </a:pPr>
-                      <a:r>
-                        <a:rPr lang="en-US" sz="1150" dirty="0">
-                          <a:solidFill>
-                            <a:srgbClr val="9DBDB0"/>
-                          </a:solidFill>
-                          <a:latin typeface="Space Grotesk" pitchFamily="34" charset="0"/>
-                          <a:ea typeface="Space Grotesk" pitchFamily="34" charset="-122"/>
-                          <a:cs typeface="Space Grotesk" pitchFamily="34" charset="-120"/>
-                        </a:rPr>
-                        <a:t>0.76</a:t>
-                      </a:r>
-                      <a:endParaRPr lang="en-US" sz="1150" dirty="0">
-                        <a:latin typeface="Space Grotesk" charset="0"/>
-                        <a:ea typeface="Space Grotesk" charset="0"/>
-                        <a:cs typeface="Space Grotesk" charset="0"/>
-                      </a:endParaRPr>
-                    </a:p>
-                  </a:txBody>
-                  <a:tcPr marL="91440" marR="91440" marT="45720" marB="45720" anchor="ctr">
-                    <a:lnL w="12700" cap="flat" cmpd="sng" algn="ctr">
-                      <a:solidFill>
-                        <a:srgbClr val="1C5248"/>
-                      </a:solidFill>
-                      <a:prstDash val="solid"/>
-                      <a:round/>
-                      <a:headEnd type="none" w="med" len="med"/>
-                      <a:tailEnd type="none" w="med" len="med"/>
-                    </a:lnL>
-                    <a:lnR w="12700" cap="flat" cmpd="sng" algn="ctr">
-                      <a:solidFill>
-                        <a:srgbClr val="1C5248"/>
-                      </a:solidFill>
-                      <a:prstDash val="solid"/>
-                      <a:round/>
-                      <a:headEnd type="none" w="med" len="med"/>
-                      <a:tailEnd type="none" w="med" len="med"/>
-                    </a:lnR>
-                    <a:lnT w="12700" cap="flat" cmpd="sng" algn="ctr">
-                      <a:solidFill>
-                        <a:srgbClr val="1C5248"/>
-                      </a:solidFill>
-                      <a:prstDash val="solid"/>
-                      <a:round/>
-                      <a:headEnd type="none" w="med" len="med"/>
-                      <a:tailEnd type="none" w="med" len="med"/>
-                    </a:lnT>
-                    <a:lnB w="12700" cap="flat" cmpd="sng" algn="ctr">
-                      <a:solidFill>
-                        <a:srgbClr val="1C5248"/>
-                      </a:solidFill>
-                      <a:prstDash val="solid"/>
-                      <a:round/>
-                      <a:headEnd type="none" w="med" len="med"/>
-                      <a:tailEnd type="none" w="med" len="med"/>
-                    </a:lnB>
-                    <a:solidFill>
-                      <a:srgbClr val="123F38"/>
-                    </a:solidFill>
-                  </a:tcPr>
-                </a:tc>
-                <a:tc>
-                  <a:txBody>
-                    <a:bodyPr/>
-                    <a:lstStyle/>
-                    <a:p>
-                      <a:pPr algn="ctr" indent="0" marL="0">
-                        <a:buNone/>
-                      </a:pPr>
-                      <a:r>
-                        <a:rPr lang="en-US" sz="1150" dirty="0">
-                          <a:solidFill>
-                            <a:srgbClr val="9DBDB0"/>
-                          </a:solidFill>
-                          <a:latin typeface="Space Grotesk" pitchFamily="34" charset="0"/>
-                          <a:ea typeface="Space Grotesk" pitchFamily="34" charset="-122"/>
-                          <a:cs typeface="Space Grotesk" pitchFamily="34" charset="-120"/>
-                        </a:rPr>
-                        <a:t>0.50</a:t>
-                      </a:r>
-                      <a:endParaRPr lang="en-US" sz="1150" dirty="0">
-                        <a:latin typeface="Space Grotesk" charset="0"/>
-                        <a:ea typeface="Space Grotesk" charset="0"/>
-                        <a:cs typeface="Space Grotesk" charset="0"/>
-                      </a:endParaRPr>
-                    </a:p>
-                  </a:txBody>
-                  <a:tcPr marL="91440" marR="91440" marT="45720" marB="45720" anchor="ctr">
-                    <a:lnL w="12700" cap="flat" cmpd="sng" algn="ctr">
-                      <a:solidFill>
-                        <a:srgbClr val="1C5248"/>
-                      </a:solidFill>
-                      <a:prstDash val="solid"/>
-                      <a:round/>
-                      <a:headEnd type="none" w="med" len="med"/>
-                      <a:tailEnd type="none" w="med" len="med"/>
-                    </a:lnL>
-                    <a:lnR w="12700" cap="flat" cmpd="sng" algn="ctr">
-                      <a:solidFill>
-                        <a:srgbClr val="1C5248"/>
-                      </a:solidFill>
-                      <a:prstDash val="solid"/>
-                      <a:round/>
-                      <a:headEnd type="none" w="med" len="med"/>
-                      <a:tailEnd type="none" w="med" len="med"/>
-                    </a:lnR>
-                    <a:lnT w="12700" cap="flat" cmpd="sng" algn="ctr">
-                      <a:solidFill>
-                        <a:srgbClr val="1C5248"/>
-                      </a:solidFill>
-                      <a:prstDash val="solid"/>
-                      <a:round/>
-                      <a:headEnd type="none" w="med" len="med"/>
-                      <a:tailEnd type="none" w="med" len="med"/>
-                    </a:lnT>
-                    <a:lnB w="12700" cap="flat" cmpd="sng" algn="ctr">
-                      <a:solidFill>
-                        <a:srgbClr val="1C5248"/>
-                      </a:solidFill>
-                      <a:prstDash val="solid"/>
-                      <a:round/>
-                      <a:headEnd type="none" w="med" len="med"/>
-                      <a:tailEnd type="none" w="med" len="med"/>
-                    </a:lnB>
-                    <a:solidFill>
-                      <a:srgbClr val="123F38"/>
-                    </a:solidFill>
-                  </a:tcPr>
-                </a:tc>
-                <a:tc>
-                  <a:txBody>
-                    <a:bodyPr/>
-                    <a:lstStyle/>
-                    <a:p>
-                      <a:pPr algn="ctr" indent="0" marL="0">
-                        <a:buNone/>
-                      </a:pPr>
-                      <a:r>
-                        <a:rPr lang="en-US" sz="1150" b="1" dirty="0">
+                        <a:rPr lang="en-US" sz="1300" b="1" dirty="0">
                           <a:solidFill>
                             <a:srgbClr val="CDFCE3"/>
                           </a:solidFill>
@@ -6114,9 +5828,9 @@
                           <a:ea typeface="Space Grotesk" pitchFamily="34" charset="-122"/>
                           <a:cs typeface="Space Grotesk" pitchFamily="34" charset="-120"/>
                         </a:rPr>
-                        <a:t>0.60</a:t>
+                        <a:t>0.32</a:t>
                       </a:r>
-                      <a:endParaRPr lang="en-US" sz="1150" dirty="0">
+                      <a:endParaRPr lang="en-US" sz="1300" dirty="0">
                         <a:latin typeface="Space Grotesk" charset="0"/>
                         <a:ea typeface="Space Grotesk" charset="0"/>
                         <a:cs typeface="Space Grotesk" charset="0"/>
@@ -6174,17 +5888,17 @@
                         <a:buNone/>
                       </a:pPr>
                       <a:r>
-                        <a:rPr lang="en-US" sz="1150" dirty="0">
+                        <a:rPr lang="en-US" sz="1300" dirty="0">
                           <a:solidFill>
-                            <a:srgbClr val="9DBDB0"/>
+                            <a:srgbClr val="FFFFFF"/>
                           </a:solidFill>
                           <a:latin typeface="Space Grotesk" pitchFamily="34" charset="0"/>
                           <a:ea typeface="Space Grotesk" pitchFamily="34" charset="-122"/>
                           <a:cs typeface="Space Grotesk" pitchFamily="34" charset="-120"/>
                         </a:rPr>
-                        <a:t>0.59</a:t>
+                        <a:t>0.00</a:t>
                       </a:r>
-                      <a:endParaRPr lang="en-US" sz="1150" dirty="0">
+                      <a:endParaRPr lang="en-US" sz="1300" dirty="0">
                         <a:latin typeface="Space Grotesk" charset="0"/>
                         <a:ea typeface="Space Grotesk" charset="0"/>
                         <a:cs typeface="Space Grotesk" charset="0"/>
@@ -6229,1507 +5943,7 @@
                       <a:tailEnd type="none" w="med" len="med"/>
                     </a:lnB>
                     <a:solidFill>
-                      <a:srgbClr val="123F38"/>
-                    </a:solidFill>
-                  </a:tcPr>
-                </a:tc>
-                <a:tc>
-                  <a:txBody>
-                    <a:bodyPr/>
-                    <a:lstStyle/>
-                    <a:p>
-                      <a:pPr algn="ctr" indent="0" marL="0">
-                        <a:buNone/>
-                      </a:pPr>
-                      <a:r>
-                        <a:rPr lang="en-US" sz="1150" dirty="0">
-                          <a:solidFill>
-                            <a:srgbClr val="9DBDB0"/>
-                          </a:solidFill>
-                          <a:latin typeface="Space Grotesk" pitchFamily="34" charset="0"/>
-                          <a:ea typeface="Space Grotesk" pitchFamily="34" charset="-122"/>
-                          <a:cs typeface="Space Grotesk" pitchFamily="34" charset="-120"/>
-                        </a:rPr>
-                        <a:t>0.40</a:t>
-                      </a:r>
-                      <a:endParaRPr lang="en-US" sz="1150" dirty="0">
-                        <a:latin typeface="Space Grotesk" charset="0"/>
-                        <a:ea typeface="Space Grotesk" charset="0"/>
-                        <a:cs typeface="Space Grotesk" charset="0"/>
-                      </a:endParaRPr>
-                    </a:p>
-                  </a:txBody>
-                  <a:tcPr marL="91440" marR="91440" marT="45720" marB="45720" anchor="ctr">
-                    <a:lnL w="12700" cap="flat" cmpd="sng" algn="ctr">
-                      <a:solidFill>
-                        <a:srgbClr val="1C5248"/>
-                      </a:solidFill>
-                      <a:prstDash val="solid"/>
-                      <a:round/>
-                      <a:headEnd type="none" w="med" len="med"/>
-                      <a:tailEnd type="none" w="med" len="med"/>
-                    </a:lnL>
-                    <a:lnR w="12700" cap="flat" cmpd="sng" algn="ctr">
-                      <a:solidFill>
-                        <a:srgbClr val="1C5248"/>
-                      </a:solidFill>
-                      <a:prstDash val="solid"/>
-                      <a:round/>
-                      <a:headEnd type="none" w="med" len="med"/>
-                      <a:tailEnd type="none" w="med" len="med"/>
-                    </a:lnR>
-                    <a:lnT w="12700" cap="flat" cmpd="sng" algn="ctr">
-                      <a:solidFill>
-                        <a:srgbClr val="1C5248"/>
-                      </a:solidFill>
-                      <a:prstDash val="solid"/>
-                      <a:round/>
-                      <a:headEnd type="none" w="med" len="med"/>
-                      <a:tailEnd type="none" w="med" len="med"/>
-                    </a:lnT>
-                    <a:lnB w="12700" cap="flat" cmpd="sng" algn="ctr">
-                      <a:solidFill>
-                        <a:srgbClr val="1C5248"/>
-                      </a:solidFill>
-                      <a:prstDash val="solid"/>
-                      <a:round/>
-                      <a:headEnd type="none" w="med" len="med"/>
-                      <a:tailEnd type="none" w="med" len="med"/>
-                    </a:lnB>
-                    <a:solidFill>
-                      <a:srgbClr val="123F38"/>
-                    </a:solidFill>
-                  </a:tcPr>
-                </a:tc>
-                <a:tc>
-                  <a:txBody>
-                    <a:bodyPr/>
-                    <a:lstStyle/>
-                    <a:p>
-                      <a:pPr algn="ctr" indent="0" marL="0">
-                        <a:buNone/>
-                      </a:pPr>
-                      <a:r>
-                        <a:rPr lang="en-US" sz="1150" b="1" dirty="0">
-                          <a:solidFill>
-                            <a:srgbClr val="FFFFFF"/>
-                          </a:solidFill>
-                          <a:latin typeface="Space Grotesk" pitchFamily="34" charset="0"/>
-                          <a:ea typeface="Space Grotesk" pitchFamily="34" charset="-122"/>
-                          <a:cs typeface="Space Grotesk" pitchFamily="34" charset="-120"/>
-                        </a:rPr>
-                        <a:t>0.47</a:t>
-                      </a:r>
-                      <a:endParaRPr lang="en-US" sz="1150" dirty="0">
-                        <a:latin typeface="Space Grotesk" charset="0"/>
-                        <a:ea typeface="Space Grotesk" charset="0"/>
-                        <a:cs typeface="Space Grotesk" charset="0"/>
-                      </a:endParaRPr>
-                    </a:p>
-                  </a:txBody>
-                  <a:tcPr marL="91440" marR="91440" marT="45720" marB="45720" anchor="ctr">
-                    <a:lnL w="12700" cap="flat" cmpd="sng" algn="ctr">
-                      <a:solidFill>
-                        <a:srgbClr val="1C5248"/>
-                      </a:solidFill>
-                      <a:prstDash val="solid"/>
-                      <a:round/>
-                      <a:headEnd type="none" w="med" len="med"/>
-                      <a:tailEnd type="none" w="med" len="med"/>
-                    </a:lnL>
-                    <a:lnR w="12700" cap="flat" cmpd="sng" algn="ctr">
-                      <a:solidFill>
-                        <a:srgbClr val="1C5248"/>
-                      </a:solidFill>
-                      <a:prstDash val="solid"/>
-                      <a:round/>
-                      <a:headEnd type="none" w="med" len="med"/>
-                      <a:tailEnd type="none" w="med" len="med"/>
-                    </a:lnR>
-                    <a:lnT w="12700" cap="flat" cmpd="sng" algn="ctr">
-                      <a:solidFill>
-                        <a:srgbClr val="1C5248"/>
-                      </a:solidFill>
-                      <a:prstDash val="solid"/>
-                      <a:round/>
-                      <a:headEnd type="none" w="med" len="med"/>
-                      <a:tailEnd type="none" w="med" len="med"/>
-                    </a:lnT>
-                    <a:lnB w="12700" cap="flat" cmpd="sng" algn="ctr">
-                      <a:solidFill>
-                        <a:srgbClr val="1C5248"/>
-                      </a:solidFill>
-                      <a:prstDash val="solid"/>
-                      <a:round/>
-                      <a:headEnd type="none" w="med" len="med"/>
-                      <a:tailEnd type="none" w="med" len="med"/>
-                    </a:lnB>
-                    <a:solidFill>
-                      <a:srgbClr val="17564A"/>
-                    </a:solidFill>
-                  </a:tcPr>
-                </a:tc>
-              </a:tr>
-              <a:tr h="548640">
-                <a:tc>
-                  <a:txBody>
-                    <a:bodyPr/>
-                    <a:lstStyle/>
-                    <a:p>
-                      <a:pPr algn="l" indent="0" marL="0">
-                        <a:buNone/>
-                      </a:pPr>
-                      <a:r>
-                        <a:rPr lang="en-US" sz="1200" b="1" dirty="0">
-                          <a:solidFill>
-                            <a:srgbClr val="FFFFFF"/>
-                          </a:solidFill>
-                          <a:latin typeface="Space Grotesk" pitchFamily="34" charset="0"/>
-                          <a:ea typeface="Space Grotesk" pitchFamily="34" charset="-122"/>
-                          <a:cs typeface="Space Grotesk" pitchFamily="34" charset="-120"/>
-                        </a:rPr>
-                        <a:t>Deciduous</a:t>
-                      </a:r>
-                      <a:endParaRPr lang="en-US" sz="1200" dirty="0">
-                        <a:latin typeface="Space Grotesk" charset="0"/>
-                        <a:ea typeface="Space Grotesk" charset="0"/>
-                        <a:cs typeface="Space Grotesk" charset="0"/>
-                      </a:endParaRPr>
-                    </a:p>
-                  </a:txBody>
-                  <a:tcPr marL="91440" marR="91440" marT="45720" marB="45720" anchor="ctr">
-                    <a:lnL w="12700" cap="flat" cmpd="sng" algn="ctr">
-                      <a:solidFill>
-                        <a:srgbClr val="1C5248"/>
-                      </a:solidFill>
-                      <a:prstDash val="solid"/>
-                      <a:round/>
-                      <a:headEnd type="none" w="med" len="med"/>
-                      <a:tailEnd type="none" w="med" len="med"/>
-                    </a:lnL>
-                    <a:lnR w="12700" cap="flat" cmpd="sng" algn="ctr">
-                      <a:solidFill>
-                        <a:srgbClr val="1C5248"/>
-                      </a:solidFill>
-                      <a:prstDash val="solid"/>
-                      <a:round/>
-                      <a:headEnd type="none" w="med" len="med"/>
-                      <a:tailEnd type="none" w="med" len="med"/>
-                    </a:lnR>
-                    <a:lnT w="12700" cap="flat" cmpd="sng" algn="ctr">
-                      <a:solidFill>
-                        <a:srgbClr val="1C5248"/>
-                      </a:solidFill>
-                      <a:prstDash val="solid"/>
-                      <a:round/>
-                      <a:headEnd type="none" w="med" len="med"/>
-                      <a:tailEnd type="none" w="med" len="med"/>
-                    </a:lnT>
-                    <a:lnB w="12700" cap="flat" cmpd="sng" algn="ctr">
-                      <a:solidFill>
-                        <a:srgbClr val="1C5248"/>
-                      </a:solidFill>
-                      <a:prstDash val="solid"/>
-                      <a:round/>
-                      <a:headEnd type="none" w="med" len="med"/>
-                      <a:tailEnd type="none" w="med" len="med"/>
-                    </a:lnB>
-                    <a:solidFill>
                       <a:srgbClr val="0C3A33"/>
-                    </a:solidFill>
-                  </a:tcPr>
-                </a:tc>
-                <a:tc>
-                  <a:txBody>
-                    <a:bodyPr/>
-                    <a:lstStyle/>
-                    <a:p>
-                      <a:pPr algn="ctr" indent="0" marL="0">
-                        <a:buNone/>
-                      </a:pPr>
-                      <a:r>
-                        <a:rPr lang="en-US" sz="1150" dirty="0">
-                          <a:solidFill>
-                            <a:srgbClr val="9DBDB0"/>
-                          </a:solidFill>
-                          <a:latin typeface="Space Grotesk" pitchFamily="34" charset="0"/>
-                          <a:ea typeface="Space Grotesk" pitchFamily="34" charset="-122"/>
-                          <a:cs typeface="Space Grotesk" pitchFamily="34" charset="-120"/>
-                        </a:rPr>
-                        <a:t>0.60</a:t>
-                      </a:r>
-                      <a:endParaRPr lang="en-US" sz="1150" dirty="0">
-                        <a:latin typeface="Space Grotesk" charset="0"/>
-                        <a:ea typeface="Space Grotesk" charset="0"/>
-                        <a:cs typeface="Space Grotesk" charset="0"/>
-                      </a:endParaRPr>
-                    </a:p>
-                  </a:txBody>
-                  <a:tcPr marL="91440" marR="91440" marT="45720" marB="45720" anchor="ctr">
-                    <a:lnL w="12700" cap="flat" cmpd="sng" algn="ctr">
-                      <a:solidFill>
-                        <a:srgbClr val="1C5248"/>
-                      </a:solidFill>
-                      <a:prstDash val="solid"/>
-                      <a:round/>
-                      <a:headEnd type="none" w="med" len="med"/>
-                      <a:tailEnd type="none" w="med" len="med"/>
-                    </a:lnL>
-                    <a:lnR w="12700" cap="flat" cmpd="sng" algn="ctr">
-                      <a:solidFill>
-                        <a:srgbClr val="1C5248"/>
-                      </a:solidFill>
-                      <a:prstDash val="solid"/>
-                      <a:round/>
-                      <a:headEnd type="none" w="med" len="med"/>
-                      <a:tailEnd type="none" w="med" len="med"/>
-                    </a:lnR>
-                    <a:lnT w="12700" cap="flat" cmpd="sng" algn="ctr">
-                      <a:solidFill>
-                        <a:srgbClr val="1C5248"/>
-                      </a:solidFill>
-                      <a:prstDash val="solid"/>
-                      <a:round/>
-                      <a:headEnd type="none" w="med" len="med"/>
-                      <a:tailEnd type="none" w="med" len="med"/>
-                    </a:lnT>
-                    <a:lnB w="12700" cap="flat" cmpd="sng" algn="ctr">
-                      <a:solidFill>
-                        <a:srgbClr val="1C5248"/>
-                      </a:solidFill>
-                      <a:prstDash val="solid"/>
-                      <a:round/>
-                      <a:headEnd type="none" w="med" len="med"/>
-                      <a:tailEnd type="none" w="med" len="med"/>
-                    </a:lnB>
-                    <a:solidFill>
-                      <a:srgbClr val="0C3A33"/>
-                    </a:solidFill>
-                  </a:tcPr>
-                </a:tc>
-                <a:tc>
-                  <a:txBody>
-                    <a:bodyPr/>
-                    <a:lstStyle/>
-                    <a:p>
-                      <a:pPr algn="ctr" indent="0" marL="0">
-                        <a:buNone/>
-                      </a:pPr>
-                      <a:r>
-                        <a:rPr lang="en-US" sz="1150" dirty="0">
-                          <a:solidFill>
-                            <a:srgbClr val="9DBDB0"/>
-                          </a:solidFill>
-                          <a:latin typeface="Space Grotesk" pitchFamily="34" charset="0"/>
-                          <a:ea typeface="Space Grotesk" pitchFamily="34" charset="-122"/>
-                          <a:cs typeface="Space Grotesk" pitchFamily="34" charset="-120"/>
-                        </a:rPr>
-                        <a:t>0.36</a:t>
-                      </a:r>
-                      <a:endParaRPr lang="en-US" sz="1150" dirty="0">
-                        <a:latin typeface="Space Grotesk" charset="0"/>
-                        <a:ea typeface="Space Grotesk" charset="0"/>
-                        <a:cs typeface="Space Grotesk" charset="0"/>
-                      </a:endParaRPr>
-                    </a:p>
-                  </a:txBody>
-                  <a:tcPr marL="91440" marR="91440" marT="45720" marB="45720" anchor="ctr">
-                    <a:lnL w="12700" cap="flat" cmpd="sng" algn="ctr">
-                      <a:solidFill>
-                        <a:srgbClr val="1C5248"/>
-                      </a:solidFill>
-                      <a:prstDash val="solid"/>
-                      <a:round/>
-                      <a:headEnd type="none" w="med" len="med"/>
-                      <a:tailEnd type="none" w="med" len="med"/>
-                    </a:lnL>
-                    <a:lnR w="12700" cap="flat" cmpd="sng" algn="ctr">
-                      <a:solidFill>
-                        <a:srgbClr val="1C5248"/>
-                      </a:solidFill>
-                      <a:prstDash val="solid"/>
-                      <a:round/>
-                      <a:headEnd type="none" w="med" len="med"/>
-                      <a:tailEnd type="none" w="med" len="med"/>
-                    </a:lnR>
-                    <a:lnT w="12700" cap="flat" cmpd="sng" algn="ctr">
-                      <a:solidFill>
-                        <a:srgbClr val="1C5248"/>
-                      </a:solidFill>
-                      <a:prstDash val="solid"/>
-                      <a:round/>
-                      <a:headEnd type="none" w="med" len="med"/>
-                      <a:tailEnd type="none" w="med" len="med"/>
-                    </a:lnT>
-                    <a:lnB w="12700" cap="flat" cmpd="sng" algn="ctr">
-                      <a:solidFill>
-                        <a:srgbClr val="1C5248"/>
-                      </a:solidFill>
-                      <a:prstDash val="solid"/>
-                      <a:round/>
-                      <a:headEnd type="none" w="med" len="med"/>
-                      <a:tailEnd type="none" w="med" len="med"/>
-                    </a:lnB>
-                    <a:solidFill>
-                      <a:srgbClr val="0C3A33"/>
-                    </a:solidFill>
-                  </a:tcPr>
-                </a:tc>
-                <a:tc>
-                  <a:txBody>
-                    <a:bodyPr/>
-                    <a:lstStyle/>
-                    <a:p>
-                      <a:pPr algn="ctr" indent="0" marL="0">
-                        <a:buNone/>
-                      </a:pPr>
-                      <a:r>
-                        <a:rPr lang="en-US" sz="1150" b="1" dirty="0">
-                          <a:solidFill>
-                            <a:srgbClr val="CDFCE3"/>
-                          </a:solidFill>
-                          <a:latin typeface="Space Grotesk" pitchFamily="34" charset="0"/>
-                          <a:ea typeface="Space Grotesk" pitchFamily="34" charset="-122"/>
-                          <a:cs typeface="Space Grotesk" pitchFamily="34" charset="-120"/>
-                        </a:rPr>
-                        <a:t>0.45</a:t>
-                      </a:r>
-                      <a:endParaRPr lang="en-US" sz="1150" dirty="0">
-                        <a:latin typeface="Space Grotesk" charset="0"/>
-                        <a:ea typeface="Space Grotesk" charset="0"/>
-                        <a:cs typeface="Space Grotesk" charset="0"/>
-                      </a:endParaRPr>
-                    </a:p>
-                  </a:txBody>
-                  <a:tcPr marL="91440" marR="91440" marT="45720" marB="45720" anchor="ctr">
-                    <a:lnL w="12700" cap="flat" cmpd="sng" algn="ctr">
-                      <a:solidFill>
-                        <a:srgbClr val="1C5248"/>
-                      </a:solidFill>
-                      <a:prstDash val="solid"/>
-                      <a:round/>
-                      <a:headEnd type="none" w="med" len="med"/>
-                      <a:tailEnd type="none" w="med" len="med"/>
-                    </a:lnL>
-                    <a:lnR w="12700" cap="flat" cmpd="sng" algn="ctr">
-                      <a:solidFill>
-                        <a:srgbClr val="1C5248"/>
-                      </a:solidFill>
-                      <a:prstDash val="solid"/>
-                      <a:round/>
-                      <a:headEnd type="none" w="med" len="med"/>
-                      <a:tailEnd type="none" w="med" len="med"/>
-                    </a:lnR>
-                    <a:lnT w="12700" cap="flat" cmpd="sng" algn="ctr">
-                      <a:solidFill>
-                        <a:srgbClr val="1C5248"/>
-                      </a:solidFill>
-                      <a:prstDash val="solid"/>
-                      <a:round/>
-                      <a:headEnd type="none" w="med" len="med"/>
-                      <a:tailEnd type="none" w="med" len="med"/>
-                    </a:lnT>
-                    <a:lnB w="12700" cap="flat" cmpd="sng" algn="ctr">
-                      <a:solidFill>
-                        <a:srgbClr val="1C5248"/>
-                      </a:solidFill>
-                      <a:prstDash val="solid"/>
-                      <a:round/>
-                      <a:headEnd type="none" w="med" len="med"/>
-                      <a:tailEnd type="none" w="med" len="med"/>
-                    </a:lnB>
-                    <a:solidFill>
-                      <a:srgbClr val="1E6B54"/>
-                    </a:solidFill>
-                  </a:tcPr>
-                </a:tc>
-                <a:tc>
-                  <a:txBody>
-                    <a:bodyPr/>
-                    <a:lstStyle/>
-                    <a:p>
-                      <a:pPr algn="ctr" indent="0" marL="0">
-                        <a:buNone/>
-                      </a:pPr>
-                      <a:r>
-                        <a:rPr lang="en-US" sz="1150" dirty="0">
-                          <a:solidFill>
-                            <a:srgbClr val="9DBDB0"/>
-                          </a:solidFill>
-                          <a:latin typeface="Space Grotesk" pitchFamily="34" charset="0"/>
-                          <a:ea typeface="Space Grotesk" pitchFamily="34" charset="-122"/>
-                          <a:cs typeface="Space Grotesk" pitchFamily="34" charset="-120"/>
-                        </a:rPr>
-                        <a:t>0.32</a:t>
-                      </a:r>
-                      <a:endParaRPr lang="en-US" sz="1150" dirty="0">
-                        <a:latin typeface="Space Grotesk" charset="0"/>
-                        <a:ea typeface="Space Grotesk" charset="0"/>
-                        <a:cs typeface="Space Grotesk" charset="0"/>
-                      </a:endParaRPr>
-                    </a:p>
-                  </a:txBody>
-                  <a:tcPr marL="91440" marR="91440" marT="45720" marB="45720" anchor="ctr">
-                    <a:lnL w="12700" cap="flat" cmpd="sng" algn="ctr">
-                      <a:solidFill>
-                        <a:srgbClr val="1C5248"/>
-                      </a:solidFill>
-                      <a:prstDash val="solid"/>
-                      <a:round/>
-                      <a:headEnd type="none" w="med" len="med"/>
-                      <a:tailEnd type="none" w="med" len="med"/>
-                    </a:lnL>
-                    <a:lnR w="12700" cap="flat" cmpd="sng" algn="ctr">
-                      <a:solidFill>
-                        <a:srgbClr val="1C5248"/>
-                      </a:solidFill>
-                      <a:prstDash val="solid"/>
-                      <a:round/>
-                      <a:headEnd type="none" w="med" len="med"/>
-                      <a:tailEnd type="none" w="med" len="med"/>
-                    </a:lnR>
-                    <a:lnT w="12700" cap="flat" cmpd="sng" algn="ctr">
-                      <a:solidFill>
-                        <a:srgbClr val="1C5248"/>
-                      </a:solidFill>
-                      <a:prstDash val="solid"/>
-                      <a:round/>
-                      <a:headEnd type="none" w="med" len="med"/>
-                      <a:tailEnd type="none" w="med" len="med"/>
-                    </a:lnT>
-                    <a:lnB w="12700" cap="flat" cmpd="sng" algn="ctr">
-                      <a:solidFill>
-                        <a:srgbClr val="1C5248"/>
-                      </a:solidFill>
-                      <a:prstDash val="solid"/>
-                      <a:round/>
-                      <a:headEnd type="none" w="med" len="med"/>
-                      <a:tailEnd type="none" w="med" len="med"/>
-                    </a:lnB>
-                    <a:solidFill>
-                      <a:srgbClr val="0C3A33"/>
-                    </a:solidFill>
-                  </a:tcPr>
-                </a:tc>
-                <a:tc>
-                  <a:txBody>
-                    <a:bodyPr/>
-                    <a:lstStyle/>
-                    <a:p>
-                      <a:pPr algn="ctr" indent="0" marL="0">
-                        <a:buNone/>
-                      </a:pPr>
-                      <a:r>
-                        <a:rPr lang="en-US" sz="1150" dirty="0">
-                          <a:solidFill>
-                            <a:srgbClr val="9DBDB0"/>
-                          </a:solidFill>
-                          <a:latin typeface="Space Grotesk" pitchFamily="34" charset="0"/>
-                          <a:ea typeface="Space Grotesk" pitchFamily="34" charset="-122"/>
-                          <a:cs typeface="Space Grotesk" pitchFamily="34" charset="-120"/>
-                        </a:rPr>
-                        <a:t>0.55</a:t>
-                      </a:r>
-                      <a:endParaRPr lang="en-US" sz="1150" dirty="0">
-                        <a:latin typeface="Space Grotesk" charset="0"/>
-                        <a:ea typeface="Space Grotesk" charset="0"/>
-                        <a:cs typeface="Space Grotesk" charset="0"/>
-                      </a:endParaRPr>
-                    </a:p>
-                  </a:txBody>
-                  <a:tcPr marL="91440" marR="91440" marT="45720" marB="45720" anchor="ctr">
-                    <a:lnL w="12700" cap="flat" cmpd="sng" algn="ctr">
-                      <a:solidFill>
-                        <a:srgbClr val="1C5248"/>
-                      </a:solidFill>
-                      <a:prstDash val="solid"/>
-                      <a:round/>
-                      <a:headEnd type="none" w="med" len="med"/>
-                      <a:tailEnd type="none" w="med" len="med"/>
-                    </a:lnL>
-                    <a:lnR w="12700" cap="flat" cmpd="sng" algn="ctr">
-                      <a:solidFill>
-                        <a:srgbClr val="1C5248"/>
-                      </a:solidFill>
-                      <a:prstDash val="solid"/>
-                      <a:round/>
-                      <a:headEnd type="none" w="med" len="med"/>
-                      <a:tailEnd type="none" w="med" len="med"/>
-                    </a:lnR>
-                    <a:lnT w="12700" cap="flat" cmpd="sng" algn="ctr">
-                      <a:solidFill>
-                        <a:srgbClr val="1C5248"/>
-                      </a:solidFill>
-                      <a:prstDash val="solid"/>
-                      <a:round/>
-                      <a:headEnd type="none" w="med" len="med"/>
-                      <a:tailEnd type="none" w="med" len="med"/>
-                    </a:lnT>
-                    <a:lnB w="12700" cap="flat" cmpd="sng" algn="ctr">
-                      <a:solidFill>
-                        <a:srgbClr val="1C5248"/>
-                      </a:solidFill>
-                      <a:prstDash val="solid"/>
-                      <a:round/>
-                      <a:headEnd type="none" w="med" len="med"/>
-                      <a:tailEnd type="none" w="med" len="med"/>
-                    </a:lnB>
-                    <a:solidFill>
-                      <a:srgbClr val="0C3A33"/>
-                    </a:solidFill>
-                  </a:tcPr>
-                </a:tc>
-                <a:tc>
-                  <a:txBody>
-                    <a:bodyPr/>
-                    <a:lstStyle/>
-                    <a:p>
-                      <a:pPr algn="ctr" indent="0" marL="0">
-                        <a:buNone/>
-                      </a:pPr>
-                      <a:r>
-                        <a:rPr lang="en-US" sz="1150" b="1" dirty="0">
-                          <a:solidFill>
-                            <a:srgbClr val="FFFFFF"/>
-                          </a:solidFill>
-                          <a:latin typeface="Space Grotesk" pitchFamily="34" charset="0"/>
-                          <a:ea typeface="Space Grotesk" pitchFamily="34" charset="-122"/>
-                          <a:cs typeface="Space Grotesk" pitchFamily="34" charset="-120"/>
-                        </a:rPr>
-                        <a:t>0.41</a:t>
-                      </a:r>
-                      <a:endParaRPr lang="en-US" sz="1150" dirty="0">
-                        <a:latin typeface="Space Grotesk" charset="0"/>
-                        <a:ea typeface="Space Grotesk" charset="0"/>
-                        <a:cs typeface="Space Grotesk" charset="0"/>
-                      </a:endParaRPr>
-                    </a:p>
-                  </a:txBody>
-                  <a:tcPr marL="91440" marR="91440" marT="45720" marB="45720" anchor="ctr">
-                    <a:lnL w="12700" cap="flat" cmpd="sng" algn="ctr">
-                      <a:solidFill>
-                        <a:srgbClr val="1C5248"/>
-                      </a:solidFill>
-                      <a:prstDash val="solid"/>
-                      <a:round/>
-                      <a:headEnd type="none" w="med" len="med"/>
-                      <a:tailEnd type="none" w="med" len="med"/>
-                    </a:lnL>
-                    <a:lnR w="12700" cap="flat" cmpd="sng" algn="ctr">
-                      <a:solidFill>
-                        <a:srgbClr val="1C5248"/>
-                      </a:solidFill>
-                      <a:prstDash val="solid"/>
-                      <a:round/>
-                      <a:headEnd type="none" w="med" len="med"/>
-                      <a:tailEnd type="none" w="med" len="med"/>
-                    </a:lnR>
-                    <a:lnT w="12700" cap="flat" cmpd="sng" algn="ctr">
-                      <a:solidFill>
-                        <a:srgbClr val="1C5248"/>
-                      </a:solidFill>
-                      <a:prstDash val="solid"/>
-                      <a:round/>
-                      <a:headEnd type="none" w="med" len="med"/>
-                      <a:tailEnd type="none" w="med" len="med"/>
-                    </a:lnT>
-                    <a:lnB w="12700" cap="flat" cmpd="sng" algn="ctr">
-                      <a:solidFill>
-                        <a:srgbClr val="1C5248"/>
-                      </a:solidFill>
-                      <a:prstDash val="solid"/>
-                      <a:round/>
-                      <a:headEnd type="none" w="med" len="med"/>
-                      <a:tailEnd type="none" w="med" len="med"/>
-                    </a:lnB>
-                    <a:solidFill>
-                      <a:srgbClr val="17564A"/>
-                    </a:solidFill>
-                  </a:tcPr>
-                </a:tc>
-                <a:tc>
-                  <a:txBody>
-                    <a:bodyPr/>
-                    <a:lstStyle/>
-                    <a:p>
-                      <a:pPr algn="ctr" indent="0" marL="0">
-                        <a:buNone/>
-                      </a:pPr>
-                      <a:r>
-                        <a:rPr lang="en-US" sz="1150" dirty="0">
-                          <a:solidFill>
-                            <a:srgbClr val="9DBDB0"/>
-                          </a:solidFill>
-                          <a:latin typeface="Space Grotesk" pitchFamily="34" charset="0"/>
-                          <a:ea typeface="Space Grotesk" pitchFamily="34" charset="-122"/>
-                          <a:cs typeface="Space Grotesk" pitchFamily="34" charset="-120"/>
-                        </a:rPr>
-                        <a:t>0.30</a:t>
-                      </a:r>
-                      <a:endParaRPr lang="en-US" sz="1150" dirty="0">
-                        <a:latin typeface="Space Grotesk" charset="0"/>
-                        <a:ea typeface="Space Grotesk" charset="0"/>
-                        <a:cs typeface="Space Grotesk" charset="0"/>
-                      </a:endParaRPr>
-                    </a:p>
-                  </a:txBody>
-                  <a:tcPr marL="91440" marR="91440" marT="45720" marB="45720" anchor="ctr">
-                    <a:lnL w="12700" cap="flat" cmpd="sng" algn="ctr">
-                      <a:solidFill>
-                        <a:srgbClr val="1C5248"/>
-                      </a:solidFill>
-                      <a:prstDash val="solid"/>
-                      <a:round/>
-                      <a:headEnd type="none" w="med" len="med"/>
-                      <a:tailEnd type="none" w="med" len="med"/>
-                    </a:lnL>
-                    <a:lnR w="12700" cap="flat" cmpd="sng" algn="ctr">
-                      <a:solidFill>
-                        <a:srgbClr val="1C5248"/>
-                      </a:solidFill>
-                      <a:prstDash val="solid"/>
-                      <a:round/>
-                      <a:headEnd type="none" w="med" len="med"/>
-                      <a:tailEnd type="none" w="med" len="med"/>
-                    </a:lnR>
-                    <a:lnT w="12700" cap="flat" cmpd="sng" algn="ctr">
-                      <a:solidFill>
-                        <a:srgbClr val="1C5248"/>
-                      </a:solidFill>
-                      <a:prstDash val="solid"/>
-                      <a:round/>
-                      <a:headEnd type="none" w="med" len="med"/>
-                      <a:tailEnd type="none" w="med" len="med"/>
-                    </a:lnT>
-                    <a:lnB w="12700" cap="flat" cmpd="sng" algn="ctr">
-                      <a:solidFill>
-                        <a:srgbClr val="1C5248"/>
-                      </a:solidFill>
-                      <a:prstDash val="solid"/>
-                      <a:round/>
-                      <a:headEnd type="none" w="med" len="med"/>
-                      <a:tailEnd type="none" w="med" len="med"/>
-                    </a:lnB>
-                    <a:solidFill>
-                      <a:srgbClr val="0C3A33"/>
-                    </a:solidFill>
-                  </a:tcPr>
-                </a:tc>
-                <a:tc>
-                  <a:txBody>
-                    <a:bodyPr/>
-                    <a:lstStyle/>
-                    <a:p>
-                      <a:pPr algn="ctr" indent="0" marL="0">
-                        <a:buNone/>
-                      </a:pPr>
-                      <a:r>
-                        <a:rPr lang="en-US" sz="1150" dirty="0">
-                          <a:solidFill>
-                            <a:srgbClr val="9DBDB0"/>
-                          </a:solidFill>
-                          <a:latin typeface="Space Grotesk" pitchFamily="34" charset="0"/>
-                          <a:ea typeface="Space Grotesk" pitchFamily="34" charset="-122"/>
-                          <a:cs typeface="Space Grotesk" pitchFamily="34" charset="-120"/>
-                        </a:rPr>
-                        <a:t>0.40</a:t>
-                      </a:r>
-                      <a:endParaRPr lang="en-US" sz="1150" dirty="0">
-                        <a:latin typeface="Space Grotesk" charset="0"/>
-                        <a:ea typeface="Space Grotesk" charset="0"/>
-                        <a:cs typeface="Space Grotesk" charset="0"/>
-                      </a:endParaRPr>
-                    </a:p>
-                  </a:txBody>
-                  <a:tcPr marL="91440" marR="91440" marT="45720" marB="45720" anchor="ctr">
-                    <a:lnL w="12700" cap="flat" cmpd="sng" algn="ctr">
-                      <a:solidFill>
-                        <a:srgbClr val="1C5248"/>
-                      </a:solidFill>
-                      <a:prstDash val="solid"/>
-                      <a:round/>
-                      <a:headEnd type="none" w="med" len="med"/>
-                      <a:tailEnd type="none" w="med" len="med"/>
-                    </a:lnL>
-                    <a:lnR w="12700" cap="flat" cmpd="sng" algn="ctr">
-                      <a:solidFill>
-                        <a:srgbClr val="1C5248"/>
-                      </a:solidFill>
-                      <a:prstDash val="solid"/>
-                      <a:round/>
-                      <a:headEnd type="none" w="med" len="med"/>
-                      <a:tailEnd type="none" w="med" len="med"/>
-                    </a:lnR>
-                    <a:lnT w="12700" cap="flat" cmpd="sng" algn="ctr">
-                      <a:solidFill>
-                        <a:srgbClr val="1C5248"/>
-                      </a:solidFill>
-                      <a:prstDash val="solid"/>
-                      <a:round/>
-                      <a:headEnd type="none" w="med" len="med"/>
-                      <a:tailEnd type="none" w="med" len="med"/>
-                    </a:lnT>
-                    <a:lnB w="12700" cap="flat" cmpd="sng" algn="ctr">
-                      <a:solidFill>
-                        <a:srgbClr val="1C5248"/>
-                      </a:solidFill>
-                      <a:prstDash val="solid"/>
-                      <a:round/>
-                      <a:headEnd type="none" w="med" len="med"/>
-                      <a:tailEnd type="none" w="med" len="med"/>
-                    </a:lnB>
-                    <a:solidFill>
-                      <a:srgbClr val="0C3A33"/>
-                    </a:solidFill>
-                  </a:tcPr>
-                </a:tc>
-                <a:tc>
-                  <a:txBody>
-                    <a:bodyPr/>
-                    <a:lstStyle/>
-                    <a:p>
-                      <a:pPr algn="ctr" indent="0" marL="0">
-                        <a:buNone/>
-                      </a:pPr>
-                      <a:r>
-                        <a:rPr lang="en-US" sz="1150" b="1" dirty="0">
-                          <a:solidFill>
-                            <a:srgbClr val="FFFFFF"/>
-                          </a:solidFill>
-                          <a:latin typeface="Space Grotesk" pitchFamily="34" charset="0"/>
-                          <a:ea typeface="Space Grotesk" pitchFamily="34" charset="-122"/>
-                          <a:cs typeface="Space Grotesk" pitchFamily="34" charset="-120"/>
-                        </a:rPr>
-                        <a:t>0.34</a:t>
-                      </a:r>
-                      <a:endParaRPr lang="en-US" sz="1150" dirty="0">
-                        <a:latin typeface="Space Grotesk" charset="0"/>
-                        <a:ea typeface="Space Grotesk" charset="0"/>
-                        <a:cs typeface="Space Grotesk" charset="0"/>
-                      </a:endParaRPr>
-                    </a:p>
-                  </a:txBody>
-                  <a:tcPr marL="91440" marR="91440" marT="45720" marB="45720" anchor="ctr">
-                    <a:lnL w="12700" cap="flat" cmpd="sng" algn="ctr">
-                      <a:solidFill>
-                        <a:srgbClr val="1C5248"/>
-                      </a:solidFill>
-                      <a:prstDash val="solid"/>
-                      <a:round/>
-                      <a:headEnd type="none" w="med" len="med"/>
-                      <a:tailEnd type="none" w="med" len="med"/>
-                    </a:lnL>
-                    <a:lnR w="12700" cap="flat" cmpd="sng" algn="ctr">
-                      <a:solidFill>
-                        <a:srgbClr val="1C5248"/>
-                      </a:solidFill>
-                      <a:prstDash val="solid"/>
-                      <a:round/>
-                      <a:headEnd type="none" w="med" len="med"/>
-                      <a:tailEnd type="none" w="med" len="med"/>
-                    </a:lnR>
-                    <a:lnT w="12700" cap="flat" cmpd="sng" algn="ctr">
-                      <a:solidFill>
-                        <a:srgbClr val="1C5248"/>
-                      </a:solidFill>
-                      <a:prstDash val="solid"/>
-                      <a:round/>
-                      <a:headEnd type="none" w="med" len="med"/>
-                      <a:tailEnd type="none" w="med" len="med"/>
-                    </a:lnT>
-                    <a:lnB w="12700" cap="flat" cmpd="sng" algn="ctr">
-                      <a:solidFill>
-                        <a:srgbClr val="1C5248"/>
-                      </a:solidFill>
-                      <a:prstDash val="solid"/>
-                      <a:round/>
-                      <a:headEnd type="none" w="med" len="med"/>
-                      <a:tailEnd type="none" w="med" len="med"/>
-                    </a:lnB>
-                    <a:solidFill>
-                      <a:srgbClr val="17564A"/>
-                    </a:solidFill>
-                  </a:tcPr>
-                </a:tc>
-              </a:tr>
-              <a:tr h="548640">
-                <a:tc>
-                  <a:txBody>
-                    <a:bodyPr/>
-                    <a:lstStyle/>
-                    <a:p>
-                      <a:pPr algn="l" indent="0" marL="0">
-                        <a:buNone/>
-                      </a:pPr>
-                      <a:r>
-                        <a:rPr lang="en-US" sz="1200" b="1" dirty="0">
-                          <a:solidFill>
-                            <a:srgbClr val="FFFFFF"/>
-                          </a:solidFill>
-                          <a:latin typeface="Space Grotesk" pitchFamily="34" charset="0"/>
-                          <a:ea typeface="Space Grotesk" pitchFamily="34" charset="-122"/>
-                          <a:cs typeface="Space Grotesk" pitchFamily="34" charset="-120"/>
-                        </a:rPr>
-                        <a:t>Mixed</a:t>
-                      </a:r>
-                      <a:endParaRPr lang="en-US" sz="1200" dirty="0">
-                        <a:latin typeface="Space Grotesk" charset="0"/>
-                        <a:ea typeface="Space Grotesk" charset="0"/>
-                        <a:cs typeface="Space Grotesk" charset="0"/>
-                      </a:endParaRPr>
-                    </a:p>
-                  </a:txBody>
-                  <a:tcPr marL="91440" marR="91440" marT="45720" marB="45720" anchor="ctr">
-                    <a:lnL w="12700" cap="flat" cmpd="sng" algn="ctr">
-                      <a:solidFill>
-                        <a:srgbClr val="1C5248"/>
-                      </a:solidFill>
-                      <a:prstDash val="solid"/>
-                      <a:round/>
-                      <a:headEnd type="none" w="med" len="med"/>
-                      <a:tailEnd type="none" w="med" len="med"/>
-                    </a:lnL>
-                    <a:lnR w="12700" cap="flat" cmpd="sng" algn="ctr">
-                      <a:solidFill>
-                        <a:srgbClr val="1C5248"/>
-                      </a:solidFill>
-                      <a:prstDash val="solid"/>
-                      <a:round/>
-                      <a:headEnd type="none" w="med" len="med"/>
-                      <a:tailEnd type="none" w="med" len="med"/>
-                    </a:lnR>
-                    <a:lnT w="12700" cap="flat" cmpd="sng" algn="ctr">
-                      <a:solidFill>
-                        <a:srgbClr val="1C5248"/>
-                      </a:solidFill>
-                      <a:prstDash val="solid"/>
-                      <a:round/>
-                      <a:headEnd type="none" w="med" len="med"/>
-                      <a:tailEnd type="none" w="med" len="med"/>
-                    </a:lnT>
-                    <a:lnB w="12700" cap="flat" cmpd="sng" algn="ctr">
-                      <a:solidFill>
-                        <a:srgbClr val="1C5248"/>
-                      </a:solidFill>
-                      <a:prstDash val="solid"/>
-                      <a:round/>
-                      <a:headEnd type="none" w="med" len="med"/>
-                      <a:tailEnd type="none" w="med" len="med"/>
-                    </a:lnB>
-                    <a:solidFill>
-                      <a:srgbClr val="123F38"/>
-                    </a:solidFill>
-                  </a:tcPr>
-                </a:tc>
-                <a:tc>
-                  <a:txBody>
-                    <a:bodyPr/>
-                    <a:lstStyle/>
-                    <a:p>
-                      <a:pPr algn="ctr" indent="0" marL="0">
-                        <a:buNone/>
-                      </a:pPr>
-                      <a:r>
-                        <a:rPr lang="en-US" sz="1150" dirty="0">
-                          <a:solidFill>
-                            <a:srgbClr val="9DBDB0"/>
-                          </a:solidFill>
-                          <a:latin typeface="Space Grotesk" pitchFamily="34" charset="0"/>
-                          <a:ea typeface="Space Grotesk" pitchFamily="34" charset="-122"/>
-                          <a:cs typeface="Space Grotesk" pitchFamily="34" charset="-120"/>
-                        </a:rPr>
-                        <a:t>0.31</a:t>
-                      </a:r>
-                      <a:endParaRPr lang="en-US" sz="1150" dirty="0">
-                        <a:latin typeface="Space Grotesk" charset="0"/>
-                        <a:ea typeface="Space Grotesk" charset="0"/>
-                        <a:cs typeface="Space Grotesk" charset="0"/>
-                      </a:endParaRPr>
-                    </a:p>
-                  </a:txBody>
-                  <a:tcPr marL="91440" marR="91440" marT="45720" marB="45720" anchor="ctr">
-                    <a:lnL w="12700" cap="flat" cmpd="sng" algn="ctr">
-                      <a:solidFill>
-                        <a:srgbClr val="1C5248"/>
-                      </a:solidFill>
-                      <a:prstDash val="solid"/>
-                      <a:round/>
-                      <a:headEnd type="none" w="med" len="med"/>
-                      <a:tailEnd type="none" w="med" len="med"/>
-                    </a:lnL>
-                    <a:lnR w="12700" cap="flat" cmpd="sng" algn="ctr">
-                      <a:solidFill>
-                        <a:srgbClr val="1C5248"/>
-                      </a:solidFill>
-                      <a:prstDash val="solid"/>
-                      <a:round/>
-                      <a:headEnd type="none" w="med" len="med"/>
-                      <a:tailEnd type="none" w="med" len="med"/>
-                    </a:lnR>
-                    <a:lnT w="12700" cap="flat" cmpd="sng" algn="ctr">
-                      <a:solidFill>
-                        <a:srgbClr val="1C5248"/>
-                      </a:solidFill>
-                      <a:prstDash val="solid"/>
-                      <a:round/>
-                      <a:headEnd type="none" w="med" len="med"/>
-                      <a:tailEnd type="none" w="med" len="med"/>
-                    </a:lnT>
-                    <a:lnB w="12700" cap="flat" cmpd="sng" algn="ctr">
-                      <a:solidFill>
-                        <a:srgbClr val="1C5248"/>
-                      </a:solidFill>
-                      <a:prstDash val="solid"/>
-                      <a:round/>
-                      <a:headEnd type="none" w="med" len="med"/>
-                      <a:tailEnd type="none" w="med" len="med"/>
-                    </a:lnB>
-                    <a:solidFill>
-                      <a:srgbClr val="123F38"/>
-                    </a:solidFill>
-                  </a:tcPr>
-                </a:tc>
-                <a:tc>
-                  <a:txBody>
-                    <a:bodyPr/>
-                    <a:lstStyle/>
-                    <a:p>
-                      <a:pPr algn="ctr" indent="0" marL="0">
-                        <a:buNone/>
-                      </a:pPr>
-                      <a:r>
-                        <a:rPr lang="en-US" sz="1150" dirty="0">
-                          <a:solidFill>
-                            <a:srgbClr val="9DBDB0"/>
-                          </a:solidFill>
-                          <a:latin typeface="Space Grotesk" pitchFamily="34" charset="0"/>
-                          <a:ea typeface="Space Grotesk" pitchFamily="34" charset="-122"/>
-                          <a:cs typeface="Space Grotesk" pitchFamily="34" charset="-120"/>
-                        </a:rPr>
-                        <a:t>0.36</a:t>
-                      </a:r>
-                      <a:endParaRPr lang="en-US" sz="1150" dirty="0">
-                        <a:latin typeface="Space Grotesk" charset="0"/>
-                        <a:ea typeface="Space Grotesk" charset="0"/>
-                        <a:cs typeface="Space Grotesk" charset="0"/>
-                      </a:endParaRPr>
-                    </a:p>
-                  </a:txBody>
-                  <a:tcPr marL="91440" marR="91440" marT="45720" marB="45720" anchor="ctr">
-                    <a:lnL w="12700" cap="flat" cmpd="sng" algn="ctr">
-                      <a:solidFill>
-                        <a:srgbClr val="1C5248"/>
-                      </a:solidFill>
-                      <a:prstDash val="solid"/>
-                      <a:round/>
-                      <a:headEnd type="none" w="med" len="med"/>
-                      <a:tailEnd type="none" w="med" len="med"/>
-                    </a:lnL>
-                    <a:lnR w="12700" cap="flat" cmpd="sng" algn="ctr">
-                      <a:solidFill>
-                        <a:srgbClr val="1C5248"/>
-                      </a:solidFill>
-                      <a:prstDash val="solid"/>
-                      <a:round/>
-                      <a:headEnd type="none" w="med" len="med"/>
-                      <a:tailEnd type="none" w="med" len="med"/>
-                    </a:lnR>
-                    <a:lnT w="12700" cap="flat" cmpd="sng" algn="ctr">
-                      <a:solidFill>
-                        <a:srgbClr val="1C5248"/>
-                      </a:solidFill>
-                      <a:prstDash val="solid"/>
-                      <a:round/>
-                      <a:headEnd type="none" w="med" len="med"/>
-                      <a:tailEnd type="none" w="med" len="med"/>
-                    </a:lnT>
-                    <a:lnB w="12700" cap="flat" cmpd="sng" algn="ctr">
-                      <a:solidFill>
-                        <a:srgbClr val="1C5248"/>
-                      </a:solidFill>
-                      <a:prstDash val="solid"/>
-                      <a:round/>
-                      <a:headEnd type="none" w="med" len="med"/>
-                      <a:tailEnd type="none" w="med" len="med"/>
-                    </a:lnB>
-                    <a:solidFill>
-                      <a:srgbClr val="123F38"/>
-                    </a:solidFill>
-                  </a:tcPr>
-                </a:tc>
-                <a:tc>
-                  <a:txBody>
-                    <a:bodyPr/>
-                    <a:lstStyle/>
-                    <a:p>
-                      <a:pPr algn="ctr" indent="0" marL="0">
-                        <a:buNone/>
-                      </a:pPr>
-                      <a:r>
-                        <a:rPr lang="en-US" sz="1150" b="1" dirty="0">
-                          <a:solidFill>
-                            <a:srgbClr val="CDFCE3"/>
-                          </a:solidFill>
-                          <a:latin typeface="Space Grotesk" pitchFamily="34" charset="0"/>
-                          <a:ea typeface="Space Grotesk" pitchFamily="34" charset="-122"/>
-                          <a:cs typeface="Space Grotesk" pitchFamily="34" charset="-120"/>
-                        </a:rPr>
-                        <a:t>0.34</a:t>
-                      </a:r>
-                      <a:endParaRPr lang="en-US" sz="1150" dirty="0">
-                        <a:latin typeface="Space Grotesk" charset="0"/>
-                        <a:ea typeface="Space Grotesk" charset="0"/>
-                        <a:cs typeface="Space Grotesk" charset="0"/>
-                      </a:endParaRPr>
-                    </a:p>
-                  </a:txBody>
-                  <a:tcPr marL="91440" marR="91440" marT="45720" marB="45720" anchor="ctr">
-                    <a:lnL w="12700" cap="flat" cmpd="sng" algn="ctr">
-                      <a:solidFill>
-                        <a:srgbClr val="1C5248"/>
-                      </a:solidFill>
-                      <a:prstDash val="solid"/>
-                      <a:round/>
-                      <a:headEnd type="none" w="med" len="med"/>
-                      <a:tailEnd type="none" w="med" len="med"/>
-                    </a:lnL>
-                    <a:lnR w="12700" cap="flat" cmpd="sng" algn="ctr">
-                      <a:solidFill>
-                        <a:srgbClr val="1C5248"/>
-                      </a:solidFill>
-                      <a:prstDash val="solid"/>
-                      <a:round/>
-                      <a:headEnd type="none" w="med" len="med"/>
-                      <a:tailEnd type="none" w="med" len="med"/>
-                    </a:lnR>
-                    <a:lnT w="12700" cap="flat" cmpd="sng" algn="ctr">
-                      <a:solidFill>
-                        <a:srgbClr val="1C5248"/>
-                      </a:solidFill>
-                      <a:prstDash val="solid"/>
-                      <a:round/>
-                      <a:headEnd type="none" w="med" len="med"/>
-                      <a:tailEnd type="none" w="med" len="med"/>
-                    </a:lnT>
-                    <a:lnB w="12700" cap="flat" cmpd="sng" algn="ctr">
-                      <a:solidFill>
-                        <a:srgbClr val="1C5248"/>
-                      </a:solidFill>
-                      <a:prstDash val="solid"/>
-                      <a:round/>
-                      <a:headEnd type="none" w="med" len="med"/>
-                      <a:tailEnd type="none" w="med" len="med"/>
-                    </a:lnB>
-                    <a:solidFill>
-                      <a:srgbClr val="1E6B54"/>
-                    </a:solidFill>
-                  </a:tcPr>
-                </a:tc>
-                <a:tc>
-                  <a:txBody>
-                    <a:bodyPr/>
-                    <a:lstStyle/>
-                    <a:p>
-                      <a:pPr algn="ctr" indent="0" marL="0">
-                        <a:buNone/>
-                      </a:pPr>
-                      <a:r>
-                        <a:rPr lang="en-US" sz="1150" dirty="0">
-                          <a:solidFill>
-                            <a:srgbClr val="9DBDB0"/>
-                          </a:solidFill>
-                          <a:latin typeface="Space Grotesk" pitchFamily="34" charset="0"/>
-                          <a:ea typeface="Space Grotesk" pitchFamily="34" charset="-122"/>
-                          <a:cs typeface="Space Grotesk" pitchFamily="34" charset="-120"/>
-                        </a:rPr>
-                        <a:t>0.35</a:t>
-                      </a:r>
-                      <a:endParaRPr lang="en-US" sz="1150" dirty="0">
-                        <a:latin typeface="Space Grotesk" charset="0"/>
-                        <a:ea typeface="Space Grotesk" charset="0"/>
-                        <a:cs typeface="Space Grotesk" charset="0"/>
-                      </a:endParaRPr>
-                    </a:p>
-                  </a:txBody>
-                  <a:tcPr marL="91440" marR="91440" marT="45720" marB="45720" anchor="ctr">
-                    <a:lnL w="12700" cap="flat" cmpd="sng" algn="ctr">
-                      <a:solidFill>
-                        <a:srgbClr val="1C5248"/>
-                      </a:solidFill>
-                      <a:prstDash val="solid"/>
-                      <a:round/>
-                      <a:headEnd type="none" w="med" len="med"/>
-                      <a:tailEnd type="none" w="med" len="med"/>
-                    </a:lnL>
-                    <a:lnR w="12700" cap="flat" cmpd="sng" algn="ctr">
-                      <a:solidFill>
-                        <a:srgbClr val="1C5248"/>
-                      </a:solidFill>
-                      <a:prstDash val="solid"/>
-                      <a:round/>
-                      <a:headEnd type="none" w="med" len="med"/>
-                      <a:tailEnd type="none" w="med" len="med"/>
-                    </a:lnR>
-                    <a:lnT w="12700" cap="flat" cmpd="sng" algn="ctr">
-                      <a:solidFill>
-                        <a:srgbClr val="1C5248"/>
-                      </a:solidFill>
-                      <a:prstDash val="solid"/>
-                      <a:round/>
-                      <a:headEnd type="none" w="med" len="med"/>
-                      <a:tailEnd type="none" w="med" len="med"/>
-                    </a:lnT>
-                    <a:lnB w="12700" cap="flat" cmpd="sng" algn="ctr">
-                      <a:solidFill>
-                        <a:srgbClr val="1C5248"/>
-                      </a:solidFill>
-                      <a:prstDash val="solid"/>
-                      <a:round/>
-                      <a:headEnd type="none" w="med" len="med"/>
-                      <a:tailEnd type="none" w="med" len="med"/>
-                    </a:lnB>
-                    <a:solidFill>
-                      <a:srgbClr val="123F38"/>
-                    </a:solidFill>
-                  </a:tcPr>
-                </a:tc>
-                <a:tc>
-                  <a:txBody>
-                    <a:bodyPr/>
-                    <a:lstStyle/>
-                    <a:p>
-                      <a:pPr algn="ctr" indent="0" marL="0">
-                        <a:buNone/>
-                      </a:pPr>
-                      <a:r>
-                        <a:rPr lang="en-US" sz="1150" dirty="0">
-                          <a:solidFill>
-                            <a:srgbClr val="9DBDB0"/>
-                          </a:solidFill>
-                          <a:latin typeface="Space Grotesk" pitchFamily="34" charset="0"/>
-                          <a:ea typeface="Space Grotesk" pitchFamily="34" charset="-122"/>
-                          <a:cs typeface="Space Grotesk" pitchFamily="34" charset="-120"/>
-                        </a:rPr>
-                        <a:t>0.28</a:t>
-                      </a:r>
-                      <a:endParaRPr lang="en-US" sz="1150" dirty="0">
-                        <a:latin typeface="Space Grotesk" charset="0"/>
-                        <a:ea typeface="Space Grotesk" charset="0"/>
-                        <a:cs typeface="Space Grotesk" charset="0"/>
-                      </a:endParaRPr>
-                    </a:p>
-                  </a:txBody>
-                  <a:tcPr marL="91440" marR="91440" marT="45720" marB="45720" anchor="ctr">
-                    <a:lnL w="12700" cap="flat" cmpd="sng" algn="ctr">
-                      <a:solidFill>
-                        <a:srgbClr val="1C5248"/>
-                      </a:solidFill>
-                      <a:prstDash val="solid"/>
-                      <a:round/>
-                      <a:headEnd type="none" w="med" len="med"/>
-                      <a:tailEnd type="none" w="med" len="med"/>
-                    </a:lnL>
-                    <a:lnR w="12700" cap="flat" cmpd="sng" algn="ctr">
-                      <a:solidFill>
-                        <a:srgbClr val="1C5248"/>
-                      </a:solidFill>
-                      <a:prstDash val="solid"/>
-                      <a:round/>
-                      <a:headEnd type="none" w="med" len="med"/>
-                      <a:tailEnd type="none" w="med" len="med"/>
-                    </a:lnR>
-                    <a:lnT w="12700" cap="flat" cmpd="sng" algn="ctr">
-                      <a:solidFill>
-                        <a:srgbClr val="1C5248"/>
-                      </a:solidFill>
-                      <a:prstDash val="solid"/>
-                      <a:round/>
-                      <a:headEnd type="none" w="med" len="med"/>
-                      <a:tailEnd type="none" w="med" len="med"/>
-                    </a:lnT>
-                    <a:lnB w="12700" cap="flat" cmpd="sng" algn="ctr">
-                      <a:solidFill>
-                        <a:srgbClr val="1C5248"/>
-                      </a:solidFill>
-                      <a:prstDash val="solid"/>
-                      <a:round/>
-                      <a:headEnd type="none" w="med" len="med"/>
-                      <a:tailEnd type="none" w="med" len="med"/>
-                    </a:lnB>
-                    <a:solidFill>
-                      <a:srgbClr val="123F38"/>
-                    </a:solidFill>
-                  </a:tcPr>
-                </a:tc>
-                <a:tc>
-                  <a:txBody>
-                    <a:bodyPr/>
-                    <a:lstStyle/>
-                    <a:p>
-                      <a:pPr algn="ctr" indent="0" marL="0">
-                        <a:buNone/>
-                      </a:pPr>
-                      <a:r>
-                        <a:rPr lang="en-US" sz="1150" b="1" dirty="0">
-                          <a:solidFill>
-                            <a:srgbClr val="FFFFFF"/>
-                          </a:solidFill>
-                          <a:latin typeface="Space Grotesk" pitchFamily="34" charset="0"/>
-                          <a:ea typeface="Space Grotesk" pitchFamily="34" charset="-122"/>
-                          <a:cs typeface="Space Grotesk" pitchFamily="34" charset="-120"/>
-                        </a:rPr>
-                        <a:t>0.31</a:t>
-                      </a:r>
-                      <a:endParaRPr lang="en-US" sz="1150" dirty="0">
-                        <a:latin typeface="Space Grotesk" charset="0"/>
-                        <a:ea typeface="Space Grotesk" charset="0"/>
-                        <a:cs typeface="Space Grotesk" charset="0"/>
-                      </a:endParaRPr>
-                    </a:p>
-                  </a:txBody>
-                  <a:tcPr marL="91440" marR="91440" marT="45720" marB="45720" anchor="ctr">
-                    <a:lnL w="12700" cap="flat" cmpd="sng" algn="ctr">
-                      <a:solidFill>
-                        <a:srgbClr val="1C5248"/>
-                      </a:solidFill>
-                      <a:prstDash val="solid"/>
-                      <a:round/>
-                      <a:headEnd type="none" w="med" len="med"/>
-                      <a:tailEnd type="none" w="med" len="med"/>
-                    </a:lnL>
-                    <a:lnR w="12700" cap="flat" cmpd="sng" algn="ctr">
-                      <a:solidFill>
-                        <a:srgbClr val="1C5248"/>
-                      </a:solidFill>
-                      <a:prstDash val="solid"/>
-                      <a:round/>
-                      <a:headEnd type="none" w="med" len="med"/>
-                      <a:tailEnd type="none" w="med" len="med"/>
-                    </a:lnR>
-                    <a:lnT w="12700" cap="flat" cmpd="sng" algn="ctr">
-                      <a:solidFill>
-                        <a:srgbClr val="1C5248"/>
-                      </a:solidFill>
-                      <a:prstDash val="solid"/>
-                      <a:round/>
-                      <a:headEnd type="none" w="med" len="med"/>
-                      <a:tailEnd type="none" w="med" len="med"/>
-                    </a:lnT>
-                    <a:lnB w="12700" cap="flat" cmpd="sng" algn="ctr">
-                      <a:solidFill>
-                        <a:srgbClr val="1C5248"/>
-                      </a:solidFill>
-                      <a:prstDash val="solid"/>
-                      <a:round/>
-                      <a:headEnd type="none" w="med" len="med"/>
-                      <a:tailEnd type="none" w="med" len="med"/>
-                    </a:lnB>
-                    <a:solidFill>
-                      <a:srgbClr val="17564A"/>
-                    </a:solidFill>
-                  </a:tcPr>
-                </a:tc>
-                <a:tc>
-                  <a:txBody>
-                    <a:bodyPr/>
-                    <a:lstStyle/>
-                    <a:p>
-                      <a:pPr algn="ctr" indent="0" marL="0">
-                        <a:buNone/>
-                      </a:pPr>
-                      <a:r>
-                        <a:rPr lang="en-US" sz="1150" dirty="0">
-                          <a:solidFill>
-                            <a:srgbClr val="9DBDB0"/>
-                          </a:solidFill>
-                          <a:latin typeface="Space Grotesk" pitchFamily="34" charset="0"/>
-                          <a:ea typeface="Space Grotesk" pitchFamily="34" charset="-122"/>
-                          <a:cs typeface="Space Grotesk" pitchFamily="34" charset="-120"/>
-                        </a:rPr>
-                        <a:t>0.38</a:t>
-                      </a:r>
-                      <a:endParaRPr lang="en-US" sz="1150" dirty="0">
-                        <a:latin typeface="Space Grotesk" charset="0"/>
-                        <a:ea typeface="Space Grotesk" charset="0"/>
-                        <a:cs typeface="Space Grotesk" charset="0"/>
-                      </a:endParaRPr>
-                    </a:p>
-                  </a:txBody>
-                  <a:tcPr marL="91440" marR="91440" marT="45720" marB="45720" anchor="ctr">
-                    <a:lnL w="12700" cap="flat" cmpd="sng" algn="ctr">
-                      <a:solidFill>
-                        <a:srgbClr val="1C5248"/>
-                      </a:solidFill>
-                      <a:prstDash val="solid"/>
-                      <a:round/>
-                      <a:headEnd type="none" w="med" len="med"/>
-                      <a:tailEnd type="none" w="med" len="med"/>
-                    </a:lnL>
-                    <a:lnR w="12700" cap="flat" cmpd="sng" algn="ctr">
-                      <a:solidFill>
-                        <a:srgbClr val="1C5248"/>
-                      </a:solidFill>
-                      <a:prstDash val="solid"/>
-                      <a:round/>
-                      <a:headEnd type="none" w="med" len="med"/>
-                      <a:tailEnd type="none" w="med" len="med"/>
-                    </a:lnR>
-                    <a:lnT w="12700" cap="flat" cmpd="sng" algn="ctr">
-                      <a:solidFill>
-                        <a:srgbClr val="1C5248"/>
-                      </a:solidFill>
-                      <a:prstDash val="solid"/>
-                      <a:round/>
-                      <a:headEnd type="none" w="med" len="med"/>
-                      <a:tailEnd type="none" w="med" len="med"/>
-                    </a:lnT>
-                    <a:lnB w="12700" cap="flat" cmpd="sng" algn="ctr">
-                      <a:solidFill>
-                        <a:srgbClr val="1C5248"/>
-                      </a:solidFill>
-                      <a:prstDash val="solid"/>
-                      <a:round/>
-                      <a:headEnd type="none" w="med" len="med"/>
-                      <a:tailEnd type="none" w="med" len="med"/>
-                    </a:lnB>
-                    <a:solidFill>
-                      <a:srgbClr val="123F38"/>
-                    </a:solidFill>
-                  </a:tcPr>
-                </a:tc>
-                <a:tc>
-                  <a:txBody>
-                    <a:bodyPr/>
-                    <a:lstStyle/>
-                    <a:p>
-                      <a:pPr algn="ctr" indent="0" marL="0">
-                        <a:buNone/>
-                      </a:pPr>
-                      <a:r>
-                        <a:rPr lang="en-US" sz="1150" dirty="0">
-                          <a:solidFill>
-                            <a:srgbClr val="9DBDB0"/>
-                          </a:solidFill>
-                          <a:latin typeface="Space Grotesk" pitchFamily="34" charset="0"/>
-                          <a:ea typeface="Space Grotesk" pitchFamily="34" charset="-122"/>
-                          <a:cs typeface="Space Grotesk" pitchFamily="34" charset="-120"/>
-                        </a:rPr>
-                        <a:t>0.25</a:t>
-                      </a:r>
-                      <a:endParaRPr lang="en-US" sz="1150" dirty="0">
-                        <a:latin typeface="Space Grotesk" charset="0"/>
-                        <a:ea typeface="Space Grotesk" charset="0"/>
-                        <a:cs typeface="Space Grotesk" charset="0"/>
-                      </a:endParaRPr>
-                    </a:p>
-                  </a:txBody>
-                  <a:tcPr marL="91440" marR="91440" marT="45720" marB="45720" anchor="ctr">
-                    <a:lnL w="12700" cap="flat" cmpd="sng" algn="ctr">
-                      <a:solidFill>
-                        <a:srgbClr val="1C5248"/>
-                      </a:solidFill>
-                      <a:prstDash val="solid"/>
-                      <a:round/>
-                      <a:headEnd type="none" w="med" len="med"/>
-                      <a:tailEnd type="none" w="med" len="med"/>
-                    </a:lnL>
-                    <a:lnR w="12700" cap="flat" cmpd="sng" algn="ctr">
-                      <a:solidFill>
-                        <a:srgbClr val="1C5248"/>
-                      </a:solidFill>
-                      <a:prstDash val="solid"/>
-                      <a:round/>
-                      <a:headEnd type="none" w="med" len="med"/>
-                      <a:tailEnd type="none" w="med" len="med"/>
-                    </a:lnR>
-                    <a:lnT w="12700" cap="flat" cmpd="sng" algn="ctr">
-                      <a:solidFill>
-                        <a:srgbClr val="1C5248"/>
-                      </a:solidFill>
-                      <a:prstDash val="solid"/>
-                      <a:round/>
-                      <a:headEnd type="none" w="med" len="med"/>
-                      <a:tailEnd type="none" w="med" len="med"/>
-                    </a:lnT>
-                    <a:lnB w="12700" cap="flat" cmpd="sng" algn="ctr">
-                      <a:solidFill>
-                        <a:srgbClr val="1C5248"/>
-                      </a:solidFill>
-                      <a:prstDash val="solid"/>
-                      <a:round/>
-                      <a:headEnd type="none" w="med" len="med"/>
-                      <a:tailEnd type="none" w="med" len="med"/>
-                    </a:lnB>
-                    <a:solidFill>
-                      <a:srgbClr val="123F38"/>
-                    </a:solidFill>
-                  </a:tcPr>
-                </a:tc>
-                <a:tc>
-                  <a:txBody>
-                    <a:bodyPr/>
-                    <a:lstStyle/>
-                    <a:p>
-                      <a:pPr algn="ctr" indent="0" marL="0">
-                        <a:buNone/>
-                      </a:pPr>
-                      <a:r>
-                        <a:rPr lang="en-US" sz="1150" b="1" dirty="0">
-                          <a:solidFill>
-                            <a:srgbClr val="FFFFFF"/>
-                          </a:solidFill>
-                          <a:latin typeface="Space Grotesk" pitchFamily="34" charset="0"/>
-                          <a:ea typeface="Space Grotesk" pitchFamily="34" charset="-122"/>
-                          <a:cs typeface="Space Grotesk" pitchFamily="34" charset="-120"/>
-                        </a:rPr>
-                        <a:t>0.30</a:t>
-                      </a:r>
-                      <a:endParaRPr lang="en-US" sz="1150" dirty="0">
-                        <a:latin typeface="Space Grotesk" charset="0"/>
-                        <a:ea typeface="Space Grotesk" charset="0"/>
-                        <a:cs typeface="Space Grotesk" charset="0"/>
-                      </a:endParaRPr>
-                    </a:p>
-                  </a:txBody>
-                  <a:tcPr marL="91440" marR="91440" marT="45720" marB="45720" anchor="ctr">
-                    <a:lnL w="12700" cap="flat" cmpd="sng" algn="ctr">
-                      <a:solidFill>
-                        <a:srgbClr val="1C5248"/>
-                      </a:solidFill>
-                      <a:prstDash val="solid"/>
-                      <a:round/>
-                      <a:headEnd type="none" w="med" len="med"/>
-                      <a:tailEnd type="none" w="med" len="med"/>
-                    </a:lnL>
-                    <a:lnR w="12700" cap="flat" cmpd="sng" algn="ctr">
-                      <a:solidFill>
-                        <a:srgbClr val="1C5248"/>
-                      </a:solidFill>
-                      <a:prstDash val="solid"/>
-                      <a:round/>
-                      <a:headEnd type="none" w="med" len="med"/>
-                      <a:tailEnd type="none" w="med" len="med"/>
-                    </a:lnR>
-                    <a:lnT w="12700" cap="flat" cmpd="sng" algn="ctr">
-                      <a:solidFill>
-                        <a:srgbClr val="1C5248"/>
-                      </a:solidFill>
-                      <a:prstDash val="solid"/>
-                      <a:round/>
-                      <a:headEnd type="none" w="med" len="med"/>
-                      <a:tailEnd type="none" w="med" len="med"/>
-                    </a:lnT>
-                    <a:lnB w="12700" cap="flat" cmpd="sng" algn="ctr">
-                      <a:solidFill>
-                        <a:srgbClr val="1C5248"/>
-                      </a:solidFill>
-                      <a:prstDash val="solid"/>
-                      <a:round/>
-                      <a:headEnd type="none" w="med" len="med"/>
-                      <a:tailEnd type="none" w="med" len="med"/>
-                    </a:lnB>
-                    <a:solidFill>
-                      <a:srgbClr val="17564A"/>
                     </a:solidFill>
                   </a:tcPr>
                 </a:tc>
@@ -7746,8 +5960,8 @@
         </p:nvSpPr>
         <p:spPr>
           <a:xfrm>
-            <a:off x="640080" y="6172200"/>
-            <a:ext cx="11155680" cy="548640"/>
+            <a:off x="640080" y="6035040"/>
+            <a:ext cx="11155680" cy="640080"/>
           </a:xfrm>
           <a:prstGeom prst="rect">
             <a:avLst/>
@@ -7771,7 +5985,7 @@
                 <a:ea typeface="Space Grotesk" pitchFamily="34" charset="-122"/>
                 <a:cs typeface="Space Grotesk" pitchFamily="34" charset="-120"/>
               </a:rPr>
-              <a:t>User's = precision · Producer's = recall. NMD2023 wins overall, kappa, pine &amp; spruce; v8b wins deciduous &amp; mixed. Green = highest F1 per row.</a:t>
+              <a:t>Green = best F1 per row. Distilled wins spruce &amp; non-forest; the fraction layer wins pine &amp; deciduous. The fraction path cannot say non-forest (production: hard mask + fraction type).</a:t>
             </a:r>
             <a:endParaRPr lang="en-US" sz="1200" dirty="0"/>
           </a:p>
@@ -7895,7 +6109,7 @@
                 <a:ea typeface="Space Grotesk" pitchFamily="34" charset="-122"/>
                 <a:cs typeface="Space Grotesk" pitchFamily="34" charset="-120"/>
               </a:rPr>
-              <a:t>What does it mean?</a:t>
+              <a:t>Breaking the label ceiling</a:t>
             </a:r>
             <a:endParaRPr lang="en-US" sz="3600" dirty="0"/>
           </a:p>
@@ -7909,8 +6123,8 @@
         </p:nvSpPr>
         <p:spPr>
           <a:xfrm>
-            <a:off x="640080" y="1417320"/>
-            <a:ext cx="5486400" cy="365760"/>
+            <a:off x="640080" y="1371600"/>
+            <a:ext cx="5669280" cy="365760"/>
           </a:xfrm>
           <a:prstGeom prst="rect">
             <a:avLst/>
@@ -7926,7 +6140,7 @@
               <a:buNone/>
             </a:pPr>
             <a:r>
-              <a:rPr lang="en-US" sz="1500" b="1" dirty="0">
+              <a:rPr lang="en-US" sz="1400" b="1" dirty="0">
                 <a:solidFill>
                   <a:srgbClr val="CDFCE3"/>
                 </a:solidFill>
@@ -7934,9 +6148,9 @@
                 <a:ea typeface="Space Grotesk" pitchFamily="34" charset="-122"/>
                 <a:cs typeface="Space Grotesk" pitchFamily="34" charset="-120"/>
               </a:rPr>
-              <a:t>Model lineage — val mIoU</a:t>
-            </a:r>
-            <a:endParaRPr lang="en-US" sz="1500" dirty="0"/>
+              <a:t>NFI overall (944 plots) across the experiment series</a:t>
+            </a:r>
+            <a:endParaRPr lang="en-US" sz="1400" dirty="0"/>
           </a:p>
         </p:txBody>
       </p:sp>
@@ -7947,8 +6161,8 @@
           <p:nvPr/>
         </p:nvGraphicFramePr>
         <p:xfrm>
-          <a:off x="548640" y="1828800"/>
-          <a:ext cx="5486400" cy="4206240"/>
+          <a:off x="502920" y="1783080"/>
+          <a:ext cx="5760720" cy="4297680"/>
         </p:xfrm>
         <a:graphic xmlns:a="http://schemas.openxmlformats.org/drawingml/2006/main">
           <a:graphicData uri="http://schemas.openxmlformats.org/drawingml/2006/chart">
@@ -7964,8 +6178,8 @@
         </p:nvSpPr>
         <p:spPr>
           <a:xfrm>
-            <a:off x="6400800" y="1554480"/>
-            <a:ext cx="5120640" cy="1371600"/>
+            <a:off x="6492240" y="1554480"/>
+            <a:ext cx="5029200" cy="1371600"/>
           </a:xfrm>
           <a:prstGeom prst="roundRect">
             <a:avLst>
@@ -7986,8 +6200,8 @@
         </p:nvSpPr>
         <p:spPr>
           <a:xfrm>
-            <a:off x="6675120" y="1700784"/>
-            <a:ext cx="4617720" cy="411480"/>
+            <a:off x="6766560" y="1682496"/>
+            <a:ext cx="4526280" cy="411480"/>
           </a:xfrm>
           <a:prstGeom prst="rect">
             <a:avLst/>
@@ -8003,7 +6217,7 @@
               <a:buNone/>
             </a:pPr>
             <a:r>
-              <a:rPr lang="en-US" sz="1700" b="1" dirty="0">
+              <a:rPr lang="en-US" sz="1650" b="1" dirty="0">
                 <a:solidFill>
                   <a:srgbClr val="CDFCE3"/>
                 </a:solidFill>
@@ -8011,9 +6225,9 @@
                 <a:ea typeface="Space Grotesk" pitchFamily="34" charset="-122"/>
                 <a:cs typeface="Space Grotesk" pitchFamily="34" charset="-120"/>
               </a:rPr>
-              <a:t>Beats its own label source</a:t>
-            </a:r>
-            <a:endParaRPr lang="en-US" sz="1700" dirty="0"/>
+              <a:t>Hard labels = proxy ceiling</a:t>
+            </a:r>
+            <a:endParaRPr lang="en-US" sz="1650" dirty="0"/>
           </a:p>
         </p:txBody>
       </p:sp>
@@ -8025,8 +6239,8 @@
         </p:nvSpPr>
         <p:spPr>
           <a:xfrm>
-            <a:off x="6675120" y="2130552"/>
-            <a:ext cx="4617720" cy="749808"/>
+            <a:off x="6766560" y="2103120"/>
+            <a:ext cx="4526280" cy="777240"/>
           </a:xfrm>
           <a:prstGeom prst="rect">
             <a:avLst/>
@@ -8042,7 +6256,7 @@
               <a:buNone/>
             </a:pPr>
             <a:r>
-              <a:rPr lang="en-US" sz="1250" dirty="0">
+              <a:rPr lang="en-US" sz="1200" dirty="0">
                 <a:solidFill>
                   <a:srgbClr val="FFFFFF"/>
                 </a:solidFill>
@@ -8050,9 +6264,9 @@
                 <a:ea typeface="Space Grotesk" pitchFamily="34" charset="-122"/>
                 <a:cs typeface="Space Grotesk" pitchFamily="34" charset="-120"/>
               </a:rPr>
-              <a:t>v8b was trained on NMD2018 and still beats NMD2018 on F1, overall and kappa at the field points — multitemporal S2 + LiDAR aux denoises the per-pixel errors.</a:t>
-            </a:r>
-            <a:endParaRPr lang="en-US" sz="1250" dirty="0"/>
+              <a:t>Training against NMD classes capped at ~0.46 regardless of generation — the denoising effect scales with teacher noise, and NMD2023 is too clean to beat by imitation.</a:t>
+            </a:r>
+            <a:endParaRPr lang="en-US" sz="1200" dirty="0"/>
           </a:p>
         </p:txBody>
       </p:sp>
@@ -8064,8 +6278,8 @@
         </p:nvSpPr>
         <p:spPr>
           <a:xfrm>
-            <a:off x="6400800" y="3090672"/>
-            <a:ext cx="5120640" cy="1371600"/>
+            <a:off x="6492240" y="3090672"/>
+            <a:ext cx="5029200" cy="1371600"/>
           </a:xfrm>
           <a:prstGeom prst="roundRect">
             <a:avLst>
@@ -8086,8 +6300,8 @@
         </p:nvSpPr>
         <p:spPr>
           <a:xfrm>
-            <a:off x="6675120" y="3236976"/>
-            <a:ext cx="4617720" cy="411480"/>
+            <a:off x="6766560" y="3218688"/>
+            <a:ext cx="4526280" cy="411480"/>
           </a:xfrm>
           <a:prstGeom prst="rect">
             <a:avLst/>
@@ -8103,7 +6317,7 @@
               <a:buNone/>
             </a:pPr>
             <a:r>
-              <a:rPr lang="en-US" sz="1700" b="1" dirty="0">
+              <a:rPr lang="en-US" sz="1650" b="1" dirty="0">
                 <a:solidFill>
                   <a:srgbClr val="CDFCE3"/>
                 </a:solidFill>
@@ -8111,9 +6325,9 @@
                 <a:ea typeface="Space Grotesk" pitchFamily="34" charset="-122"/>
                 <a:cs typeface="Space Grotesk" pitchFamily="34" charset="-120"/>
               </a:rPr>
-              <a:t>Level with the new generation</a:t>
-            </a:r>
-            <a:endParaRPr lang="en-US" sz="1700" dirty="0"/>
+              <a:t>The field target broke it</a:t>
+            </a:r>
+            <a:endParaRPr lang="en-US" sz="1650" dirty="0"/>
           </a:p>
         </p:txBody>
       </p:sp>
@@ -8125,8 +6339,8 @@
         </p:nvSpPr>
         <p:spPr>
           <a:xfrm>
-            <a:off x="6675120" y="3666744"/>
-            <a:ext cx="4617720" cy="749808"/>
+            <a:off x="6766560" y="3639312"/>
+            <a:ext cx="4526280" cy="777240"/>
           </a:xfrm>
           <a:prstGeom prst="rect">
             <a:avLst/>
@@ -8142,7 +6356,7 @@
               <a:buNone/>
             </a:pPr>
             <a:r>
-              <a:rPr lang="en-US" sz="1250" dirty="0">
+              <a:rPr lang="en-US" sz="1200" dirty="0">
                 <a:solidFill>
                   <a:srgbClr val="FFFFFF"/>
                 </a:solidFill>
@@ -8150,9 +6364,9 @@
                 <a:ea typeface="Space Grotesk" pitchFamily="34" charset="-122"/>
                 <a:cs typeface="Space Grotesk" pitchFamily="34" charset="-120"/>
               </a:rPr>
-              <a:t>NMD2023 (laser + 2023 S2) leads overall 49.3 vs 46.3 — but v8b wins deciduous and mixed. The gap is small, not fundamental.</a:t>
-            </a:r>
-            <a:endParaRPr lang="en-US" sz="1250" dirty="0"/>
+              <a:t>Same features + NFI supervision: 0.64 (leak-free OOF). The representation sufficed — the supervision TARGET was the constraint.</a:t>
+            </a:r>
+            <a:endParaRPr lang="en-US" sz="1200" dirty="0"/>
           </a:p>
         </p:txBody>
       </p:sp>
@@ -8164,8 +6378,8 @@
         </p:nvSpPr>
         <p:spPr>
           <a:xfrm>
-            <a:off x="6400800" y="4626864"/>
-            <a:ext cx="5120640" cy="1371600"/>
+            <a:off x="6492240" y="4626864"/>
+            <a:ext cx="5029200" cy="1371600"/>
           </a:xfrm>
           <a:prstGeom prst="roundRect">
             <a:avLst>
@@ -8186,8 +6400,8 @@
         </p:nvSpPr>
         <p:spPr>
           <a:xfrm>
-            <a:off x="6675120" y="4773168"/>
-            <a:ext cx="4617720" cy="411480"/>
+            <a:off x="6766560" y="4754880"/>
+            <a:ext cx="4526280" cy="411480"/>
           </a:xfrm>
           <a:prstGeom prst="rect">
             <a:avLst/>
@@ -8203,7 +6417,7 @@
               <a:buNone/>
             </a:pPr>
             <a:r>
-              <a:rPr lang="en-US" sz="1700" b="1" dirty="0">
+              <a:rPr lang="en-US" sz="1650" b="1" dirty="0">
                 <a:solidFill>
                   <a:srgbClr val="FF826C"/>
                 </a:solidFill>
@@ -8211,9 +6425,9 @@
                 <a:ea typeface="Space Grotesk" pitchFamily="34" charset="-122"/>
                 <a:cs typeface="Space Grotesk" pitchFamily="34" charset="-120"/>
               </a:rPr>
-              <a:t>Next: train on NMD2023</a:t>
-            </a:r>
-            <a:endParaRPr lang="en-US" sz="1700" dirty="0"/>
+              <a:t>Production recommendation</a:t>
+            </a:r>
+            <a:endParaRPr lang="en-US" sz="1650" dirty="0"/>
           </a:p>
         </p:txBody>
       </p:sp>
@@ -8225,8 +6439,8 @@
         </p:nvSpPr>
         <p:spPr>
           <a:xfrm>
-            <a:off x="6675120" y="5202936"/>
-            <a:ext cx="4617720" cy="749808"/>
+            <a:off x="6766560" y="5175504"/>
+            <a:ext cx="4526280" cy="777240"/>
           </a:xfrm>
           <a:prstGeom prst="rect">
             <a:avLst/>
@@ -8242,7 +6456,7 @@
               <a:buNone/>
             </a:pPr>
             <a:r>
-              <a:rPr lang="en-US" sz="1250" dirty="0">
+              <a:rPr lang="en-US" sz="1200" dirty="0">
                 <a:solidFill>
                   <a:srgbClr val="FFFFFF"/>
                 </a:solidFill>
@@ -8250,9 +6464,9 @@
                 <a:ea typeface="Space Grotesk" pitchFamily="34" charset="-122"/>
                 <a:cs typeface="Space Grotesk" pitchFamily="34" charset="-120"/>
               </a:rPr>
-              <a:t>The same denoising should lift an NMD2023-trained v8b above NMD2023. Rebuild labels on the NMD2023 base, match 2023 spectral, fine-tune.</a:t>
-            </a:r>
-            <a:endParaRPr lang="en-US" sz="1250" dirty="0"/>
+              <a:t>Distilled 28-class base + the fraction head as a forest-type layer (hard mask decides forest/non-forest, fractions decide type).</a:t>
+            </a:r>
+            <a:endParaRPr lang="en-US" sz="1200" dirty="0"/>
           </a:p>
         </p:txBody>
       </p:sp>
@@ -8265,7 +6479,7 @@
         <p:spPr>
           <a:xfrm>
             <a:off x="640080" y="6263640"/>
-            <a:ext cx="10972800" cy="457200"/>
+            <a:ext cx="11155680" cy="457200"/>
           </a:xfrm>
           <a:prstGeom prst="rect">
             <a:avLst/>
@@ -8281,7 +6495,7 @@
               <a:buNone/>
             </a:pPr>
             <a:r>
-              <a:rPr lang="en-US" sz="1250" i="1" dirty="0">
+              <a:rPr lang="en-US" sz="1150" i="1" dirty="0">
                 <a:solidFill>
                   <a:srgbClr val="9DBDB0"/>
                 </a:solidFill>
@@ -8289,9 +6503,9 @@
                 <a:ea typeface="Space Grotesk" pitchFamily="34" charset="-122"/>
                 <a:cs typeface="Space Grotesk" pitchFamily="34" charset="-120"/>
               </a:rPr>
-              <a:t>All figures on the same 912 NFI plots where NMD2023 v2.1 has coverage. 4-way forest type in a 10 m pixel against a field plot is genuinely hard — for every method.</a:t>
-            </a:r>
-            <a:endParaRPr lang="en-US" sz="1250" dirty="0"/>
+              <a:t>All held-out figures: 209 plots, grouped tile split, calibration on the train side only. Detail: docs/data/{distill,tradslag_fraction,hybrid_nfi_head}_finding.md</a:t>
+            </a:r>
+            <a:endParaRPr lang="en-US" sz="1150" dirty="0"/>
           </a:p>
         </p:txBody>
       </p:sp>

--- a/docs/decks/v8b_nmd_benchmark_DES_en.pptx
+++ b/docs/decks/v8b_nmd_benchmark_DES_en.pptx
@@ -2499,7 +2499,7 @@
                 <a:ea typeface="Space Grotesk" pitchFamily="34" charset="-122"/>
                 <a:cs typeface="Space Grotesk" pitchFamily="34" charset="-120"/>
               </a:rPr>
-              <a:t>Example — NMD2023 vs the model</a:t>
+              <a:t>Four generations — same landscape</a:t>
             </a:r>
             <a:endParaRPr lang="en-US" sz="3200" dirty="0"/>
           </a:p>
@@ -2514,7 +2514,7 @@
         <p:spPr>
           <a:xfrm>
             <a:off x="658368" y="1133856"/>
-            <a:ext cx="10972800" cy="365760"/>
+            <a:ext cx="11155680" cy="365760"/>
           </a:xfrm>
           <a:prstGeom prst="rect">
             <a:avLst/>
@@ -2530,7 +2530,7 @@
               <a:buNone/>
             </a:pPr>
             <a:r>
-              <a:rPr lang="en-US" sz="1350" dirty="0">
+              <a:rPr lang="en-US" sz="1300" dirty="0">
                 <a:solidFill>
                   <a:srgbClr val="9DBDB0"/>
                 </a:solidFill>
@@ -2538,9 +2538,9 @@
                 <a:ea typeface="Space Grotesk" pitchFamily="34" charset="-122"/>
                 <a:cs typeface="Space Grotesk" pitchFamily="34" charset="-120"/>
               </a:rPr>
-              <a:t>One 5×5 km tile, unified palette (tile_331280_6541280). Left: NMD2023-based label. Right: distilled model.</a:t>
-            </a:r>
-            <a:endParaRPr lang="en-US" sz="1350" dirty="0"/>
+              <a:t>One 5×5 km tile, identical extent and unified palette (tile_331280_6541280): the 2018/2023 label sources and the models trained against each target.</a:t>
+            </a:r>
+            <a:endParaRPr lang="en-US" sz="1300" dirty="0"/>
           </a:p>
         </p:txBody>
       </p:sp>
@@ -2560,17 +2560,56 @@
         </p:blipFill>
         <p:spPr>
           <a:xfrm>
-            <a:off x="1737360" y="1737360"/>
-            <a:ext cx="3520440" cy="3520440"/>
+            <a:off x="493776" y="1783080"/>
+            <a:ext cx="2697480" cy="2697480"/>
           </a:xfrm>
           <a:prstGeom prst="rect">
             <a:avLst/>
           </a:prstGeom>
         </p:spPr>
       </p:pic>
+      <p:sp>
+        <p:nvSpPr>
+          <p:cNvPr id="6" name="Text 3"/>
+          <p:cNvSpPr/>
+          <p:nvPr/>
+        </p:nvSpPr>
+        <p:spPr>
+          <a:xfrm>
+            <a:off x="448056" y="4535424"/>
+            <a:ext cx="2788920" cy="320040"/>
+          </a:xfrm>
+          <a:prstGeom prst="rect">
+            <a:avLst/>
+          </a:prstGeom>
+          <a:noFill/>
+          <a:ln/>
+        </p:spPr>
+        <p:txBody>
+          <a:bodyPr wrap="square" lIns="0" tIns="0" rIns="0" bIns="0" rtlCol="0" anchor="ctr"/>
+          <a:lstStyle/>
+          <a:p>
+            <a:pPr algn="ctr" indent="0" marL="0">
+              <a:buNone/>
+            </a:pPr>
+            <a:r>
+              <a:rPr lang="en-US" sz="1250" b="1" dirty="0">
+                <a:solidFill>
+                  <a:srgbClr val="9DBDB0"/>
+                </a:solidFill>
+                <a:latin typeface="Space Grotesk" pitchFamily="34" charset="0"/>
+                <a:ea typeface="Space Grotesk" pitchFamily="34" charset="-122"/>
+                <a:cs typeface="Space Grotesk" pitchFamily="34" charset="-120"/>
+              </a:rPr>
+              <a:t>NMD2018 label</a:t>
+            </a:r>
+            <a:endParaRPr lang="en-US" sz="1250" dirty="0"/>
+          </a:p>
+        </p:txBody>
+      </p:sp>
       <p:pic>
         <p:nvPicPr>
-          <p:cNvPr id="6" name="Image 1" descr="preencoded.png">    </p:cNvPr>
+          <p:cNvPr id="7" name="Image 1" descr="preencoded.png">    </p:cNvPr>
           <p:cNvPicPr>
             <a:picLocks noChangeAspect="1"/>
           </p:cNvPicPr>
@@ -2584,8 +2623,8 @@
         </p:blipFill>
         <p:spPr>
           <a:xfrm>
-            <a:off x="6995160" y="1737360"/>
-            <a:ext cx="3520440" cy="3520440"/>
+            <a:off x="3328416" y="1783080"/>
+            <a:ext cx="2697480" cy="2697480"/>
           </a:xfrm>
           <a:prstGeom prst="rect">
             <a:avLst/>
@@ -2594,14 +2633,14 @@
       </p:pic>
       <p:sp>
         <p:nvSpPr>
-          <p:cNvPr id="7" name="Text 3"/>
-          <p:cNvSpPr/>
-          <p:nvPr/>
-        </p:nvSpPr>
-        <p:spPr>
-          <a:xfrm>
-            <a:off x="1737360" y="5330952"/>
-            <a:ext cx="3520440" cy="365760"/>
+          <p:cNvPr id="8" name="Text 4"/>
+          <p:cNvSpPr/>
+          <p:nvPr/>
+        </p:nvSpPr>
+        <p:spPr>
+          <a:xfrm>
+            <a:off x="3282696" y="4535424"/>
+            <a:ext cx="2788920" cy="320040"/>
           </a:xfrm>
           <a:prstGeom prst="rect">
             <a:avLst/>
@@ -2617,7 +2656,70 @@
               <a:buNone/>
             </a:pPr>
             <a:r>
-              <a:rPr lang="en-US" sz="1500" b="1" dirty="0">
+              <a:rPr lang="en-US" sz="1250" b="1" dirty="0">
+                <a:solidFill>
+                  <a:srgbClr val="FFFFFF"/>
+                </a:solidFill>
+                <a:latin typeface="Space Grotesk" pitchFamily="34" charset="0"/>
+                <a:ea typeface="Space Grotesk" pitchFamily="34" charset="-122"/>
+                <a:cs typeface="Space Grotesk" pitchFamily="34" charset="-120"/>
+              </a:rPr>
+              <a:t>v8b (trained on 2018)</a:t>
+            </a:r>
+            <a:endParaRPr lang="en-US" sz="1250" dirty="0"/>
+          </a:p>
+        </p:txBody>
+      </p:sp>
+      <p:pic>
+        <p:nvPicPr>
+          <p:cNvPr id="9" name="Image 2" descr="preencoded.png">    </p:cNvPr>
+          <p:cNvPicPr>
+            <a:picLocks noChangeAspect="1"/>
+          </p:cNvPicPr>
+          <p:nvPr/>
+        </p:nvPicPr>
+        <p:blipFill>
+          <a:blip r:embed="rId3"/>
+          <a:stretch>
+            <a:fillRect/>
+          </a:stretch>
+        </p:blipFill>
+        <p:spPr>
+          <a:xfrm>
+            <a:off x="6163056" y="1783080"/>
+            <a:ext cx="2697480" cy="2697480"/>
+          </a:xfrm>
+          <a:prstGeom prst="rect">
+            <a:avLst/>
+          </a:prstGeom>
+        </p:spPr>
+      </p:pic>
+      <p:sp>
+        <p:nvSpPr>
+          <p:cNvPr id="10" name="Text 5"/>
+          <p:cNvSpPr/>
+          <p:nvPr/>
+        </p:nvSpPr>
+        <p:spPr>
+          <a:xfrm>
+            <a:off x="6117336" y="4535424"/>
+            <a:ext cx="2788920" cy="320040"/>
+          </a:xfrm>
+          <a:prstGeom prst="rect">
+            <a:avLst/>
+          </a:prstGeom>
+          <a:noFill/>
+          <a:ln/>
+        </p:spPr>
+        <p:txBody>
+          <a:bodyPr wrap="square" lIns="0" tIns="0" rIns="0" bIns="0" rtlCol="0" anchor="ctr"/>
+          <a:lstStyle/>
+          <a:p>
+            <a:pPr algn="ctr" indent="0" marL="0">
+              <a:buNone/>
+            </a:pPr>
+            <a:r>
+              <a:rPr lang="en-US" sz="1250" b="1" dirty="0">
                 <a:solidFill>
                   <a:srgbClr val="CDFCE3"/>
                 </a:solidFill>
@@ -2627,20 +2729,44 @@
               </a:rPr>
               <a:t>NMD2023 label</a:t>
             </a:r>
-            <a:endParaRPr lang="en-US" sz="1500" dirty="0"/>
-          </a:p>
-        </p:txBody>
-      </p:sp>
-      <p:sp>
-        <p:nvSpPr>
-          <p:cNvPr id="8" name="Text 4"/>
-          <p:cNvSpPr/>
-          <p:nvPr/>
-        </p:nvSpPr>
-        <p:spPr>
-          <a:xfrm>
-            <a:off x="6995160" y="5330952"/>
-            <a:ext cx="3520440" cy="365760"/>
+            <a:endParaRPr lang="en-US" sz="1250" dirty="0"/>
+          </a:p>
+        </p:txBody>
+      </p:sp>
+      <p:pic>
+        <p:nvPicPr>
+          <p:cNvPr id="11" name="Image 3" descr="preencoded.png">    </p:cNvPr>
+          <p:cNvPicPr>
+            <a:picLocks noChangeAspect="1"/>
+          </p:cNvPicPr>
+          <p:nvPr/>
+        </p:nvPicPr>
+        <p:blipFill>
+          <a:blip r:embed="rId4"/>
+          <a:stretch>
+            <a:fillRect/>
+          </a:stretch>
+        </p:blipFill>
+        <p:spPr>
+          <a:xfrm>
+            <a:off x="8997696" y="1783080"/>
+            <a:ext cx="2697480" cy="2697480"/>
+          </a:xfrm>
+          <a:prstGeom prst="rect">
+            <a:avLst/>
+          </a:prstGeom>
+        </p:spPr>
+      </p:pic>
+      <p:sp>
+        <p:nvSpPr>
+          <p:cNvPr id="12" name="Text 6"/>
+          <p:cNvSpPr/>
+          <p:nvPr/>
+        </p:nvSpPr>
+        <p:spPr>
+          <a:xfrm>
+            <a:off x="8951976" y="4535424"/>
+            <a:ext cx="2788920" cy="320040"/>
           </a:xfrm>
           <a:prstGeom prst="rect">
             <a:avLst/>
@@ -2656,7 +2782,7 @@
               <a:buNone/>
             </a:pPr>
             <a:r>
-              <a:rPr lang="en-US" sz="1500" b="1" dirty="0">
+              <a:rPr lang="en-US" sz="1250" b="1" dirty="0">
                 <a:solidFill>
                   <a:srgbClr val="FF826C"/>
                 </a:solidFill>
@@ -2666,19 +2792,19 @@
               </a:rPr>
               <a:t>v8b-NFI (distilled)</a:t>
             </a:r>
-            <a:endParaRPr lang="en-US" sz="1500" dirty="0"/>
-          </a:p>
-        </p:txBody>
-      </p:sp>
-      <p:sp>
-        <p:nvSpPr>
-          <p:cNvPr id="9" name="Shape 5"/>
-          <p:cNvSpPr/>
-          <p:nvPr/>
-        </p:nvSpPr>
-        <p:spPr>
-          <a:xfrm>
-            <a:off x="685800" y="6007608"/>
+            <a:endParaRPr lang="en-US" sz="1250" dirty="0"/>
+          </a:p>
+        </p:txBody>
+      </p:sp>
+      <p:sp>
+        <p:nvSpPr>
+          <p:cNvPr id="13" name="Shape 7"/>
+          <p:cNvSpPr/>
+          <p:nvPr/>
+        </p:nvSpPr>
+        <p:spPr>
+          <a:xfrm>
+            <a:off x="685800" y="5276088"/>
             <a:ext cx="182880" cy="182880"/>
           </a:xfrm>
           <a:prstGeom prst="rect">
@@ -2692,13 +2818,13 @@
       </p:sp>
       <p:sp>
         <p:nvSpPr>
-          <p:cNvPr id="10" name="Text 6"/>
-          <p:cNvSpPr/>
-          <p:nvPr/>
-        </p:nvSpPr>
-        <p:spPr>
-          <a:xfrm>
-            <a:off x="960120" y="5961888"/>
+          <p:cNvPr id="14" name="Text 8"/>
+          <p:cNvSpPr/>
+          <p:nvPr/>
+        </p:nvSpPr>
+        <p:spPr>
+          <a:xfrm>
+            <a:off x="960120" y="5230368"/>
             <a:ext cx="2286000" cy="274320"/>
           </a:xfrm>
           <a:prstGeom prst="rect">
@@ -2731,13 +2857,13 @@
       </p:sp>
       <p:sp>
         <p:nvSpPr>
-          <p:cNvPr id="11" name="Shape 7"/>
-          <p:cNvSpPr/>
-          <p:nvPr/>
-        </p:nvSpPr>
-        <p:spPr>
-          <a:xfrm>
-            <a:off x="3429000" y="6007608"/>
+          <p:cNvPr id="15" name="Shape 9"/>
+          <p:cNvSpPr/>
+          <p:nvPr/>
+        </p:nvSpPr>
+        <p:spPr>
+          <a:xfrm>
+            <a:off x="3429000" y="5276088"/>
             <a:ext cx="182880" cy="182880"/>
           </a:xfrm>
           <a:prstGeom prst="rect">
@@ -2751,13 +2877,13 @@
       </p:sp>
       <p:sp>
         <p:nvSpPr>
-          <p:cNvPr id="12" name="Text 8"/>
-          <p:cNvSpPr/>
-          <p:nvPr/>
-        </p:nvSpPr>
-        <p:spPr>
-          <a:xfrm>
-            <a:off x="3703320" y="5961888"/>
+          <p:cNvPr id="16" name="Text 10"/>
+          <p:cNvSpPr/>
+          <p:nvPr/>
+        </p:nvSpPr>
+        <p:spPr>
+          <a:xfrm>
+            <a:off x="3703320" y="5230368"/>
             <a:ext cx="2286000" cy="274320"/>
           </a:xfrm>
           <a:prstGeom prst="rect">
@@ -2790,13 +2916,13 @@
       </p:sp>
       <p:sp>
         <p:nvSpPr>
-          <p:cNvPr id="13" name="Shape 9"/>
-          <p:cNvSpPr/>
-          <p:nvPr/>
-        </p:nvSpPr>
-        <p:spPr>
-          <a:xfrm>
-            <a:off x="6172200" y="6007608"/>
+          <p:cNvPr id="17" name="Shape 11"/>
+          <p:cNvSpPr/>
+          <p:nvPr/>
+        </p:nvSpPr>
+        <p:spPr>
+          <a:xfrm>
+            <a:off x="6172200" y="5276088"/>
             <a:ext cx="182880" cy="182880"/>
           </a:xfrm>
           <a:prstGeom prst="rect">
@@ -2810,13 +2936,13 @@
       </p:sp>
       <p:sp>
         <p:nvSpPr>
-          <p:cNvPr id="14" name="Text 10"/>
-          <p:cNvSpPr/>
-          <p:nvPr/>
-        </p:nvSpPr>
-        <p:spPr>
-          <a:xfrm>
-            <a:off x="6446520" y="5961888"/>
+          <p:cNvPr id="18" name="Text 12"/>
+          <p:cNvSpPr/>
+          <p:nvPr/>
+        </p:nvSpPr>
+        <p:spPr>
+          <a:xfrm>
+            <a:off x="6446520" y="5230368"/>
             <a:ext cx="2286000" cy="274320"/>
           </a:xfrm>
           <a:prstGeom prst="rect">
@@ -2849,13 +2975,13 @@
       </p:sp>
       <p:sp>
         <p:nvSpPr>
-          <p:cNvPr id="15" name="Shape 11"/>
-          <p:cNvSpPr/>
-          <p:nvPr/>
-        </p:nvSpPr>
-        <p:spPr>
-          <a:xfrm>
-            <a:off x="8915400" y="6007608"/>
+          <p:cNvPr id="19" name="Shape 13"/>
+          <p:cNvSpPr/>
+          <p:nvPr/>
+        </p:nvSpPr>
+        <p:spPr>
+          <a:xfrm>
+            <a:off x="8915400" y="5276088"/>
             <a:ext cx="182880" cy="182880"/>
           </a:xfrm>
           <a:prstGeom prst="rect">
@@ -2869,13 +2995,13 @@
       </p:sp>
       <p:sp>
         <p:nvSpPr>
-          <p:cNvPr id="16" name="Text 12"/>
-          <p:cNvSpPr/>
-          <p:nvPr/>
-        </p:nvSpPr>
-        <p:spPr>
-          <a:xfrm>
-            <a:off x="9189720" y="5961888"/>
+          <p:cNvPr id="20" name="Text 14"/>
+          <p:cNvSpPr/>
+          <p:nvPr/>
+        </p:nvSpPr>
+        <p:spPr>
+          <a:xfrm>
+            <a:off x="9189720" y="5230368"/>
             <a:ext cx="2286000" cy="274320"/>
           </a:xfrm>
           <a:prstGeom prst="rect">
@@ -2908,13 +3034,13 @@
       </p:sp>
       <p:sp>
         <p:nvSpPr>
-          <p:cNvPr id="17" name="Shape 13"/>
-          <p:cNvSpPr/>
-          <p:nvPr/>
-        </p:nvSpPr>
-        <p:spPr>
-          <a:xfrm>
-            <a:off x="685800" y="6300216"/>
+          <p:cNvPr id="21" name="Shape 15"/>
+          <p:cNvSpPr/>
+          <p:nvPr/>
+        </p:nvSpPr>
+        <p:spPr>
+          <a:xfrm>
+            <a:off x="685800" y="5568696"/>
             <a:ext cx="182880" cy="182880"/>
           </a:xfrm>
           <a:prstGeom prst="rect">
@@ -2928,13 +3054,13 @@
       </p:sp>
       <p:sp>
         <p:nvSpPr>
-          <p:cNvPr id="18" name="Text 14"/>
-          <p:cNvSpPr/>
-          <p:nvPr/>
-        </p:nvSpPr>
-        <p:spPr>
-          <a:xfrm>
-            <a:off x="960120" y="6254496"/>
+          <p:cNvPr id="22" name="Text 16"/>
+          <p:cNvSpPr/>
+          <p:nvPr/>
+        </p:nvSpPr>
+        <p:spPr>
+          <a:xfrm>
+            <a:off x="960120" y="5522976"/>
             <a:ext cx="2286000" cy="274320"/>
           </a:xfrm>
           <a:prstGeom prst="rect">
@@ -2967,13 +3093,13 @@
       </p:sp>
       <p:sp>
         <p:nvSpPr>
-          <p:cNvPr id="19" name="Shape 15"/>
-          <p:cNvSpPr/>
-          <p:nvPr/>
-        </p:nvSpPr>
-        <p:spPr>
-          <a:xfrm>
-            <a:off x="3429000" y="6300216"/>
+          <p:cNvPr id="23" name="Shape 17"/>
+          <p:cNvSpPr/>
+          <p:nvPr/>
+        </p:nvSpPr>
+        <p:spPr>
+          <a:xfrm>
+            <a:off x="3429000" y="5568696"/>
             <a:ext cx="182880" cy="182880"/>
           </a:xfrm>
           <a:prstGeom prst="rect">
@@ -2987,13 +3113,13 @@
       </p:sp>
       <p:sp>
         <p:nvSpPr>
-          <p:cNvPr id="20" name="Text 16"/>
-          <p:cNvSpPr/>
-          <p:nvPr/>
-        </p:nvSpPr>
-        <p:spPr>
-          <a:xfrm>
-            <a:off x="3703320" y="6254496"/>
+          <p:cNvPr id="24" name="Text 18"/>
+          <p:cNvSpPr/>
+          <p:nvPr/>
+        </p:nvSpPr>
+        <p:spPr>
+          <a:xfrm>
+            <a:off x="3703320" y="5522976"/>
             <a:ext cx="2286000" cy="274320"/>
           </a:xfrm>
           <a:prstGeom prst="rect">
@@ -3026,13 +3152,13 @@
       </p:sp>
       <p:sp>
         <p:nvSpPr>
-          <p:cNvPr id="21" name="Shape 17"/>
-          <p:cNvSpPr/>
-          <p:nvPr/>
-        </p:nvSpPr>
-        <p:spPr>
-          <a:xfrm>
-            <a:off x="6172200" y="6300216"/>
+          <p:cNvPr id="25" name="Shape 19"/>
+          <p:cNvSpPr/>
+          <p:nvPr/>
+        </p:nvSpPr>
+        <p:spPr>
+          <a:xfrm>
+            <a:off x="6172200" y="5568696"/>
             <a:ext cx="182880" cy="182880"/>
           </a:xfrm>
           <a:prstGeom prst="rect">
@@ -3046,13 +3172,13 @@
       </p:sp>
       <p:sp>
         <p:nvSpPr>
-          <p:cNvPr id="22" name="Text 18"/>
-          <p:cNvSpPr/>
-          <p:nvPr/>
-        </p:nvSpPr>
-        <p:spPr>
-          <a:xfrm>
-            <a:off x="6446520" y="6254496"/>
+          <p:cNvPr id="26" name="Text 20"/>
+          <p:cNvSpPr/>
+          <p:nvPr/>
+        </p:nvSpPr>
+        <p:spPr>
+          <a:xfrm>
+            <a:off x="6446520" y="5522976"/>
             <a:ext cx="2286000" cy="274320"/>
           </a:xfrm>
           <a:prstGeom prst="rect">
@@ -3085,13 +3211,13 @@
       </p:sp>
       <p:sp>
         <p:nvSpPr>
-          <p:cNvPr id="23" name="Shape 19"/>
-          <p:cNvSpPr/>
-          <p:nvPr/>
-        </p:nvSpPr>
-        <p:spPr>
-          <a:xfrm>
-            <a:off x="8915400" y="6300216"/>
+          <p:cNvPr id="27" name="Shape 21"/>
+          <p:cNvSpPr/>
+          <p:nvPr/>
+        </p:nvSpPr>
+        <p:spPr>
+          <a:xfrm>
+            <a:off x="8915400" y="5568696"/>
             <a:ext cx="182880" cy="182880"/>
           </a:xfrm>
           <a:prstGeom prst="rect">
@@ -3105,13 +3231,13 @@
       </p:sp>
       <p:sp>
         <p:nvSpPr>
-          <p:cNvPr id="24" name="Text 20"/>
-          <p:cNvSpPr/>
-          <p:nvPr/>
-        </p:nvSpPr>
-        <p:spPr>
-          <a:xfrm>
-            <a:off x="9189720" y="6254496"/>
+          <p:cNvPr id="28" name="Text 22"/>
+          <p:cNvSpPr/>
+          <p:nvPr/>
+        </p:nvSpPr>
+        <p:spPr>
+          <a:xfrm>
+            <a:off x="9189720" y="5522976"/>
             <a:ext cx="2286000" cy="274320"/>
           </a:xfrm>
           <a:prstGeom prst="rect">
@@ -3144,13 +3270,13 @@
       </p:sp>
       <p:sp>
         <p:nvSpPr>
-          <p:cNvPr id="25" name="Shape 21"/>
-          <p:cNvSpPr/>
-          <p:nvPr/>
-        </p:nvSpPr>
-        <p:spPr>
-          <a:xfrm>
-            <a:off x="685800" y="6592824"/>
+          <p:cNvPr id="29" name="Shape 23"/>
+          <p:cNvSpPr/>
+          <p:nvPr/>
+        </p:nvSpPr>
+        <p:spPr>
+          <a:xfrm>
+            <a:off x="685800" y="5861304"/>
             <a:ext cx="182880" cy="182880"/>
           </a:xfrm>
           <a:prstGeom prst="rect">
@@ -3164,13 +3290,13 @@
       </p:sp>
       <p:sp>
         <p:nvSpPr>
-          <p:cNvPr id="26" name="Text 22"/>
-          <p:cNvSpPr/>
-          <p:nvPr/>
-        </p:nvSpPr>
-        <p:spPr>
-          <a:xfrm>
-            <a:off x="960120" y="6547104"/>
+          <p:cNvPr id="30" name="Text 24"/>
+          <p:cNvSpPr/>
+          <p:nvPr/>
+        </p:nvSpPr>
+        <p:spPr>
+          <a:xfrm>
+            <a:off x="960120" y="5815584"/>
             <a:ext cx="2286000" cy="274320"/>
           </a:xfrm>
           <a:prstGeom prst="rect">
@@ -3203,13 +3329,13 @@
       </p:sp>
       <p:sp>
         <p:nvSpPr>
-          <p:cNvPr id="27" name="Shape 23"/>
-          <p:cNvSpPr/>
-          <p:nvPr/>
-        </p:nvSpPr>
-        <p:spPr>
-          <a:xfrm>
-            <a:off x="3429000" y="6592824"/>
+          <p:cNvPr id="31" name="Shape 25"/>
+          <p:cNvSpPr/>
+          <p:nvPr/>
+        </p:nvSpPr>
+        <p:spPr>
+          <a:xfrm>
+            <a:off x="3429000" y="5861304"/>
             <a:ext cx="182880" cy="182880"/>
           </a:xfrm>
           <a:prstGeom prst="rect">
@@ -3223,13 +3349,13 @@
       </p:sp>
       <p:sp>
         <p:nvSpPr>
-          <p:cNvPr id="28" name="Text 24"/>
-          <p:cNvSpPr/>
-          <p:nvPr/>
-        </p:nvSpPr>
-        <p:spPr>
-          <a:xfrm>
-            <a:off x="3703320" y="6547104"/>
+          <p:cNvPr id="32" name="Text 26"/>
+          <p:cNvSpPr/>
+          <p:nvPr/>
+        </p:nvSpPr>
+        <p:spPr>
+          <a:xfrm>
+            <a:off x="3703320" y="5815584"/>
             <a:ext cx="2286000" cy="274320"/>
           </a:xfrm>
           <a:prstGeom prst="rect">
@@ -3262,13 +3388,13 @@
       </p:sp>
       <p:sp>
         <p:nvSpPr>
-          <p:cNvPr id="29" name="Shape 25"/>
-          <p:cNvSpPr/>
-          <p:nvPr/>
-        </p:nvSpPr>
-        <p:spPr>
-          <a:xfrm>
-            <a:off x="6172200" y="6592824"/>
+          <p:cNvPr id="33" name="Shape 27"/>
+          <p:cNvSpPr/>
+          <p:nvPr/>
+        </p:nvSpPr>
+        <p:spPr>
+          <a:xfrm>
+            <a:off x="6172200" y="5861304"/>
             <a:ext cx="182880" cy="182880"/>
           </a:xfrm>
           <a:prstGeom prst="rect">
@@ -3282,13 +3408,13 @@
       </p:sp>
       <p:sp>
         <p:nvSpPr>
-          <p:cNvPr id="30" name="Text 26"/>
-          <p:cNvSpPr/>
-          <p:nvPr/>
-        </p:nvSpPr>
-        <p:spPr>
-          <a:xfrm>
-            <a:off x="6446520" y="6547104"/>
+          <p:cNvPr id="34" name="Text 28"/>
+          <p:cNvSpPr/>
+          <p:nvPr/>
+        </p:nvSpPr>
+        <p:spPr>
+          <a:xfrm>
+            <a:off x="6446520" y="5815584"/>
             <a:ext cx="2286000" cy="274320"/>
           </a:xfrm>
           <a:prstGeom prst="rect">
@@ -3321,13 +3447,13 @@
       </p:sp>
       <p:sp>
         <p:nvSpPr>
-          <p:cNvPr id="31" name="Shape 27"/>
-          <p:cNvSpPr/>
-          <p:nvPr/>
-        </p:nvSpPr>
-        <p:spPr>
-          <a:xfrm>
-            <a:off x="8915400" y="6592824"/>
+          <p:cNvPr id="35" name="Shape 29"/>
+          <p:cNvSpPr/>
+          <p:nvPr/>
+        </p:nvSpPr>
+        <p:spPr>
+          <a:xfrm>
+            <a:off x="8915400" y="5861304"/>
             <a:ext cx="182880" cy="182880"/>
           </a:xfrm>
           <a:prstGeom prst="rect">
@@ -3341,13 +3467,13 @@
       </p:sp>
       <p:sp>
         <p:nvSpPr>
-          <p:cNvPr id="32" name="Text 28"/>
-          <p:cNvSpPr/>
-          <p:nvPr/>
-        </p:nvSpPr>
-        <p:spPr>
-          <a:xfrm>
-            <a:off x="9189720" y="6547104"/>
+          <p:cNvPr id="36" name="Text 30"/>
+          <p:cNvSpPr/>
+          <p:nvPr/>
+        </p:nvSpPr>
+        <p:spPr>
+          <a:xfrm>
+            <a:off x="9189720" y="5815584"/>
             <a:ext cx="2286000" cy="274320"/>
           </a:xfrm>
           <a:prstGeom prst="rect">
